--- a/Boek 1 - Grondslagen, vraag en aanbod/1.1 Hoofdstuk Economisch denken en rekenen/1.1.3 Grafieken en tabellen/1.1.3 Grafieken en tabellen – presentatie.pptx
+++ b/Boek 1 - Grondslagen, vraag en aanbod/1.1 Hoofdstuk Economisch denken en rekenen/1.1.3 Grafieken en tabellen/1.1.3 Grafieken en tabellen – presentatie.pptx
@@ -1349,20 +1349,18 @@
         </p:nvSpPr>
         <p:spPr>
           <a:xfrm>
-            <a:off x="914400" y="1965960"/>
-            <a:ext cx="10058400" cy="457200"/>
-          </a:xfrm>
-          <a:prstGeom prst="roundRect">
-            <a:avLst>
-              <a:gd name="adj" fmla="val 16000"/>
-            </a:avLst>
-          </a:prstGeom>
-          <a:solidFill>
-            <a:srgbClr val="ECFEFF"/>
+            <a:off x="822960" y="1874520"/>
+            <a:ext cx="2011680" cy="373380"/>
+          </a:xfrm>
+          <a:prstGeom prst="rect">
+            <a:avLst/>
+          </a:prstGeom>
+          <a:solidFill>
+            <a:srgbClr val="DDF7EF"/>
           </a:solidFill>
           <a:ln w="12700">
             <a:solidFill>
-              <a:srgbClr val="BAE6FD"/>
+              <a:srgbClr val="CBD5E1"/>
             </a:solidFill>
             <a:prstDash val="solid"/>
           </a:ln>
@@ -1376,8 +1374,8 @@
         </p:nvSpPr>
         <p:spPr>
           <a:xfrm>
-            <a:off x="1143000" y="2084832"/>
-            <a:ext cx="9509760" cy="182880"/>
+            <a:off x="877824" y="1938528"/>
+            <a:ext cx="1901952" cy="300228"/>
           </a:xfrm>
           <a:prstGeom prst="rect">
             <a:avLst/>
@@ -1395,14 +1393,14 @@
               <a:buNone/>
             </a:pPr>
             <a:r>
-              <a:rPr lang="en-US" sz="1500" dirty="0">
+              <a:rPr lang="en-US" sz="1100" b="1" dirty="0">
                 <a:solidFill>
                   <a:srgbClr val="102A43"/>
                 </a:solidFill>
               </a:rPr>
-              <a:t>Prijs en aantal verkochte ijsjes staan in verschillende kolommen.</a:t>
-            </a:r>
-            <a:endParaRPr lang="en-US" sz="1500" dirty="0"/>
+              <a:t>Prijs</a:t>
+            </a:r>
+            <a:endParaRPr lang="en-US" sz="1100" dirty="0"/>
           </a:p>
         </p:txBody>
       </p:sp>
@@ -1414,20 +1412,18 @@
         </p:nvSpPr>
         <p:spPr>
           <a:xfrm>
-            <a:off x="914400" y="2679192"/>
-            <a:ext cx="10058400" cy="457200"/>
-          </a:xfrm>
-          <a:prstGeom prst="roundRect">
-            <a:avLst>
-              <a:gd name="adj" fmla="val 16000"/>
-            </a:avLst>
-          </a:prstGeom>
-          <a:solidFill>
-            <a:srgbClr val="FFFFFF"/>
+            <a:off x="2834640" y="1874520"/>
+            <a:ext cx="2011680" cy="373380"/>
+          </a:xfrm>
+          <a:prstGeom prst="rect">
+            <a:avLst/>
+          </a:prstGeom>
+          <a:solidFill>
+            <a:srgbClr val="DDF7EF"/>
           </a:solidFill>
           <a:ln w="12700">
             <a:solidFill>
-              <a:srgbClr val="BAE6FD"/>
+              <a:srgbClr val="CBD5E1"/>
             </a:solidFill>
             <a:prstDash val="solid"/>
           </a:ln>
@@ -1441,8 +1437,8 @@
         </p:nvSpPr>
         <p:spPr>
           <a:xfrm>
-            <a:off x="1143000" y="2798064"/>
-            <a:ext cx="9509760" cy="182880"/>
+            <a:off x="2889504" y="1938528"/>
+            <a:ext cx="1901952" cy="300228"/>
           </a:xfrm>
           <a:prstGeom prst="rect">
             <a:avLst/>
@@ -1460,14 +1456,14 @@
               <a:buNone/>
             </a:pPr>
             <a:r>
-              <a:rPr lang="en-US" sz="1500" dirty="0">
+              <a:rPr lang="en-US" sz="1100" b="1" dirty="0">
                 <a:solidFill>
                   <a:srgbClr val="102A43"/>
                 </a:solidFill>
               </a:rPr>
-              <a:t>Een tabel ordent de data; een grafiek maakt het verband zichtbaar.</a:t>
-            </a:r>
-            <a:endParaRPr lang="en-US" sz="1500" dirty="0"/>
+              <a:t>Verkoop</a:t>
+            </a:r>
+            <a:endParaRPr lang="en-US" sz="1100" dirty="0"/>
           </a:p>
         </p:txBody>
       </p:sp>
@@ -1479,20 +1475,18 @@
         </p:nvSpPr>
         <p:spPr>
           <a:xfrm>
-            <a:off x="914400" y="3392424"/>
-            <a:ext cx="10058400" cy="457200"/>
-          </a:xfrm>
-          <a:prstGeom prst="roundRect">
-            <a:avLst>
-              <a:gd name="adj" fmla="val 16000"/>
-            </a:avLst>
-          </a:prstGeom>
-          <a:solidFill>
-            <a:srgbClr val="ECFEFF"/>
+            <a:off x="822960" y="2247900"/>
+            <a:ext cx="2011680" cy="373380"/>
+          </a:xfrm>
+          <a:prstGeom prst="rect">
+            <a:avLst/>
+          </a:prstGeom>
+          <a:solidFill>
+            <a:srgbClr val="FFF4CC"/>
           </a:solidFill>
           <a:ln w="12700">
             <a:solidFill>
-              <a:srgbClr val="BAE6FD"/>
+              <a:srgbClr val="CBD5E1"/>
             </a:solidFill>
             <a:prstDash val="solid"/>
           </a:ln>
@@ -1506,8 +1500,8 @@
         </p:nvSpPr>
         <p:spPr>
           <a:xfrm>
-            <a:off x="1143000" y="3511296"/>
-            <a:ext cx="9509760" cy="182880"/>
+            <a:off x="877824" y="2311908"/>
+            <a:ext cx="1901952" cy="300228"/>
           </a:xfrm>
           <a:prstGeom prst="rect">
             <a:avLst/>
@@ -1525,14 +1519,1172 @@
               <a:buNone/>
             </a:pPr>
             <a:r>
-              <a:rPr lang="en-US" sz="1500" dirty="0">
+              <a:rPr lang="en-US" sz="1000" b="1" dirty="0">
                 <a:solidFill>
                   <a:srgbClr val="102A43"/>
                 </a:solidFill>
               </a:rPr>
+              <a:t>EUR 1,00</a:t>
+            </a:r>
+            <a:endParaRPr lang="en-US" sz="1000" dirty="0"/>
+          </a:p>
+        </p:txBody>
+      </p:sp>
+      <p:sp>
+        <p:nvSpPr>
+          <p:cNvPr id="11" name="Shape 9"/>
+          <p:cNvSpPr/>
+          <p:nvPr/>
+        </p:nvSpPr>
+        <p:spPr>
+          <a:xfrm>
+            <a:off x="2834640" y="2247900"/>
+            <a:ext cx="2011680" cy="373380"/>
+          </a:xfrm>
+          <a:prstGeom prst="rect">
+            <a:avLst/>
+          </a:prstGeom>
+          <a:solidFill>
+            <a:srgbClr val="FFF4CC"/>
+          </a:solidFill>
+          <a:ln w="12700">
+            <a:solidFill>
+              <a:srgbClr val="CBD5E1"/>
+            </a:solidFill>
+            <a:prstDash val="solid"/>
+          </a:ln>
+        </p:spPr>
+      </p:sp>
+      <p:sp>
+        <p:nvSpPr>
+          <p:cNvPr id="12" name="Text 10"/>
+          <p:cNvSpPr/>
+          <p:nvPr/>
+        </p:nvSpPr>
+        <p:spPr>
+          <a:xfrm>
+            <a:off x="2889504" y="2311908"/>
+            <a:ext cx="1901952" cy="300228"/>
+          </a:xfrm>
+          <a:prstGeom prst="rect">
+            <a:avLst/>
+          </a:prstGeom>
+          <a:noFill/>
+          <a:ln/>
+        </p:spPr>
+        <p:txBody>
+          <a:bodyPr wrap="square" lIns="0" tIns="0" rIns="0" bIns="0" rtlCol="0" anchor="ctr">
+            <a:normAutofit/>
+          </a:bodyPr>
+          <a:lstStyle/>
+          <a:p>
+            <a:pPr indent="0" marL="0">
+              <a:buNone/>
+            </a:pPr>
+            <a:r>
+              <a:rPr lang="en-US" sz="1000" b="1" dirty="0">
+                <a:solidFill>
+                  <a:srgbClr val="102A43"/>
+                </a:solidFill>
+              </a:rPr>
+              <a:t>500</a:t>
+            </a:r>
+            <a:endParaRPr lang="en-US" sz="1000" dirty="0"/>
+          </a:p>
+        </p:txBody>
+      </p:sp>
+      <p:sp>
+        <p:nvSpPr>
+          <p:cNvPr id="13" name="Shape 11"/>
+          <p:cNvSpPr/>
+          <p:nvPr/>
+        </p:nvSpPr>
+        <p:spPr>
+          <a:xfrm>
+            <a:off x="822960" y="2621280"/>
+            <a:ext cx="2011680" cy="373380"/>
+          </a:xfrm>
+          <a:prstGeom prst="rect">
+            <a:avLst/>
+          </a:prstGeom>
+          <a:solidFill>
+            <a:srgbClr val="FFFFFF"/>
+          </a:solidFill>
+          <a:ln w="12700">
+            <a:solidFill>
+              <a:srgbClr val="CBD5E1"/>
+            </a:solidFill>
+            <a:prstDash val="solid"/>
+          </a:ln>
+        </p:spPr>
+      </p:sp>
+      <p:sp>
+        <p:nvSpPr>
+          <p:cNvPr id="14" name="Text 12"/>
+          <p:cNvSpPr/>
+          <p:nvPr/>
+        </p:nvSpPr>
+        <p:spPr>
+          <a:xfrm>
+            <a:off x="877824" y="2685288"/>
+            <a:ext cx="1901952" cy="300228"/>
+          </a:xfrm>
+          <a:prstGeom prst="rect">
+            <a:avLst/>
+          </a:prstGeom>
+          <a:noFill/>
+          <a:ln/>
+        </p:spPr>
+        <p:txBody>
+          <a:bodyPr wrap="square" lIns="0" tIns="0" rIns="0" bIns="0" rtlCol="0" anchor="ctr">
+            <a:normAutofit/>
+          </a:bodyPr>
+          <a:lstStyle/>
+          <a:p>
+            <a:pPr indent="0" marL="0">
+              <a:buNone/>
+            </a:pPr>
+            <a:r>
+              <a:rPr lang="en-US" sz="1000" dirty="0">
+                <a:solidFill>
+                  <a:srgbClr val="102A43"/>
+                </a:solidFill>
+              </a:rPr>
+              <a:t>EUR 1,50</a:t>
+            </a:r>
+            <a:endParaRPr lang="en-US" sz="1000" dirty="0"/>
+          </a:p>
+        </p:txBody>
+      </p:sp>
+      <p:sp>
+        <p:nvSpPr>
+          <p:cNvPr id="15" name="Shape 13"/>
+          <p:cNvSpPr/>
+          <p:nvPr/>
+        </p:nvSpPr>
+        <p:spPr>
+          <a:xfrm>
+            <a:off x="2834640" y="2621280"/>
+            <a:ext cx="2011680" cy="373380"/>
+          </a:xfrm>
+          <a:prstGeom prst="rect">
+            <a:avLst/>
+          </a:prstGeom>
+          <a:solidFill>
+            <a:srgbClr val="FFFFFF"/>
+          </a:solidFill>
+          <a:ln w="12700">
+            <a:solidFill>
+              <a:srgbClr val="CBD5E1"/>
+            </a:solidFill>
+            <a:prstDash val="solid"/>
+          </a:ln>
+        </p:spPr>
+      </p:sp>
+      <p:sp>
+        <p:nvSpPr>
+          <p:cNvPr id="16" name="Text 14"/>
+          <p:cNvSpPr/>
+          <p:nvPr/>
+        </p:nvSpPr>
+        <p:spPr>
+          <a:xfrm>
+            <a:off x="2889504" y="2685288"/>
+            <a:ext cx="1901952" cy="300228"/>
+          </a:xfrm>
+          <a:prstGeom prst="rect">
+            <a:avLst/>
+          </a:prstGeom>
+          <a:noFill/>
+          <a:ln/>
+        </p:spPr>
+        <p:txBody>
+          <a:bodyPr wrap="square" lIns="0" tIns="0" rIns="0" bIns="0" rtlCol="0" anchor="ctr">
+            <a:normAutofit/>
+          </a:bodyPr>
+          <a:lstStyle/>
+          <a:p>
+            <a:pPr indent="0" marL="0">
+              <a:buNone/>
+            </a:pPr>
+            <a:r>
+              <a:rPr lang="en-US" sz="1000" dirty="0">
+                <a:solidFill>
+                  <a:srgbClr val="102A43"/>
+                </a:solidFill>
+              </a:rPr>
+              <a:t>400</a:t>
+            </a:r>
+            <a:endParaRPr lang="en-US" sz="1000" dirty="0"/>
+          </a:p>
+        </p:txBody>
+      </p:sp>
+      <p:sp>
+        <p:nvSpPr>
+          <p:cNvPr id="17" name="Shape 15"/>
+          <p:cNvSpPr/>
+          <p:nvPr/>
+        </p:nvSpPr>
+        <p:spPr>
+          <a:xfrm>
+            <a:off x="822960" y="2994660"/>
+            <a:ext cx="2011680" cy="373380"/>
+          </a:xfrm>
+          <a:prstGeom prst="rect">
+            <a:avLst/>
+          </a:prstGeom>
+          <a:solidFill>
+            <a:srgbClr val="FFF4CC"/>
+          </a:solidFill>
+          <a:ln w="12700">
+            <a:solidFill>
+              <a:srgbClr val="CBD5E1"/>
+            </a:solidFill>
+            <a:prstDash val="solid"/>
+          </a:ln>
+        </p:spPr>
+      </p:sp>
+      <p:sp>
+        <p:nvSpPr>
+          <p:cNvPr id="18" name="Text 16"/>
+          <p:cNvSpPr/>
+          <p:nvPr/>
+        </p:nvSpPr>
+        <p:spPr>
+          <a:xfrm>
+            <a:off x="877824" y="3058668"/>
+            <a:ext cx="1901952" cy="300228"/>
+          </a:xfrm>
+          <a:prstGeom prst="rect">
+            <a:avLst/>
+          </a:prstGeom>
+          <a:noFill/>
+          <a:ln/>
+        </p:spPr>
+        <p:txBody>
+          <a:bodyPr wrap="square" lIns="0" tIns="0" rIns="0" bIns="0" rtlCol="0" anchor="ctr">
+            <a:normAutofit/>
+          </a:bodyPr>
+          <a:lstStyle/>
+          <a:p>
+            <a:pPr indent="0" marL="0">
+              <a:buNone/>
+            </a:pPr>
+            <a:r>
+              <a:rPr lang="en-US" sz="1000" b="1" dirty="0">
+                <a:solidFill>
+                  <a:srgbClr val="102A43"/>
+                </a:solidFill>
+              </a:rPr>
+              <a:t>EUR 2,00</a:t>
+            </a:r>
+            <a:endParaRPr lang="en-US" sz="1000" dirty="0"/>
+          </a:p>
+        </p:txBody>
+      </p:sp>
+      <p:sp>
+        <p:nvSpPr>
+          <p:cNvPr id="19" name="Shape 17"/>
+          <p:cNvSpPr/>
+          <p:nvPr/>
+        </p:nvSpPr>
+        <p:spPr>
+          <a:xfrm>
+            <a:off x="2834640" y="2994660"/>
+            <a:ext cx="2011680" cy="373380"/>
+          </a:xfrm>
+          <a:prstGeom prst="rect">
+            <a:avLst/>
+          </a:prstGeom>
+          <a:solidFill>
+            <a:srgbClr val="FFF4CC"/>
+          </a:solidFill>
+          <a:ln w="12700">
+            <a:solidFill>
+              <a:srgbClr val="CBD5E1"/>
+            </a:solidFill>
+            <a:prstDash val="solid"/>
+          </a:ln>
+        </p:spPr>
+      </p:sp>
+      <p:sp>
+        <p:nvSpPr>
+          <p:cNvPr id="20" name="Text 18"/>
+          <p:cNvSpPr/>
+          <p:nvPr/>
+        </p:nvSpPr>
+        <p:spPr>
+          <a:xfrm>
+            <a:off x="2889504" y="3058668"/>
+            <a:ext cx="1901952" cy="300228"/>
+          </a:xfrm>
+          <a:prstGeom prst="rect">
+            <a:avLst/>
+          </a:prstGeom>
+          <a:noFill/>
+          <a:ln/>
+        </p:spPr>
+        <p:txBody>
+          <a:bodyPr wrap="square" lIns="0" tIns="0" rIns="0" bIns="0" rtlCol="0" anchor="ctr">
+            <a:normAutofit/>
+          </a:bodyPr>
+          <a:lstStyle/>
+          <a:p>
+            <a:pPr indent="0" marL="0">
+              <a:buNone/>
+            </a:pPr>
+            <a:r>
+              <a:rPr lang="en-US" sz="1000" b="1" dirty="0">
+                <a:solidFill>
+                  <a:srgbClr val="102A43"/>
+                </a:solidFill>
+              </a:rPr>
+              <a:t>300</a:t>
+            </a:r>
+            <a:endParaRPr lang="en-US" sz="1000" dirty="0"/>
+          </a:p>
+        </p:txBody>
+      </p:sp>
+      <p:sp>
+        <p:nvSpPr>
+          <p:cNvPr id="21" name="Shape 19"/>
+          <p:cNvSpPr/>
+          <p:nvPr/>
+        </p:nvSpPr>
+        <p:spPr>
+          <a:xfrm>
+            <a:off x="822960" y="3368040"/>
+            <a:ext cx="2011680" cy="373380"/>
+          </a:xfrm>
+          <a:prstGeom prst="rect">
+            <a:avLst/>
+          </a:prstGeom>
+          <a:solidFill>
+            <a:srgbClr val="FFFFFF"/>
+          </a:solidFill>
+          <a:ln w="12700">
+            <a:solidFill>
+              <a:srgbClr val="CBD5E1"/>
+            </a:solidFill>
+            <a:prstDash val="solid"/>
+          </a:ln>
+        </p:spPr>
+      </p:sp>
+      <p:sp>
+        <p:nvSpPr>
+          <p:cNvPr id="22" name="Text 20"/>
+          <p:cNvSpPr/>
+          <p:nvPr/>
+        </p:nvSpPr>
+        <p:spPr>
+          <a:xfrm>
+            <a:off x="877824" y="3432048"/>
+            <a:ext cx="1901952" cy="300228"/>
+          </a:xfrm>
+          <a:prstGeom prst="rect">
+            <a:avLst/>
+          </a:prstGeom>
+          <a:noFill/>
+          <a:ln/>
+        </p:spPr>
+        <p:txBody>
+          <a:bodyPr wrap="square" lIns="0" tIns="0" rIns="0" bIns="0" rtlCol="0" anchor="ctr">
+            <a:normAutofit/>
+          </a:bodyPr>
+          <a:lstStyle/>
+          <a:p>
+            <a:pPr indent="0" marL="0">
+              <a:buNone/>
+            </a:pPr>
+            <a:r>
+              <a:rPr lang="en-US" sz="1000" dirty="0">
+                <a:solidFill>
+                  <a:srgbClr val="102A43"/>
+                </a:solidFill>
+              </a:rPr>
+              <a:t>EUR 2,50</a:t>
+            </a:r>
+            <a:endParaRPr lang="en-US" sz="1000" dirty="0"/>
+          </a:p>
+        </p:txBody>
+      </p:sp>
+      <p:sp>
+        <p:nvSpPr>
+          <p:cNvPr id="23" name="Shape 21"/>
+          <p:cNvSpPr/>
+          <p:nvPr/>
+        </p:nvSpPr>
+        <p:spPr>
+          <a:xfrm>
+            <a:off x="2834640" y="3368040"/>
+            <a:ext cx="2011680" cy="373380"/>
+          </a:xfrm>
+          <a:prstGeom prst="rect">
+            <a:avLst/>
+          </a:prstGeom>
+          <a:solidFill>
+            <a:srgbClr val="FFFFFF"/>
+          </a:solidFill>
+          <a:ln w="12700">
+            <a:solidFill>
+              <a:srgbClr val="CBD5E1"/>
+            </a:solidFill>
+            <a:prstDash val="solid"/>
+          </a:ln>
+        </p:spPr>
+      </p:sp>
+      <p:sp>
+        <p:nvSpPr>
+          <p:cNvPr id="24" name="Text 22"/>
+          <p:cNvSpPr/>
+          <p:nvPr/>
+        </p:nvSpPr>
+        <p:spPr>
+          <a:xfrm>
+            <a:off x="2889504" y="3432048"/>
+            <a:ext cx="1901952" cy="300228"/>
+          </a:xfrm>
+          <a:prstGeom prst="rect">
+            <a:avLst/>
+          </a:prstGeom>
+          <a:noFill/>
+          <a:ln/>
+        </p:spPr>
+        <p:txBody>
+          <a:bodyPr wrap="square" lIns="0" tIns="0" rIns="0" bIns="0" rtlCol="0" anchor="ctr">
+            <a:normAutofit/>
+          </a:bodyPr>
+          <a:lstStyle/>
+          <a:p>
+            <a:pPr indent="0" marL="0">
+              <a:buNone/>
+            </a:pPr>
+            <a:r>
+              <a:rPr lang="en-US" sz="1000" dirty="0">
+                <a:solidFill>
+                  <a:srgbClr val="102A43"/>
+                </a:solidFill>
+              </a:rPr>
+              <a:t>200</a:t>
+            </a:r>
+            <a:endParaRPr lang="en-US" sz="1000" dirty="0"/>
+          </a:p>
+        </p:txBody>
+      </p:sp>
+      <p:sp>
+        <p:nvSpPr>
+          <p:cNvPr id="25" name="Shape 23"/>
+          <p:cNvSpPr/>
+          <p:nvPr/>
+        </p:nvSpPr>
+        <p:spPr>
+          <a:xfrm>
+            <a:off x="822960" y="3741420"/>
+            <a:ext cx="2011680" cy="373380"/>
+          </a:xfrm>
+          <a:prstGeom prst="rect">
+            <a:avLst/>
+          </a:prstGeom>
+          <a:solidFill>
+            <a:srgbClr val="FFFFFF"/>
+          </a:solidFill>
+          <a:ln w="12700">
+            <a:solidFill>
+              <a:srgbClr val="CBD5E1"/>
+            </a:solidFill>
+            <a:prstDash val="solid"/>
+          </a:ln>
+        </p:spPr>
+      </p:sp>
+      <p:sp>
+        <p:nvSpPr>
+          <p:cNvPr id="26" name="Text 24"/>
+          <p:cNvSpPr/>
+          <p:nvPr/>
+        </p:nvSpPr>
+        <p:spPr>
+          <a:xfrm>
+            <a:off x="877824" y="3805428"/>
+            <a:ext cx="1901952" cy="300228"/>
+          </a:xfrm>
+          <a:prstGeom prst="rect">
+            <a:avLst/>
+          </a:prstGeom>
+          <a:noFill/>
+          <a:ln/>
+        </p:spPr>
+        <p:txBody>
+          <a:bodyPr wrap="square" lIns="0" tIns="0" rIns="0" bIns="0" rtlCol="0" anchor="ctr">
+            <a:normAutofit/>
+          </a:bodyPr>
+          <a:lstStyle/>
+          <a:p>
+            <a:pPr indent="0" marL="0">
+              <a:buNone/>
+            </a:pPr>
+            <a:r>
+              <a:rPr lang="en-US" sz="1000" dirty="0">
+                <a:solidFill>
+                  <a:srgbClr val="102A43"/>
+                </a:solidFill>
+              </a:rPr>
+              <a:t>EUR 3,00</a:t>
+            </a:r>
+            <a:endParaRPr lang="en-US" sz="1000" dirty="0"/>
+          </a:p>
+        </p:txBody>
+      </p:sp>
+      <p:sp>
+        <p:nvSpPr>
+          <p:cNvPr id="27" name="Shape 25"/>
+          <p:cNvSpPr/>
+          <p:nvPr/>
+        </p:nvSpPr>
+        <p:spPr>
+          <a:xfrm>
+            <a:off x="2834640" y="3741420"/>
+            <a:ext cx="2011680" cy="373380"/>
+          </a:xfrm>
+          <a:prstGeom prst="rect">
+            <a:avLst/>
+          </a:prstGeom>
+          <a:solidFill>
+            <a:srgbClr val="FFFFFF"/>
+          </a:solidFill>
+          <a:ln w="12700">
+            <a:solidFill>
+              <a:srgbClr val="CBD5E1"/>
+            </a:solidFill>
+            <a:prstDash val="solid"/>
+          </a:ln>
+        </p:spPr>
+      </p:sp>
+      <p:sp>
+        <p:nvSpPr>
+          <p:cNvPr id="28" name="Text 26"/>
+          <p:cNvSpPr/>
+          <p:nvPr/>
+        </p:nvSpPr>
+        <p:spPr>
+          <a:xfrm>
+            <a:off x="2889504" y="3805428"/>
+            <a:ext cx="1901952" cy="300228"/>
+          </a:xfrm>
+          <a:prstGeom prst="rect">
+            <a:avLst/>
+          </a:prstGeom>
+          <a:noFill/>
+          <a:ln/>
+        </p:spPr>
+        <p:txBody>
+          <a:bodyPr wrap="square" lIns="0" tIns="0" rIns="0" bIns="0" rtlCol="0" anchor="ctr">
+            <a:normAutofit/>
+          </a:bodyPr>
+          <a:lstStyle/>
+          <a:p>
+            <a:pPr indent="0" marL="0">
+              <a:buNone/>
+            </a:pPr>
+            <a:r>
+              <a:rPr lang="en-US" sz="1000" dirty="0">
+                <a:solidFill>
+                  <a:srgbClr val="102A43"/>
+                </a:solidFill>
+              </a:rPr>
+              <a:t>100</a:t>
+            </a:r>
+            <a:endParaRPr lang="en-US" sz="1000" dirty="0"/>
+          </a:p>
+        </p:txBody>
+      </p:sp>
+      <p:sp>
+        <p:nvSpPr>
+          <p:cNvPr id="29" name="Shape 27"/>
+          <p:cNvSpPr/>
+          <p:nvPr/>
+        </p:nvSpPr>
+        <p:spPr>
+          <a:xfrm>
+            <a:off x="5669280" y="1874520"/>
+            <a:ext cx="5029200" cy="2240280"/>
+          </a:xfrm>
+          <a:prstGeom prst="rect">
+            <a:avLst/>
+          </a:prstGeom>
+          <a:solidFill>
+            <a:srgbClr val="FFFFFF"/>
+          </a:solidFill>
+          <a:ln w="12700">
+            <a:solidFill>
+              <a:srgbClr val="CBD5E1"/>
+            </a:solidFill>
+            <a:prstDash val="solid"/>
+          </a:ln>
+        </p:spPr>
+      </p:sp>
+      <p:sp>
+        <p:nvSpPr>
+          <p:cNvPr id="30" name="Shape 28"/>
+          <p:cNvSpPr/>
+          <p:nvPr/>
+        </p:nvSpPr>
+        <p:spPr>
+          <a:xfrm>
+            <a:off x="6172200" y="3703320"/>
+            <a:ext cx="4251960" cy="0"/>
+          </a:xfrm>
+          <a:prstGeom prst="line">
+            <a:avLst/>
+          </a:prstGeom>
+          <a:noFill/>
+          <a:ln w="17780">
+            <a:solidFill>
+              <a:srgbClr val="102A43"/>
+            </a:solidFill>
+            <a:prstDash val="solid"/>
+          </a:ln>
+        </p:spPr>
+      </p:sp>
+      <p:sp>
+        <p:nvSpPr>
+          <p:cNvPr id="31" name="Shape 29"/>
+          <p:cNvSpPr/>
+          <p:nvPr/>
+        </p:nvSpPr>
+        <p:spPr>
+          <a:xfrm>
+            <a:off x="6172200" y="3703320"/>
+            <a:ext cx="0" cy="-1554480"/>
+          </a:xfrm>
+          <a:prstGeom prst="line">
+            <a:avLst/>
+          </a:prstGeom>
+          <a:noFill/>
+          <a:ln w="17780">
+            <a:solidFill>
+              <a:srgbClr val="102A43"/>
+            </a:solidFill>
+            <a:prstDash val="solid"/>
+          </a:ln>
+        </p:spPr>
+      </p:sp>
+      <p:sp>
+        <p:nvSpPr>
+          <p:cNvPr id="32" name="Text 30"/>
+          <p:cNvSpPr/>
+          <p:nvPr/>
+        </p:nvSpPr>
+        <p:spPr>
+          <a:xfrm>
+            <a:off x="5806440" y="2020824"/>
+            <a:ext cx="228600" cy="182880"/>
+          </a:xfrm>
+          <a:prstGeom prst="rect">
+            <a:avLst/>
+          </a:prstGeom>
+          <a:noFill/>
+          <a:ln/>
+        </p:spPr>
+        <p:txBody>
+          <a:bodyPr wrap="square" lIns="0" tIns="0" rIns="0" bIns="0" rtlCol="0" anchor="ctr"/>
+          <a:lstStyle/>
+          <a:p>
+            <a:pPr indent="0" marL="0">
+              <a:buNone/>
+            </a:pPr>
+            <a:r>
+              <a:rPr lang="en-US" sz="1200" b="1" dirty="0">
+                <a:solidFill>
+                  <a:srgbClr val="102A43"/>
+                </a:solidFill>
+              </a:rPr>
+              <a:t>P</a:t>
+            </a:r>
+            <a:endParaRPr lang="en-US" sz="1200" dirty="0"/>
+          </a:p>
+        </p:txBody>
+      </p:sp>
+      <p:sp>
+        <p:nvSpPr>
+          <p:cNvPr id="33" name="Text 31"/>
+          <p:cNvSpPr/>
+          <p:nvPr/>
+        </p:nvSpPr>
+        <p:spPr>
+          <a:xfrm>
+            <a:off x="10314432" y="3858768"/>
+            <a:ext cx="228600" cy="182880"/>
+          </a:xfrm>
+          <a:prstGeom prst="rect">
+            <a:avLst/>
+          </a:prstGeom>
+          <a:noFill/>
+          <a:ln/>
+        </p:spPr>
+        <p:txBody>
+          <a:bodyPr wrap="square" lIns="0" tIns="0" rIns="0" bIns="0" rtlCol="0" anchor="ctr"/>
+          <a:lstStyle/>
+          <a:p>
+            <a:pPr indent="0" marL="0">
+              <a:buNone/>
+            </a:pPr>
+            <a:r>
+              <a:rPr lang="en-US" sz="1200" b="1" dirty="0">
+                <a:solidFill>
+                  <a:srgbClr val="102A43"/>
+                </a:solidFill>
+              </a:rPr>
+              <a:t>Q</a:t>
+            </a:r>
+            <a:endParaRPr lang="en-US" sz="1200" dirty="0"/>
+          </a:p>
+        </p:txBody>
+      </p:sp>
+      <p:sp>
+        <p:nvSpPr>
+          <p:cNvPr id="34" name="Shape 32"/>
+          <p:cNvSpPr/>
+          <p:nvPr/>
+        </p:nvSpPr>
+        <p:spPr>
+          <a:xfrm>
+            <a:off x="6565392" y="2441448"/>
+            <a:ext cx="822960" cy="365760"/>
+          </a:xfrm>
+          <a:prstGeom prst="line">
+            <a:avLst/>
+          </a:prstGeom>
+          <a:noFill/>
+          <a:ln w="30480">
+            <a:solidFill>
+              <a:srgbClr val="2F7D4A"/>
+            </a:solidFill>
+            <a:prstDash val="solid"/>
+          </a:ln>
+        </p:spPr>
+      </p:sp>
+      <p:sp>
+        <p:nvSpPr>
+          <p:cNvPr id="35" name="Shape 33"/>
+          <p:cNvSpPr/>
+          <p:nvPr/>
+        </p:nvSpPr>
+        <p:spPr>
+          <a:xfrm>
+            <a:off x="7388352" y="2807208"/>
+            <a:ext cx="822960" cy="365760"/>
+          </a:xfrm>
+          <a:prstGeom prst="line">
+            <a:avLst/>
+          </a:prstGeom>
+          <a:noFill/>
+          <a:ln w="30480">
+            <a:solidFill>
+              <a:srgbClr val="2F7D4A"/>
+            </a:solidFill>
+            <a:prstDash val="solid"/>
+          </a:ln>
+        </p:spPr>
+      </p:sp>
+      <p:sp>
+        <p:nvSpPr>
+          <p:cNvPr id="36" name="Shape 34"/>
+          <p:cNvSpPr/>
+          <p:nvPr/>
+        </p:nvSpPr>
+        <p:spPr>
+          <a:xfrm>
+            <a:off x="8211312" y="3172968"/>
+            <a:ext cx="822960" cy="365760"/>
+          </a:xfrm>
+          <a:prstGeom prst="line">
+            <a:avLst/>
+          </a:prstGeom>
+          <a:noFill/>
+          <a:ln w="30480">
+            <a:solidFill>
+              <a:srgbClr val="2F7D4A"/>
+            </a:solidFill>
+            <a:prstDash val="solid"/>
+          </a:ln>
+        </p:spPr>
+      </p:sp>
+      <p:sp>
+        <p:nvSpPr>
+          <p:cNvPr id="37" name="Shape 35"/>
+          <p:cNvSpPr/>
+          <p:nvPr/>
+        </p:nvSpPr>
+        <p:spPr>
+          <a:xfrm>
+            <a:off x="9034272" y="3538728"/>
+            <a:ext cx="822960" cy="365760"/>
+          </a:xfrm>
+          <a:prstGeom prst="line">
+            <a:avLst/>
+          </a:prstGeom>
+          <a:noFill/>
+          <a:ln w="30480">
+            <a:solidFill>
+              <a:srgbClr val="2F7D4A"/>
+            </a:solidFill>
+            <a:prstDash val="solid"/>
+          </a:ln>
+        </p:spPr>
+      </p:sp>
+      <p:sp>
+        <p:nvSpPr>
+          <p:cNvPr id="38" name="Shape 36"/>
+          <p:cNvSpPr/>
+          <p:nvPr/>
+        </p:nvSpPr>
+        <p:spPr>
+          <a:xfrm>
+            <a:off x="6524244" y="2400300"/>
+            <a:ext cx="82296" cy="82296"/>
+          </a:xfrm>
+          <a:prstGeom prst="ellipse">
+            <a:avLst/>
+          </a:prstGeom>
+          <a:solidFill>
+            <a:srgbClr val="B45309"/>
+          </a:solidFill>
+          <a:ln w="12700">
+            <a:solidFill>
+              <a:srgbClr val="FFFFFF"/>
+            </a:solidFill>
+            <a:prstDash val="solid"/>
+          </a:ln>
+        </p:spPr>
+      </p:sp>
+      <p:sp>
+        <p:nvSpPr>
+          <p:cNvPr id="39" name="Shape 37"/>
+          <p:cNvSpPr/>
+          <p:nvPr/>
+        </p:nvSpPr>
+        <p:spPr>
+          <a:xfrm>
+            <a:off x="7347204" y="2766060"/>
+            <a:ext cx="82296" cy="82296"/>
+          </a:xfrm>
+          <a:prstGeom prst="ellipse">
+            <a:avLst/>
+          </a:prstGeom>
+          <a:solidFill>
+            <a:srgbClr val="B45309"/>
+          </a:solidFill>
+          <a:ln w="12700">
+            <a:solidFill>
+              <a:srgbClr val="FFFFFF"/>
+            </a:solidFill>
+            <a:prstDash val="solid"/>
+          </a:ln>
+        </p:spPr>
+      </p:sp>
+      <p:sp>
+        <p:nvSpPr>
+          <p:cNvPr id="40" name="Shape 38"/>
+          <p:cNvSpPr/>
+          <p:nvPr/>
+        </p:nvSpPr>
+        <p:spPr>
+          <a:xfrm>
+            <a:off x="8170164" y="3131820"/>
+            <a:ext cx="82296" cy="82296"/>
+          </a:xfrm>
+          <a:prstGeom prst="ellipse">
+            <a:avLst/>
+          </a:prstGeom>
+          <a:solidFill>
+            <a:srgbClr val="B45309"/>
+          </a:solidFill>
+          <a:ln w="12700">
+            <a:solidFill>
+              <a:srgbClr val="FFFFFF"/>
+            </a:solidFill>
+            <a:prstDash val="solid"/>
+          </a:ln>
+        </p:spPr>
+      </p:sp>
+      <p:sp>
+        <p:nvSpPr>
+          <p:cNvPr id="41" name="Text 39"/>
+          <p:cNvSpPr/>
+          <p:nvPr/>
+        </p:nvSpPr>
+        <p:spPr>
+          <a:xfrm>
+            <a:off x="8321040" y="2990088"/>
+            <a:ext cx="1097280" cy="182880"/>
+          </a:xfrm>
+          <a:prstGeom prst="rect">
+            <a:avLst/>
+          </a:prstGeom>
+          <a:noFill/>
+          <a:ln/>
+        </p:spPr>
+        <p:txBody>
+          <a:bodyPr wrap="square" lIns="0" tIns="0" rIns="0" bIns="0" rtlCol="0" anchor="ctr"/>
+          <a:lstStyle/>
+          <a:p>
+            <a:pPr indent="0" marL="0">
+              <a:buNone/>
+            </a:pPr>
+            <a:r>
+              <a:rPr lang="en-US" sz="900" dirty="0">
+                <a:solidFill>
+                  <a:srgbClr val="102A43"/>
+                </a:solidFill>
+              </a:rPr>
+              <a:t>(300; 2,00)</a:t>
+            </a:r>
+            <a:endParaRPr lang="en-US" sz="900" dirty="0"/>
+          </a:p>
+        </p:txBody>
+      </p:sp>
+      <p:sp>
+        <p:nvSpPr>
+          <p:cNvPr id="42" name="Shape 40"/>
+          <p:cNvSpPr/>
+          <p:nvPr/>
+        </p:nvSpPr>
+        <p:spPr>
+          <a:xfrm>
+            <a:off x="8993124" y="3497580"/>
+            <a:ext cx="82296" cy="82296"/>
+          </a:xfrm>
+          <a:prstGeom prst="ellipse">
+            <a:avLst/>
+          </a:prstGeom>
+          <a:solidFill>
+            <a:srgbClr val="B45309"/>
+          </a:solidFill>
+          <a:ln w="12700">
+            <a:solidFill>
+              <a:srgbClr val="FFFFFF"/>
+            </a:solidFill>
+            <a:prstDash val="solid"/>
+          </a:ln>
+        </p:spPr>
+      </p:sp>
+      <p:sp>
+        <p:nvSpPr>
+          <p:cNvPr id="43" name="Shape 41"/>
+          <p:cNvSpPr/>
+          <p:nvPr/>
+        </p:nvSpPr>
+        <p:spPr>
+          <a:xfrm>
+            <a:off x="9816084" y="3863340"/>
+            <a:ext cx="82296" cy="82296"/>
+          </a:xfrm>
+          <a:prstGeom prst="ellipse">
+            <a:avLst/>
+          </a:prstGeom>
+          <a:solidFill>
+            <a:srgbClr val="B45309"/>
+          </a:solidFill>
+          <a:ln w="12700">
+            <a:solidFill>
+              <a:srgbClr val="FFFFFF"/>
+            </a:solidFill>
+            <a:prstDash val="solid"/>
+          </a:ln>
+        </p:spPr>
+      </p:sp>
+      <p:sp>
+        <p:nvSpPr>
+          <p:cNvPr id="44" name="Shape 42"/>
+          <p:cNvSpPr/>
+          <p:nvPr/>
+        </p:nvSpPr>
+        <p:spPr>
+          <a:xfrm>
+            <a:off x="777240" y="4480560"/>
+            <a:ext cx="10698480" cy="384048"/>
+          </a:xfrm>
+          <a:prstGeom prst="roundRect">
+            <a:avLst>
+              <a:gd name="adj" fmla="val 14286"/>
+            </a:avLst>
+          </a:prstGeom>
+          <a:solidFill>
+            <a:srgbClr val="ECFEFF"/>
+          </a:solidFill>
+          <a:ln w="12700">
+            <a:solidFill>
+              <a:srgbClr val="BAE6FD"/>
+            </a:solidFill>
+            <a:prstDash val="solid"/>
+          </a:ln>
+        </p:spPr>
+      </p:sp>
+      <p:sp>
+        <p:nvSpPr>
+          <p:cNvPr id="45" name="Text 43"/>
+          <p:cNvSpPr/>
+          <p:nvPr/>
+        </p:nvSpPr>
+        <p:spPr>
+          <a:xfrm>
+            <a:off x="1005840" y="4572000"/>
+            <a:ext cx="10149840" cy="164592"/>
+          </a:xfrm>
+          <a:prstGeom prst="rect">
+            <a:avLst/>
+          </a:prstGeom>
+          <a:noFill/>
+          <a:ln/>
+        </p:spPr>
+        <p:txBody>
+          <a:bodyPr wrap="square" lIns="0" tIns="0" rIns="0" bIns="0" rtlCol="0" anchor="ctr">
+            <a:normAutofit/>
+          </a:bodyPr>
+          <a:lstStyle/>
+          <a:p>
+            <a:pPr indent="0" marL="0">
+              <a:buNone/>
+            </a:pPr>
+            <a:r>
+              <a:rPr lang="en-US" sz="1250" dirty="0">
+                <a:solidFill>
+                  <a:srgbClr val="102A43"/>
+                </a:solidFill>
+              </a:rPr>
+              <a:t>Prijs en aantal verkochte ijsjes staan in verschillende kolommen.</a:t>
+            </a:r>
+            <a:endParaRPr lang="en-US" sz="1250" dirty="0"/>
+          </a:p>
+        </p:txBody>
+      </p:sp>
+      <p:sp>
+        <p:nvSpPr>
+          <p:cNvPr id="46" name="Shape 44"/>
+          <p:cNvSpPr/>
+          <p:nvPr/>
+        </p:nvSpPr>
+        <p:spPr>
+          <a:xfrm>
+            <a:off x="777240" y="4992624"/>
+            <a:ext cx="10698480" cy="384048"/>
+          </a:xfrm>
+          <a:prstGeom prst="roundRect">
+            <a:avLst>
+              <a:gd name="adj" fmla="val 14286"/>
+            </a:avLst>
+          </a:prstGeom>
+          <a:solidFill>
+            <a:srgbClr val="FFFFFF"/>
+          </a:solidFill>
+          <a:ln w="12700">
+            <a:solidFill>
+              <a:srgbClr val="BAE6FD"/>
+            </a:solidFill>
+            <a:prstDash val="solid"/>
+          </a:ln>
+        </p:spPr>
+      </p:sp>
+      <p:sp>
+        <p:nvSpPr>
+          <p:cNvPr id="47" name="Text 45"/>
+          <p:cNvSpPr/>
+          <p:nvPr/>
+        </p:nvSpPr>
+        <p:spPr>
+          <a:xfrm>
+            <a:off x="1005840" y="5084064"/>
+            <a:ext cx="10149840" cy="164592"/>
+          </a:xfrm>
+          <a:prstGeom prst="rect">
+            <a:avLst/>
+          </a:prstGeom>
+          <a:noFill/>
+          <a:ln/>
+        </p:spPr>
+        <p:txBody>
+          <a:bodyPr wrap="square" lIns="0" tIns="0" rIns="0" bIns="0" rtlCol="0" anchor="ctr">
+            <a:normAutofit/>
+          </a:bodyPr>
+          <a:lstStyle/>
+          <a:p>
+            <a:pPr indent="0" marL="0">
+              <a:buNone/>
+            </a:pPr>
+            <a:r>
+              <a:rPr lang="en-US" sz="1250" dirty="0">
+                <a:solidFill>
+                  <a:srgbClr val="102A43"/>
+                </a:solidFill>
+              </a:rPr>
+              <a:t>Een tabel ordent de data; een grafiek maakt het verband zichtbaar.</a:t>
+            </a:r>
+            <a:endParaRPr lang="en-US" sz="1250" dirty="0"/>
+          </a:p>
+        </p:txBody>
+      </p:sp>
+      <p:sp>
+        <p:nvSpPr>
+          <p:cNvPr id="48" name="Shape 46"/>
+          <p:cNvSpPr/>
+          <p:nvPr/>
+        </p:nvSpPr>
+        <p:spPr>
+          <a:xfrm>
+            <a:off x="777240" y="5504688"/>
+            <a:ext cx="10698480" cy="384048"/>
+          </a:xfrm>
+          <a:prstGeom prst="roundRect">
+            <a:avLst>
+              <a:gd name="adj" fmla="val 14286"/>
+            </a:avLst>
+          </a:prstGeom>
+          <a:solidFill>
+            <a:srgbClr val="ECFEFF"/>
+          </a:solidFill>
+          <a:ln w="12700">
+            <a:solidFill>
+              <a:srgbClr val="BAE6FD"/>
+            </a:solidFill>
+            <a:prstDash val="solid"/>
+          </a:ln>
+        </p:spPr>
+      </p:sp>
+      <p:sp>
+        <p:nvSpPr>
+          <p:cNvPr id="49" name="Text 47"/>
+          <p:cNvSpPr/>
+          <p:nvPr/>
+        </p:nvSpPr>
+        <p:spPr>
+          <a:xfrm>
+            <a:off x="1005840" y="5596128"/>
+            <a:ext cx="10149840" cy="164592"/>
+          </a:xfrm>
+          <a:prstGeom prst="rect">
+            <a:avLst/>
+          </a:prstGeom>
+          <a:noFill/>
+          <a:ln/>
+        </p:spPr>
+        <p:txBody>
+          <a:bodyPr wrap="square" lIns="0" tIns="0" rIns="0" bIns="0" rtlCol="0" anchor="ctr">
+            <a:normAutofit/>
+          </a:bodyPr>
+          <a:lstStyle/>
+          <a:p>
+            <a:pPr indent="0" marL="0">
+              <a:buNone/>
+            </a:pPr>
+            <a:r>
+              <a:rPr lang="en-US" sz="1250" dirty="0">
+                <a:solidFill>
+                  <a:srgbClr val="102A43"/>
+                </a:solidFill>
+              </a:rPr>
               <a:t>De eerste vraag is steeds: wat betekenen deze getallen?</a:t>
             </a:r>
-            <a:endParaRPr lang="en-US" sz="1500" dirty="0"/>
+            <a:endParaRPr lang="en-US" sz="1250" dirty="0"/>
           </a:p>
         </p:txBody>
       </p:sp>
@@ -1686,20 +2838,18 @@
         </p:nvSpPr>
         <p:spPr>
           <a:xfrm>
-            <a:off x="914400" y="1965960"/>
-            <a:ext cx="10058400" cy="457200"/>
-          </a:xfrm>
-          <a:prstGeom prst="roundRect">
-            <a:avLst>
-              <a:gd name="adj" fmla="val 16000"/>
-            </a:avLst>
-          </a:prstGeom>
-          <a:solidFill>
-            <a:srgbClr val="ECFEFF"/>
+            <a:off x="2926080" y="1828800"/>
+            <a:ext cx="2926080" cy="388620"/>
+          </a:xfrm>
+          <a:prstGeom prst="rect">
+            <a:avLst/>
+          </a:prstGeom>
+          <a:solidFill>
+            <a:srgbClr val="DDF7EF"/>
           </a:solidFill>
           <a:ln w="12700">
             <a:solidFill>
-              <a:srgbClr val="BAE6FD"/>
+              <a:srgbClr val="CBD5E1"/>
             </a:solidFill>
             <a:prstDash val="solid"/>
           </a:ln>
@@ -1713,8 +2863,8 @@
         </p:nvSpPr>
         <p:spPr>
           <a:xfrm>
-            <a:off x="1143000" y="2084832"/>
-            <a:ext cx="9509760" cy="182880"/>
+            <a:off x="2980944" y="1892808"/>
+            <a:ext cx="2816352" cy="315468"/>
           </a:xfrm>
           <a:prstGeom prst="rect">
             <a:avLst/>
@@ -1732,14 +2882,14 @@
               <a:buNone/>
             </a:pPr>
             <a:r>
-              <a:rPr lang="en-US" sz="1500" dirty="0">
+              <a:rPr lang="en-US" sz="1100" b="1" dirty="0">
                 <a:solidFill>
                   <a:srgbClr val="102A43"/>
                 </a:solidFill>
               </a:rPr>
-              <a:t>Lees de vraag: welke rij, kolom of periode heb je nodig?</a:t>
-            </a:r>
-            <a:endParaRPr lang="en-US" sz="1500" dirty="0"/>
+              <a:t>Prijs</a:t>
+            </a:r>
+            <a:endParaRPr lang="en-US" sz="1100" dirty="0"/>
           </a:p>
         </p:txBody>
       </p:sp>
@@ -1751,20 +2901,18 @@
         </p:nvSpPr>
         <p:spPr>
           <a:xfrm>
-            <a:off x="914400" y="2679192"/>
-            <a:ext cx="10058400" cy="457200"/>
-          </a:xfrm>
-          <a:prstGeom prst="roundRect">
-            <a:avLst>
-              <a:gd name="adj" fmla="val 16000"/>
-            </a:avLst>
-          </a:prstGeom>
-          <a:solidFill>
-            <a:srgbClr val="FFFFFF"/>
+            <a:off x="5852160" y="1828800"/>
+            <a:ext cx="2926080" cy="388620"/>
+          </a:xfrm>
+          <a:prstGeom prst="rect">
+            <a:avLst/>
+          </a:prstGeom>
+          <a:solidFill>
+            <a:srgbClr val="DDF7EF"/>
           </a:solidFill>
           <a:ln w="12700">
             <a:solidFill>
-              <a:srgbClr val="BAE6FD"/>
+              <a:srgbClr val="CBD5E1"/>
             </a:solidFill>
             <a:prstDash val="solid"/>
           </a:ln>
@@ -1778,8 +2926,8 @@
         </p:nvSpPr>
         <p:spPr>
           <a:xfrm>
-            <a:off x="1143000" y="2798064"/>
-            <a:ext cx="9509760" cy="182880"/>
+            <a:off x="5907024" y="1892808"/>
+            <a:ext cx="2816352" cy="315468"/>
           </a:xfrm>
           <a:prstGeom prst="rect">
             <a:avLst/>
@@ -1797,14 +2945,14 @@
               <a:buNone/>
             </a:pPr>
             <a:r>
-              <a:rPr lang="en-US" sz="1500" dirty="0">
+              <a:rPr lang="en-US" sz="1100" b="1" dirty="0">
                 <a:solidFill>
                   <a:srgbClr val="102A43"/>
                 </a:solidFill>
               </a:rPr>
-              <a:t>Controleer tabelkop, rijlabel, kolomlabel en eenheid.</a:t>
-            </a:r>
-            <a:endParaRPr lang="en-US" sz="1500" dirty="0"/>
+              <a:t>Verkoop</a:t>
+            </a:r>
+            <a:endParaRPr lang="en-US" sz="1100" dirty="0"/>
           </a:p>
         </p:txBody>
       </p:sp>
@@ -1816,20 +2964,18 @@
         </p:nvSpPr>
         <p:spPr>
           <a:xfrm>
-            <a:off x="914400" y="3392424"/>
-            <a:ext cx="10058400" cy="457200"/>
-          </a:xfrm>
-          <a:prstGeom prst="roundRect">
-            <a:avLst>
-              <a:gd name="adj" fmla="val 16000"/>
-            </a:avLst>
-          </a:prstGeom>
-          <a:solidFill>
-            <a:srgbClr val="ECFEFF"/>
+            <a:off x="2926080" y="2217420"/>
+            <a:ext cx="2926080" cy="388620"/>
+          </a:xfrm>
+          <a:prstGeom prst="rect">
+            <a:avLst/>
+          </a:prstGeom>
+          <a:solidFill>
+            <a:srgbClr val="FFF4CC"/>
           </a:solidFill>
           <a:ln w="12700">
             <a:solidFill>
-              <a:srgbClr val="BAE6FD"/>
+              <a:srgbClr val="CBD5E1"/>
             </a:solidFill>
             <a:prstDash val="solid"/>
           </a:ln>
@@ -1843,8 +2989,8 @@
         </p:nvSpPr>
         <p:spPr>
           <a:xfrm>
-            <a:off x="1143000" y="3511296"/>
-            <a:ext cx="9509760" cy="182880"/>
+            <a:off x="2980944" y="2281428"/>
+            <a:ext cx="2816352" cy="315468"/>
           </a:xfrm>
           <a:prstGeom prst="rect">
             <a:avLst/>
@@ -1862,14 +3008,776 @@
               <a:buNone/>
             </a:pPr>
             <a:r>
-              <a:rPr lang="en-US" sz="1500" dirty="0">
+              <a:rPr lang="en-US" sz="1000" b="1" dirty="0">
                 <a:solidFill>
                   <a:srgbClr val="102A43"/>
                 </a:solidFill>
               </a:rPr>
+              <a:t>EUR 1,00</a:t>
+            </a:r>
+            <a:endParaRPr lang="en-US" sz="1000" dirty="0"/>
+          </a:p>
+        </p:txBody>
+      </p:sp>
+      <p:sp>
+        <p:nvSpPr>
+          <p:cNvPr id="11" name="Shape 9"/>
+          <p:cNvSpPr/>
+          <p:nvPr/>
+        </p:nvSpPr>
+        <p:spPr>
+          <a:xfrm>
+            <a:off x="5852160" y="2217420"/>
+            <a:ext cx="2926080" cy="388620"/>
+          </a:xfrm>
+          <a:prstGeom prst="rect">
+            <a:avLst/>
+          </a:prstGeom>
+          <a:solidFill>
+            <a:srgbClr val="FFF4CC"/>
+          </a:solidFill>
+          <a:ln w="12700">
+            <a:solidFill>
+              <a:srgbClr val="CBD5E1"/>
+            </a:solidFill>
+            <a:prstDash val="solid"/>
+          </a:ln>
+        </p:spPr>
+      </p:sp>
+      <p:sp>
+        <p:nvSpPr>
+          <p:cNvPr id="12" name="Text 10"/>
+          <p:cNvSpPr/>
+          <p:nvPr/>
+        </p:nvSpPr>
+        <p:spPr>
+          <a:xfrm>
+            <a:off x="5907024" y="2281428"/>
+            <a:ext cx="2816352" cy="315468"/>
+          </a:xfrm>
+          <a:prstGeom prst="rect">
+            <a:avLst/>
+          </a:prstGeom>
+          <a:noFill/>
+          <a:ln/>
+        </p:spPr>
+        <p:txBody>
+          <a:bodyPr wrap="square" lIns="0" tIns="0" rIns="0" bIns="0" rtlCol="0" anchor="ctr">
+            <a:normAutofit/>
+          </a:bodyPr>
+          <a:lstStyle/>
+          <a:p>
+            <a:pPr indent="0" marL="0">
+              <a:buNone/>
+            </a:pPr>
+            <a:r>
+              <a:rPr lang="en-US" sz="1000" b="1" dirty="0">
+                <a:solidFill>
+                  <a:srgbClr val="102A43"/>
+                </a:solidFill>
+              </a:rPr>
+              <a:t>500</a:t>
+            </a:r>
+            <a:endParaRPr lang="en-US" sz="1000" dirty="0"/>
+          </a:p>
+        </p:txBody>
+      </p:sp>
+      <p:sp>
+        <p:nvSpPr>
+          <p:cNvPr id="13" name="Shape 11"/>
+          <p:cNvSpPr/>
+          <p:nvPr/>
+        </p:nvSpPr>
+        <p:spPr>
+          <a:xfrm>
+            <a:off x="2926080" y="2606040"/>
+            <a:ext cx="2926080" cy="388620"/>
+          </a:xfrm>
+          <a:prstGeom prst="rect">
+            <a:avLst/>
+          </a:prstGeom>
+          <a:solidFill>
+            <a:srgbClr val="FFFFFF"/>
+          </a:solidFill>
+          <a:ln w="12700">
+            <a:solidFill>
+              <a:srgbClr val="CBD5E1"/>
+            </a:solidFill>
+            <a:prstDash val="solid"/>
+          </a:ln>
+        </p:spPr>
+      </p:sp>
+      <p:sp>
+        <p:nvSpPr>
+          <p:cNvPr id="14" name="Text 12"/>
+          <p:cNvSpPr/>
+          <p:nvPr/>
+        </p:nvSpPr>
+        <p:spPr>
+          <a:xfrm>
+            <a:off x="2980944" y="2670048"/>
+            <a:ext cx="2816352" cy="315468"/>
+          </a:xfrm>
+          <a:prstGeom prst="rect">
+            <a:avLst/>
+          </a:prstGeom>
+          <a:noFill/>
+          <a:ln/>
+        </p:spPr>
+        <p:txBody>
+          <a:bodyPr wrap="square" lIns="0" tIns="0" rIns="0" bIns="0" rtlCol="0" anchor="ctr">
+            <a:normAutofit/>
+          </a:bodyPr>
+          <a:lstStyle/>
+          <a:p>
+            <a:pPr indent="0" marL="0">
+              <a:buNone/>
+            </a:pPr>
+            <a:r>
+              <a:rPr lang="en-US" sz="1000" dirty="0">
+                <a:solidFill>
+                  <a:srgbClr val="102A43"/>
+                </a:solidFill>
+              </a:rPr>
+              <a:t>EUR 1,50</a:t>
+            </a:r>
+            <a:endParaRPr lang="en-US" sz="1000" dirty="0"/>
+          </a:p>
+        </p:txBody>
+      </p:sp>
+      <p:sp>
+        <p:nvSpPr>
+          <p:cNvPr id="15" name="Shape 13"/>
+          <p:cNvSpPr/>
+          <p:nvPr/>
+        </p:nvSpPr>
+        <p:spPr>
+          <a:xfrm>
+            <a:off x="5852160" y="2606040"/>
+            <a:ext cx="2926080" cy="388620"/>
+          </a:xfrm>
+          <a:prstGeom prst="rect">
+            <a:avLst/>
+          </a:prstGeom>
+          <a:solidFill>
+            <a:srgbClr val="FFFFFF"/>
+          </a:solidFill>
+          <a:ln w="12700">
+            <a:solidFill>
+              <a:srgbClr val="CBD5E1"/>
+            </a:solidFill>
+            <a:prstDash val="solid"/>
+          </a:ln>
+        </p:spPr>
+      </p:sp>
+      <p:sp>
+        <p:nvSpPr>
+          <p:cNvPr id="16" name="Text 14"/>
+          <p:cNvSpPr/>
+          <p:nvPr/>
+        </p:nvSpPr>
+        <p:spPr>
+          <a:xfrm>
+            <a:off x="5907024" y="2670048"/>
+            <a:ext cx="2816352" cy="315468"/>
+          </a:xfrm>
+          <a:prstGeom prst="rect">
+            <a:avLst/>
+          </a:prstGeom>
+          <a:noFill/>
+          <a:ln/>
+        </p:spPr>
+        <p:txBody>
+          <a:bodyPr wrap="square" lIns="0" tIns="0" rIns="0" bIns="0" rtlCol="0" anchor="ctr">
+            <a:normAutofit/>
+          </a:bodyPr>
+          <a:lstStyle/>
+          <a:p>
+            <a:pPr indent="0" marL="0">
+              <a:buNone/>
+            </a:pPr>
+            <a:r>
+              <a:rPr lang="en-US" sz="1000" dirty="0">
+                <a:solidFill>
+                  <a:srgbClr val="102A43"/>
+                </a:solidFill>
+              </a:rPr>
+              <a:t>400</a:t>
+            </a:r>
+            <a:endParaRPr lang="en-US" sz="1000" dirty="0"/>
+          </a:p>
+        </p:txBody>
+      </p:sp>
+      <p:sp>
+        <p:nvSpPr>
+          <p:cNvPr id="17" name="Shape 15"/>
+          <p:cNvSpPr/>
+          <p:nvPr/>
+        </p:nvSpPr>
+        <p:spPr>
+          <a:xfrm>
+            <a:off x="2926080" y="2994660"/>
+            <a:ext cx="2926080" cy="388620"/>
+          </a:xfrm>
+          <a:prstGeom prst="rect">
+            <a:avLst/>
+          </a:prstGeom>
+          <a:solidFill>
+            <a:srgbClr val="FFF4CC"/>
+          </a:solidFill>
+          <a:ln w="12700">
+            <a:solidFill>
+              <a:srgbClr val="CBD5E1"/>
+            </a:solidFill>
+            <a:prstDash val="solid"/>
+          </a:ln>
+        </p:spPr>
+      </p:sp>
+      <p:sp>
+        <p:nvSpPr>
+          <p:cNvPr id="18" name="Text 16"/>
+          <p:cNvSpPr/>
+          <p:nvPr/>
+        </p:nvSpPr>
+        <p:spPr>
+          <a:xfrm>
+            <a:off x="2980944" y="3058668"/>
+            <a:ext cx="2816352" cy="315468"/>
+          </a:xfrm>
+          <a:prstGeom prst="rect">
+            <a:avLst/>
+          </a:prstGeom>
+          <a:noFill/>
+          <a:ln/>
+        </p:spPr>
+        <p:txBody>
+          <a:bodyPr wrap="square" lIns="0" tIns="0" rIns="0" bIns="0" rtlCol="0" anchor="ctr">
+            <a:normAutofit/>
+          </a:bodyPr>
+          <a:lstStyle/>
+          <a:p>
+            <a:pPr indent="0" marL="0">
+              <a:buNone/>
+            </a:pPr>
+            <a:r>
+              <a:rPr lang="en-US" sz="1000" b="1" dirty="0">
+                <a:solidFill>
+                  <a:srgbClr val="102A43"/>
+                </a:solidFill>
+              </a:rPr>
+              <a:t>EUR 2,00</a:t>
+            </a:r>
+            <a:endParaRPr lang="en-US" sz="1000" dirty="0"/>
+          </a:p>
+        </p:txBody>
+      </p:sp>
+      <p:sp>
+        <p:nvSpPr>
+          <p:cNvPr id="19" name="Shape 17"/>
+          <p:cNvSpPr/>
+          <p:nvPr/>
+        </p:nvSpPr>
+        <p:spPr>
+          <a:xfrm>
+            <a:off x="5852160" y="2994660"/>
+            <a:ext cx="2926080" cy="388620"/>
+          </a:xfrm>
+          <a:prstGeom prst="rect">
+            <a:avLst/>
+          </a:prstGeom>
+          <a:solidFill>
+            <a:srgbClr val="FFF4CC"/>
+          </a:solidFill>
+          <a:ln w="12700">
+            <a:solidFill>
+              <a:srgbClr val="CBD5E1"/>
+            </a:solidFill>
+            <a:prstDash val="solid"/>
+          </a:ln>
+        </p:spPr>
+      </p:sp>
+      <p:sp>
+        <p:nvSpPr>
+          <p:cNvPr id="20" name="Text 18"/>
+          <p:cNvSpPr/>
+          <p:nvPr/>
+        </p:nvSpPr>
+        <p:spPr>
+          <a:xfrm>
+            <a:off x="5907024" y="3058668"/>
+            <a:ext cx="2816352" cy="315468"/>
+          </a:xfrm>
+          <a:prstGeom prst="rect">
+            <a:avLst/>
+          </a:prstGeom>
+          <a:noFill/>
+          <a:ln/>
+        </p:spPr>
+        <p:txBody>
+          <a:bodyPr wrap="square" lIns="0" tIns="0" rIns="0" bIns="0" rtlCol="0" anchor="ctr">
+            <a:normAutofit/>
+          </a:bodyPr>
+          <a:lstStyle/>
+          <a:p>
+            <a:pPr indent="0" marL="0">
+              <a:buNone/>
+            </a:pPr>
+            <a:r>
+              <a:rPr lang="en-US" sz="1000" b="1" dirty="0">
+                <a:solidFill>
+                  <a:srgbClr val="102A43"/>
+                </a:solidFill>
+              </a:rPr>
+              <a:t>300</a:t>
+            </a:r>
+            <a:endParaRPr lang="en-US" sz="1000" dirty="0"/>
+          </a:p>
+        </p:txBody>
+      </p:sp>
+      <p:sp>
+        <p:nvSpPr>
+          <p:cNvPr id="21" name="Shape 19"/>
+          <p:cNvSpPr/>
+          <p:nvPr/>
+        </p:nvSpPr>
+        <p:spPr>
+          <a:xfrm>
+            <a:off x="2926080" y="3383280"/>
+            <a:ext cx="2926080" cy="388620"/>
+          </a:xfrm>
+          <a:prstGeom prst="rect">
+            <a:avLst/>
+          </a:prstGeom>
+          <a:solidFill>
+            <a:srgbClr val="FFFFFF"/>
+          </a:solidFill>
+          <a:ln w="12700">
+            <a:solidFill>
+              <a:srgbClr val="CBD5E1"/>
+            </a:solidFill>
+            <a:prstDash val="solid"/>
+          </a:ln>
+        </p:spPr>
+      </p:sp>
+      <p:sp>
+        <p:nvSpPr>
+          <p:cNvPr id="22" name="Text 20"/>
+          <p:cNvSpPr/>
+          <p:nvPr/>
+        </p:nvSpPr>
+        <p:spPr>
+          <a:xfrm>
+            <a:off x="2980944" y="3447288"/>
+            <a:ext cx="2816352" cy="315468"/>
+          </a:xfrm>
+          <a:prstGeom prst="rect">
+            <a:avLst/>
+          </a:prstGeom>
+          <a:noFill/>
+          <a:ln/>
+        </p:spPr>
+        <p:txBody>
+          <a:bodyPr wrap="square" lIns="0" tIns="0" rIns="0" bIns="0" rtlCol="0" anchor="ctr">
+            <a:normAutofit/>
+          </a:bodyPr>
+          <a:lstStyle/>
+          <a:p>
+            <a:pPr indent="0" marL="0">
+              <a:buNone/>
+            </a:pPr>
+            <a:r>
+              <a:rPr lang="en-US" sz="1000" dirty="0">
+                <a:solidFill>
+                  <a:srgbClr val="102A43"/>
+                </a:solidFill>
+              </a:rPr>
+              <a:t>EUR 2,50</a:t>
+            </a:r>
+            <a:endParaRPr lang="en-US" sz="1000" dirty="0"/>
+          </a:p>
+        </p:txBody>
+      </p:sp>
+      <p:sp>
+        <p:nvSpPr>
+          <p:cNvPr id="23" name="Shape 21"/>
+          <p:cNvSpPr/>
+          <p:nvPr/>
+        </p:nvSpPr>
+        <p:spPr>
+          <a:xfrm>
+            <a:off x="5852160" y="3383280"/>
+            <a:ext cx="2926080" cy="388620"/>
+          </a:xfrm>
+          <a:prstGeom prst="rect">
+            <a:avLst/>
+          </a:prstGeom>
+          <a:solidFill>
+            <a:srgbClr val="FFFFFF"/>
+          </a:solidFill>
+          <a:ln w="12700">
+            <a:solidFill>
+              <a:srgbClr val="CBD5E1"/>
+            </a:solidFill>
+            <a:prstDash val="solid"/>
+          </a:ln>
+        </p:spPr>
+      </p:sp>
+      <p:sp>
+        <p:nvSpPr>
+          <p:cNvPr id="24" name="Text 22"/>
+          <p:cNvSpPr/>
+          <p:nvPr/>
+        </p:nvSpPr>
+        <p:spPr>
+          <a:xfrm>
+            <a:off x="5907024" y="3447288"/>
+            <a:ext cx="2816352" cy="315468"/>
+          </a:xfrm>
+          <a:prstGeom prst="rect">
+            <a:avLst/>
+          </a:prstGeom>
+          <a:noFill/>
+          <a:ln/>
+        </p:spPr>
+        <p:txBody>
+          <a:bodyPr wrap="square" lIns="0" tIns="0" rIns="0" bIns="0" rtlCol="0" anchor="ctr">
+            <a:normAutofit/>
+          </a:bodyPr>
+          <a:lstStyle/>
+          <a:p>
+            <a:pPr indent="0" marL="0">
+              <a:buNone/>
+            </a:pPr>
+            <a:r>
+              <a:rPr lang="en-US" sz="1000" dirty="0">
+                <a:solidFill>
+                  <a:srgbClr val="102A43"/>
+                </a:solidFill>
+              </a:rPr>
+              <a:t>200</a:t>
+            </a:r>
+            <a:endParaRPr lang="en-US" sz="1000" dirty="0"/>
+          </a:p>
+        </p:txBody>
+      </p:sp>
+      <p:sp>
+        <p:nvSpPr>
+          <p:cNvPr id="25" name="Shape 23"/>
+          <p:cNvSpPr/>
+          <p:nvPr/>
+        </p:nvSpPr>
+        <p:spPr>
+          <a:xfrm>
+            <a:off x="2926080" y="3771900"/>
+            <a:ext cx="2926080" cy="388620"/>
+          </a:xfrm>
+          <a:prstGeom prst="rect">
+            <a:avLst/>
+          </a:prstGeom>
+          <a:solidFill>
+            <a:srgbClr val="FFFFFF"/>
+          </a:solidFill>
+          <a:ln w="12700">
+            <a:solidFill>
+              <a:srgbClr val="CBD5E1"/>
+            </a:solidFill>
+            <a:prstDash val="solid"/>
+          </a:ln>
+        </p:spPr>
+      </p:sp>
+      <p:sp>
+        <p:nvSpPr>
+          <p:cNvPr id="26" name="Text 24"/>
+          <p:cNvSpPr/>
+          <p:nvPr/>
+        </p:nvSpPr>
+        <p:spPr>
+          <a:xfrm>
+            <a:off x="2980944" y="3835908"/>
+            <a:ext cx="2816352" cy="315468"/>
+          </a:xfrm>
+          <a:prstGeom prst="rect">
+            <a:avLst/>
+          </a:prstGeom>
+          <a:noFill/>
+          <a:ln/>
+        </p:spPr>
+        <p:txBody>
+          <a:bodyPr wrap="square" lIns="0" tIns="0" rIns="0" bIns="0" rtlCol="0" anchor="ctr">
+            <a:normAutofit/>
+          </a:bodyPr>
+          <a:lstStyle/>
+          <a:p>
+            <a:pPr indent="0" marL="0">
+              <a:buNone/>
+            </a:pPr>
+            <a:r>
+              <a:rPr lang="en-US" sz="1000" dirty="0">
+                <a:solidFill>
+                  <a:srgbClr val="102A43"/>
+                </a:solidFill>
+              </a:rPr>
+              <a:t>EUR 3,00</a:t>
+            </a:r>
+            <a:endParaRPr lang="en-US" sz="1000" dirty="0"/>
+          </a:p>
+        </p:txBody>
+      </p:sp>
+      <p:sp>
+        <p:nvSpPr>
+          <p:cNvPr id="27" name="Shape 25"/>
+          <p:cNvSpPr/>
+          <p:nvPr/>
+        </p:nvSpPr>
+        <p:spPr>
+          <a:xfrm>
+            <a:off x="5852160" y="3771900"/>
+            <a:ext cx="2926080" cy="388620"/>
+          </a:xfrm>
+          <a:prstGeom prst="rect">
+            <a:avLst/>
+          </a:prstGeom>
+          <a:solidFill>
+            <a:srgbClr val="FFFFFF"/>
+          </a:solidFill>
+          <a:ln w="12700">
+            <a:solidFill>
+              <a:srgbClr val="CBD5E1"/>
+            </a:solidFill>
+            <a:prstDash val="solid"/>
+          </a:ln>
+        </p:spPr>
+      </p:sp>
+      <p:sp>
+        <p:nvSpPr>
+          <p:cNvPr id="28" name="Text 26"/>
+          <p:cNvSpPr/>
+          <p:nvPr/>
+        </p:nvSpPr>
+        <p:spPr>
+          <a:xfrm>
+            <a:off x="5907024" y="3835908"/>
+            <a:ext cx="2816352" cy="315468"/>
+          </a:xfrm>
+          <a:prstGeom prst="rect">
+            <a:avLst/>
+          </a:prstGeom>
+          <a:noFill/>
+          <a:ln/>
+        </p:spPr>
+        <p:txBody>
+          <a:bodyPr wrap="square" lIns="0" tIns="0" rIns="0" bIns="0" rtlCol="0" anchor="ctr">
+            <a:normAutofit/>
+          </a:bodyPr>
+          <a:lstStyle/>
+          <a:p>
+            <a:pPr indent="0" marL="0">
+              <a:buNone/>
+            </a:pPr>
+            <a:r>
+              <a:rPr lang="en-US" sz="1000" dirty="0">
+                <a:solidFill>
+                  <a:srgbClr val="102A43"/>
+                </a:solidFill>
+              </a:rPr>
+              <a:t>100</a:t>
+            </a:r>
+            <a:endParaRPr lang="en-US" sz="1000" dirty="0"/>
+          </a:p>
+        </p:txBody>
+      </p:sp>
+      <p:sp>
+        <p:nvSpPr>
+          <p:cNvPr id="29" name="Shape 27"/>
+          <p:cNvSpPr/>
+          <p:nvPr/>
+        </p:nvSpPr>
+        <p:spPr>
+          <a:xfrm>
+            <a:off x="777240" y="4480560"/>
+            <a:ext cx="10698480" cy="384048"/>
+          </a:xfrm>
+          <a:prstGeom prst="roundRect">
+            <a:avLst>
+              <a:gd name="adj" fmla="val 14286"/>
+            </a:avLst>
+          </a:prstGeom>
+          <a:solidFill>
+            <a:srgbClr val="ECFEFF"/>
+          </a:solidFill>
+          <a:ln w="12700">
+            <a:solidFill>
+              <a:srgbClr val="BAE6FD"/>
+            </a:solidFill>
+            <a:prstDash val="solid"/>
+          </a:ln>
+        </p:spPr>
+      </p:sp>
+      <p:sp>
+        <p:nvSpPr>
+          <p:cNvPr id="30" name="Text 28"/>
+          <p:cNvSpPr/>
+          <p:nvPr/>
+        </p:nvSpPr>
+        <p:spPr>
+          <a:xfrm>
+            <a:off x="1005840" y="4572000"/>
+            <a:ext cx="10149840" cy="164592"/>
+          </a:xfrm>
+          <a:prstGeom prst="rect">
+            <a:avLst/>
+          </a:prstGeom>
+          <a:noFill/>
+          <a:ln/>
+        </p:spPr>
+        <p:txBody>
+          <a:bodyPr wrap="square" lIns="0" tIns="0" rIns="0" bIns="0" rtlCol="0" anchor="ctr">
+            <a:normAutofit/>
+          </a:bodyPr>
+          <a:lstStyle/>
+          <a:p>
+            <a:pPr indent="0" marL="0">
+              <a:buNone/>
+            </a:pPr>
+            <a:r>
+              <a:rPr lang="en-US" sz="1250" dirty="0">
+                <a:solidFill>
+                  <a:srgbClr val="102A43"/>
+                </a:solidFill>
+              </a:rPr>
+              <a:t>Lees de vraag: welke rij, kolom of periode heb je nodig?</a:t>
+            </a:r>
+            <a:endParaRPr lang="en-US" sz="1250" dirty="0"/>
+          </a:p>
+        </p:txBody>
+      </p:sp>
+      <p:sp>
+        <p:nvSpPr>
+          <p:cNvPr id="31" name="Shape 29"/>
+          <p:cNvSpPr/>
+          <p:nvPr/>
+        </p:nvSpPr>
+        <p:spPr>
+          <a:xfrm>
+            <a:off x="777240" y="4992624"/>
+            <a:ext cx="10698480" cy="384048"/>
+          </a:xfrm>
+          <a:prstGeom prst="roundRect">
+            <a:avLst>
+              <a:gd name="adj" fmla="val 14286"/>
+            </a:avLst>
+          </a:prstGeom>
+          <a:solidFill>
+            <a:srgbClr val="FFFFFF"/>
+          </a:solidFill>
+          <a:ln w="12700">
+            <a:solidFill>
+              <a:srgbClr val="BAE6FD"/>
+            </a:solidFill>
+            <a:prstDash val="solid"/>
+          </a:ln>
+        </p:spPr>
+      </p:sp>
+      <p:sp>
+        <p:nvSpPr>
+          <p:cNvPr id="32" name="Text 30"/>
+          <p:cNvSpPr/>
+          <p:nvPr/>
+        </p:nvSpPr>
+        <p:spPr>
+          <a:xfrm>
+            <a:off x="1005840" y="5084064"/>
+            <a:ext cx="10149840" cy="164592"/>
+          </a:xfrm>
+          <a:prstGeom prst="rect">
+            <a:avLst/>
+          </a:prstGeom>
+          <a:noFill/>
+          <a:ln/>
+        </p:spPr>
+        <p:txBody>
+          <a:bodyPr wrap="square" lIns="0" tIns="0" rIns="0" bIns="0" rtlCol="0" anchor="ctr">
+            <a:normAutofit/>
+          </a:bodyPr>
+          <a:lstStyle/>
+          <a:p>
+            <a:pPr indent="0" marL="0">
+              <a:buNone/>
+            </a:pPr>
+            <a:r>
+              <a:rPr lang="en-US" sz="1250" dirty="0">
+                <a:solidFill>
+                  <a:srgbClr val="102A43"/>
+                </a:solidFill>
+              </a:rPr>
+              <a:t>Controleer tabelkop, rijlabel, kolomlabel en eenheid.</a:t>
+            </a:r>
+            <a:endParaRPr lang="en-US" sz="1250" dirty="0"/>
+          </a:p>
+        </p:txBody>
+      </p:sp>
+      <p:sp>
+        <p:nvSpPr>
+          <p:cNvPr id="33" name="Shape 31"/>
+          <p:cNvSpPr/>
+          <p:nvPr/>
+        </p:nvSpPr>
+        <p:spPr>
+          <a:xfrm>
+            <a:off x="777240" y="5504688"/>
+            <a:ext cx="10698480" cy="384048"/>
+          </a:xfrm>
+          <a:prstGeom prst="roundRect">
+            <a:avLst>
+              <a:gd name="adj" fmla="val 14286"/>
+            </a:avLst>
+          </a:prstGeom>
+          <a:solidFill>
+            <a:srgbClr val="ECFEFF"/>
+          </a:solidFill>
+          <a:ln w="12700">
+            <a:solidFill>
+              <a:srgbClr val="BAE6FD"/>
+            </a:solidFill>
+            <a:prstDash val="solid"/>
+          </a:ln>
+        </p:spPr>
+      </p:sp>
+      <p:sp>
+        <p:nvSpPr>
+          <p:cNvPr id="34" name="Text 32"/>
+          <p:cNvSpPr/>
+          <p:nvPr/>
+        </p:nvSpPr>
+        <p:spPr>
+          <a:xfrm>
+            <a:off x="1005840" y="5596128"/>
+            <a:ext cx="10149840" cy="164592"/>
+          </a:xfrm>
+          <a:prstGeom prst="rect">
+            <a:avLst/>
+          </a:prstGeom>
+          <a:noFill/>
+          <a:ln/>
+        </p:spPr>
+        <p:txBody>
+          <a:bodyPr wrap="square" lIns="0" tIns="0" rIns="0" bIns="0" rtlCol="0" anchor="ctr">
+            <a:normAutofit/>
+          </a:bodyPr>
+          <a:lstStyle/>
+          <a:p>
+            <a:pPr indent="0" marL="0">
+              <a:buNone/>
+            </a:pPr>
+            <a:r>
+              <a:rPr lang="en-US" sz="1250" dirty="0">
+                <a:solidFill>
+                  <a:srgbClr val="102A43"/>
+                </a:solidFill>
+              </a:rPr>
               <a:t>Label je waarden: oud = 500 ijsjes, nieuw = 300 ijsjes.</a:t>
             </a:r>
-            <a:endParaRPr lang="en-US" sz="1500" dirty="0"/>
+            <a:endParaRPr lang="en-US" sz="1250" dirty="0"/>
           </a:p>
         </p:txBody>
       </p:sp>
@@ -2023,12 +3931,408 @@
         </p:nvSpPr>
         <p:spPr>
           <a:xfrm>
-            <a:off x="914400" y="1965960"/>
-            <a:ext cx="10058400" cy="457200"/>
+            <a:off x="3108960" y="1828800"/>
+            <a:ext cx="5669280" cy="2377440"/>
+          </a:xfrm>
+          <a:prstGeom prst="rect">
+            <a:avLst/>
+          </a:prstGeom>
+          <a:solidFill>
+            <a:srgbClr val="FFFFFF"/>
+          </a:solidFill>
+          <a:ln w="12700">
+            <a:solidFill>
+              <a:srgbClr val="CBD5E1"/>
+            </a:solidFill>
+            <a:prstDash val="solid"/>
+          </a:ln>
+        </p:spPr>
+      </p:sp>
+      <p:sp>
+        <p:nvSpPr>
+          <p:cNvPr id="6" name="Shape 4"/>
+          <p:cNvSpPr/>
+          <p:nvPr/>
+        </p:nvSpPr>
+        <p:spPr>
+          <a:xfrm>
+            <a:off x="3611880" y="3794760"/>
+            <a:ext cx="4892040" cy="0"/>
+          </a:xfrm>
+          <a:prstGeom prst="line">
+            <a:avLst/>
+          </a:prstGeom>
+          <a:noFill/>
+          <a:ln w="17780">
+            <a:solidFill>
+              <a:srgbClr val="102A43"/>
+            </a:solidFill>
+            <a:prstDash val="solid"/>
+          </a:ln>
+        </p:spPr>
+      </p:sp>
+      <p:sp>
+        <p:nvSpPr>
+          <p:cNvPr id="7" name="Shape 5"/>
+          <p:cNvSpPr/>
+          <p:nvPr/>
+        </p:nvSpPr>
+        <p:spPr>
+          <a:xfrm>
+            <a:off x="3611880" y="3794760"/>
+            <a:ext cx="0" cy="-1691640"/>
+          </a:xfrm>
+          <a:prstGeom prst="line">
+            <a:avLst/>
+          </a:prstGeom>
+          <a:noFill/>
+          <a:ln w="17780">
+            <a:solidFill>
+              <a:srgbClr val="102A43"/>
+            </a:solidFill>
+            <a:prstDash val="solid"/>
+          </a:ln>
+        </p:spPr>
+      </p:sp>
+      <p:sp>
+        <p:nvSpPr>
+          <p:cNvPr id="8" name="Text 6"/>
+          <p:cNvSpPr/>
+          <p:nvPr/>
+        </p:nvSpPr>
+        <p:spPr>
+          <a:xfrm>
+            <a:off x="3246120" y="1975104"/>
+            <a:ext cx="228600" cy="182880"/>
+          </a:xfrm>
+          <a:prstGeom prst="rect">
+            <a:avLst/>
+          </a:prstGeom>
+          <a:noFill/>
+          <a:ln/>
+        </p:spPr>
+        <p:txBody>
+          <a:bodyPr wrap="square" lIns="0" tIns="0" rIns="0" bIns="0" rtlCol="0" anchor="ctr"/>
+          <a:lstStyle/>
+          <a:p>
+            <a:pPr indent="0" marL="0">
+              <a:buNone/>
+            </a:pPr>
+            <a:r>
+              <a:rPr lang="en-US" sz="1200" b="1" dirty="0">
+                <a:solidFill>
+                  <a:srgbClr val="102A43"/>
+                </a:solidFill>
+              </a:rPr>
+              <a:t>P</a:t>
+            </a:r>
+            <a:endParaRPr lang="en-US" sz="1200" dirty="0"/>
+          </a:p>
+        </p:txBody>
+      </p:sp>
+      <p:sp>
+        <p:nvSpPr>
+          <p:cNvPr id="9" name="Text 7"/>
+          <p:cNvSpPr/>
+          <p:nvPr/>
+        </p:nvSpPr>
+        <p:spPr>
+          <a:xfrm>
+            <a:off x="8394192" y="3950208"/>
+            <a:ext cx="228600" cy="182880"/>
+          </a:xfrm>
+          <a:prstGeom prst="rect">
+            <a:avLst/>
+          </a:prstGeom>
+          <a:noFill/>
+          <a:ln/>
+        </p:spPr>
+        <p:txBody>
+          <a:bodyPr wrap="square" lIns="0" tIns="0" rIns="0" bIns="0" rtlCol="0" anchor="ctr"/>
+          <a:lstStyle/>
+          <a:p>
+            <a:pPr indent="0" marL="0">
+              <a:buNone/>
+            </a:pPr>
+            <a:r>
+              <a:rPr lang="en-US" sz="1200" b="1" dirty="0">
+                <a:solidFill>
+                  <a:srgbClr val="102A43"/>
+                </a:solidFill>
+              </a:rPr>
+              <a:t>Q</a:t>
+            </a:r>
+            <a:endParaRPr lang="en-US" sz="1200" dirty="0"/>
+          </a:p>
+        </p:txBody>
+      </p:sp>
+      <p:sp>
+        <p:nvSpPr>
+          <p:cNvPr id="10" name="Shape 8"/>
+          <p:cNvSpPr/>
+          <p:nvPr/>
+        </p:nvSpPr>
+        <p:spPr>
+          <a:xfrm>
+            <a:off x="4005072" y="2395728"/>
+            <a:ext cx="822960" cy="365760"/>
+          </a:xfrm>
+          <a:prstGeom prst="line">
+            <a:avLst/>
+          </a:prstGeom>
+          <a:noFill/>
+          <a:ln w="30480">
+            <a:solidFill>
+              <a:srgbClr val="2F7D4A"/>
+            </a:solidFill>
+            <a:prstDash val="solid"/>
+          </a:ln>
+        </p:spPr>
+      </p:sp>
+      <p:sp>
+        <p:nvSpPr>
+          <p:cNvPr id="11" name="Shape 9"/>
+          <p:cNvSpPr/>
+          <p:nvPr/>
+        </p:nvSpPr>
+        <p:spPr>
+          <a:xfrm>
+            <a:off x="4828032" y="2761488"/>
+            <a:ext cx="822960" cy="365760"/>
+          </a:xfrm>
+          <a:prstGeom prst="line">
+            <a:avLst/>
+          </a:prstGeom>
+          <a:noFill/>
+          <a:ln w="30480">
+            <a:solidFill>
+              <a:srgbClr val="2F7D4A"/>
+            </a:solidFill>
+            <a:prstDash val="solid"/>
+          </a:ln>
+        </p:spPr>
+      </p:sp>
+      <p:sp>
+        <p:nvSpPr>
+          <p:cNvPr id="12" name="Shape 10"/>
+          <p:cNvSpPr/>
+          <p:nvPr/>
+        </p:nvSpPr>
+        <p:spPr>
+          <a:xfrm>
+            <a:off x="5650992" y="3127248"/>
+            <a:ext cx="822960" cy="365760"/>
+          </a:xfrm>
+          <a:prstGeom prst="line">
+            <a:avLst/>
+          </a:prstGeom>
+          <a:noFill/>
+          <a:ln w="30480">
+            <a:solidFill>
+              <a:srgbClr val="2F7D4A"/>
+            </a:solidFill>
+            <a:prstDash val="solid"/>
+          </a:ln>
+        </p:spPr>
+      </p:sp>
+      <p:sp>
+        <p:nvSpPr>
+          <p:cNvPr id="13" name="Shape 11"/>
+          <p:cNvSpPr/>
+          <p:nvPr/>
+        </p:nvSpPr>
+        <p:spPr>
+          <a:xfrm>
+            <a:off x="6473952" y="3493008"/>
+            <a:ext cx="822960" cy="365760"/>
+          </a:xfrm>
+          <a:prstGeom prst="line">
+            <a:avLst/>
+          </a:prstGeom>
+          <a:noFill/>
+          <a:ln w="30480">
+            <a:solidFill>
+              <a:srgbClr val="2F7D4A"/>
+            </a:solidFill>
+            <a:prstDash val="solid"/>
+          </a:ln>
+        </p:spPr>
+      </p:sp>
+      <p:sp>
+        <p:nvSpPr>
+          <p:cNvPr id="14" name="Shape 12"/>
+          <p:cNvSpPr/>
+          <p:nvPr/>
+        </p:nvSpPr>
+        <p:spPr>
+          <a:xfrm>
+            <a:off x="3963924" y="2354580"/>
+            <a:ext cx="82296" cy="82296"/>
+          </a:xfrm>
+          <a:prstGeom prst="ellipse">
+            <a:avLst/>
+          </a:prstGeom>
+          <a:solidFill>
+            <a:srgbClr val="B45309"/>
+          </a:solidFill>
+          <a:ln w="12700">
+            <a:solidFill>
+              <a:srgbClr val="FFFFFF"/>
+            </a:solidFill>
+            <a:prstDash val="solid"/>
+          </a:ln>
+        </p:spPr>
+      </p:sp>
+      <p:sp>
+        <p:nvSpPr>
+          <p:cNvPr id="15" name="Shape 13"/>
+          <p:cNvSpPr/>
+          <p:nvPr/>
+        </p:nvSpPr>
+        <p:spPr>
+          <a:xfrm>
+            <a:off x="4786884" y="2720340"/>
+            <a:ext cx="82296" cy="82296"/>
+          </a:xfrm>
+          <a:prstGeom prst="ellipse">
+            <a:avLst/>
+          </a:prstGeom>
+          <a:solidFill>
+            <a:srgbClr val="B45309"/>
+          </a:solidFill>
+          <a:ln w="12700">
+            <a:solidFill>
+              <a:srgbClr val="FFFFFF"/>
+            </a:solidFill>
+            <a:prstDash val="solid"/>
+          </a:ln>
+        </p:spPr>
+      </p:sp>
+      <p:sp>
+        <p:nvSpPr>
+          <p:cNvPr id="16" name="Shape 14"/>
+          <p:cNvSpPr/>
+          <p:nvPr/>
+        </p:nvSpPr>
+        <p:spPr>
+          <a:xfrm>
+            <a:off x="5609844" y="3086100"/>
+            <a:ext cx="82296" cy="82296"/>
+          </a:xfrm>
+          <a:prstGeom prst="ellipse">
+            <a:avLst/>
+          </a:prstGeom>
+          <a:solidFill>
+            <a:srgbClr val="B45309"/>
+          </a:solidFill>
+          <a:ln w="12700">
+            <a:solidFill>
+              <a:srgbClr val="FFFFFF"/>
+            </a:solidFill>
+            <a:prstDash val="solid"/>
+          </a:ln>
+        </p:spPr>
+      </p:sp>
+      <p:sp>
+        <p:nvSpPr>
+          <p:cNvPr id="17" name="Text 15"/>
+          <p:cNvSpPr/>
+          <p:nvPr/>
+        </p:nvSpPr>
+        <p:spPr>
+          <a:xfrm>
+            <a:off x="5760720" y="2944368"/>
+            <a:ext cx="1097280" cy="182880"/>
+          </a:xfrm>
+          <a:prstGeom prst="rect">
+            <a:avLst/>
+          </a:prstGeom>
+          <a:noFill/>
+          <a:ln/>
+        </p:spPr>
+        <p:txBody>
+          <a:bodyPr wrap="square" lIns="0" tIns="0" rIns="0" bIns="0" rtlCol="0" anchor="ctr"/>
+          <a:lstStyle/>
+          <a:p>
+            <a:pPr indent="0" marL="0">
+              <a:buNone/>
+            </a:pPr>
+            <a:r>
+              <a:rPr lang="en-US" sz="900" dirty="0">
+                <a:solidFill>
+                  <a:srgbClr val="102A43"/>
+                </a:solidFill>
+              </a:rPr>
+              <a:t>(300; 2,00)</a:t>
+            </a:r>
+            <a:endParaRPr lang="en-US" sz="900" dirty="0"/>
+          </a:p>
+        </p:txBody>
+      </p:sp>
+      <p:sp>
+        <p:nvSpPr>
+          <p:cNvPr id="18" name="Shape 16"/>
+          <p:cNvSpPr/>
+          <p:nvPr/>
+        </p:nvSpPr>
+        <p:spPr>
+          <a:xfrm>
+            <a:off x="6432804" y="3451860"/>
+            <a:ext cx="82296" cy="82296"/>
+          </a:xfrm>
+          <a:prstGeom prst="ellipse">
+            <a:avLst/>
+          </a:prstGeom>
+          <a:solidFill>
+            <a:srgbClr val="B45309"/>
+          </a:solidFill>
+          <a:ln w="12700">
+            <a:solidFill>
+              <a:srgbClr val="FFFFFF"/>
+            </a:solidFill>
+            <a:prstDash val="solid"/>
+          </a:ln>
+        </p:spPr>
+      </p:sp>
+      <p:sp>
+        <p:nvSpPr>
+          <p:cNvPr id="19" name="Shape 17"/>
+          <p:cNvSpPr/>
+          <p:nvPr/>
+        </p:nvSpPr>
+        <p:spPr>
+          <a:xfrm>
+            <a:off x="7255764" y="3817620"/>
+            <a:ext cx="82296" cy="82296"/>
+          </a:xfrm>
+          <a:prstGeom prst="ellipse">
+            <a:avLst/>
+          </a:prstGeom>
+          <a:solidFill>
+            <a:srgbClr val="B45309"/>
+          </a:solidFill>
+          <a:ln w="12700">
+            <a:solidFill>
+              <a:srgbClr val="FFFFFF"/>
+            </a:solidFill>
+            <a:prstDash val="solid"/>
+          </a:ln>
+        </p:spPr>
+      </p:sp>
+      <p:sp>
+        <p:nvSpPr>
+          <p:cNvPr id="20" name="Shape 18"/>
+          <p:cNvSpPr/>
+          <p:nvPr/>
+        </p:nvSpPr>
+        <p:spPr>
+          <a:xfrm>
+            <a:off x="777240" y="4480560"/>
+            <a:ext cx="10698480" cy="384048"/>
           </a:xfrm>
           <a:prstGeom prst="roundRect">
             <a:avLst>
-              <a:gd name="adj" fmla="val 16000"/>
+              <a:gd name="adj" fmla="val 14286"/>
             </a:avLst>
           </a:prstGeom>
           <a:solidFill>
@@ -2044,14 +4348,14 @@
       </p:sp>
       <p:sp>
         <p:nvSpPr>
-          <p:cNvPr id="6" name="Text 4"/>
-          <p:cNvSpPr/>
-          <p:nvPr/>
-        </p:nvSpPr>
-        <p:spPr>
-          <a:xfrm>
-            <a:off x="1143000" y="2084832"/>
-            <a:ext cx="9509760" cy="182880"/>
+          <p:cNvPr id="21" name="Text 19"/>
+          <p:cNvSpPr/>
+          <p:nvPr/>
+        </p:nvSpPr>
+        <p:spPr>
+          <a:xfrm>
+            <a:off x="1005840" y="4572000"/>
+            <a:ext cx="10149840" cy="164592"/>
           </a:xfrm>
           <a:prstGeom prst="rect">
             <a:avLst/>
@@ -2069,31 +4373,31 @@
               <a:buNone/>
             </a:pPr>
             <a:r>
-              <a:rPr lang="en-US" sz="1500" dirty="0">
+              <a:rPr lang="en-US" sz="1250" dirty="0">
                 <a:solidFill>
                   <a:srgbClr val="102A43"/>
                 </a:solidFill>
               </a:rPr>
               <a:t>P staat op de verticale as.</a:t>
             </a:r>
-            <a:endParaRPr lang="en-US" sz="1500" dirty="0"/>
-          </a:p>
-        </p:txBody>
-      </p:sp>
-      <p:sp>
-        <p:nvSpPr>
-          <p:cNvPr id="7" name="Shape 5"/>
-          <p:cNvSpPr/>
-          <p:nvPr/>
-        </p:nvSpPr>
-        <p:spPr>
-          <a:xfrm>
-            <a:off x="914400" y="2679192"/>
-            <a:ext cx="10058400" cy="457200"/>
+            <a:endParaRPr lang="en-US" sz="1250" dirty="0"/>
+          </a:p>
+        </p:txBody>
+      </p:sp>
+      <p:sp>
+        <p:nvSpPr>
+          <p:cNvPr id="22" name="Shape 20"/>
+          <p:cNvSpPr/>
+          <p:nvPr/>
+        </p:nvSpPr>
+        <p:spPr>
+          <a:xfrm>
+            <a:off x="777240" y="4992624"/>
+            <a:ext cx="10698480" cy="384048"/>
           </a:xfrm>
           <a:prstGeom prst="roundRect">
             <a:avLst>
-              <a:gd name="adj" fmla="val 16000"/>
+              <a:gd name="adj" fmla="val 14286"/>
             </a:avLst>
           </a:prstGeom>
           <a:solidFill>
@@ -2109,14 +4413,14 @@
       </p:sp>
       <p:sp>
         <p:nvSpPr>
-          <p:cNvPr id="8" name="Text 6"/>
-          <p:cNvSpPr/>
-          <p:nvPr/>
-        </p:nvSpPr>
-        <p:spPr>
-          <a:xfrm>
-            <a:off x="1143000" y="2798064"/>
-            <a:ext cx="9509760" cy="182880"/>
+          <p:cNvPr id="23" name="Text 21"/>
+          <p:cNvSpPr/>
+          <p:nvPr/>
+        </p:nvSpPr>
+        <p:spPr>
+          <a:xfrm>
+            <a:off x="1005840" y="5084064"/>
+            <a:ext cx="10149840" cy="164592"/>
           </a:xfrm>
           <a:prstGeom prst="rect">
             <a:avLst/>
@@ -2134,31 +4438,31 @@
               <a:buNone/>
             </a:pPr>
             <a:r>
-              <a:rPr lang="en-US" sz="1500" dirty="0">
+              <a:rPr lang="en-US" sz="1250" dirty="0">
                 <a:solidFill>
                   <a:srgbClr val="102A43"/>
                 </a:solidFill>
               </a:rPr>
               <a:t>Q staat op de horizontale as.</a:t>
             </a:r>
-            <a:endParaRPr lang="en-US" sz="1500" dirty="0"/>
-          </a:p>
-        </p:txBody>
-      </p:sp>
-      <p:sp>
-        <p:nvSpPr>
-          <p:cNvPr id="9" name="Shape 7"/>
-          <p:cNvSpPr/>
-          <p:nvPr/>
-        </p:nvSpPr>
-        <p:spPr>
-          <a:xfrm>
-            <a:off x="914400" y="3392424"/>
-            <a:ext cx="10058400" cy="457200"/>
+            <a:endParaRPr lang="en-US" sz="1250" dirty="0"/>
+          </a:p>
+        </p:txBody>
+      </p:sp>
+      <p:sp>
+        <p:nvSpPr>
+          <p:cNvPr id="24" name="Shape 22"/>
+          <p:cNvSpPr/>
+          <p:nvPr/>
+        </p:nvSpPr>
+        <p:spPr>
+          <a:xfrm>
+            <a:off x="777240" y="5504688"/>
+            <a:ext cx="10698480" cy="384048"/>
           </a:xfrm>
           <a:prstGeom prst="roundRect">
             <a:avLst>
-              <a:gd name="adj" fmla="val 16000"/>
+              <a:gd name="adj" fmla="val 14286"/>
             </a:avLst>
           </a:prstGeom>
           <a:solidFill>
@@ -2174,14 +4478,14 @@
       </p:sp>
       <p:sp>
         <p:nvSpPr>
-          <p:cNvPr id="10" name="Text 8"/>
-          <p:cNvSpPr/>
-          <p:nvPr/>
-        </p:nvSpPr>
-        <p:spPr>
-          <a:xfrm>
-            <a:off x="1143000" y="3511296"/>
-            <a:ext cx="9509760" cy="182880"/>
+          <p:cNvPr id="25" name="Text 23"/>
+          <p:cNvSpPr/>
+          <p:nvPr/>
+        </p:nvSpPr>
+        <p:spPr>
+          <a:xfrm>
+            <a:off x="1005840" y="5596128"/>
+            <a:ext cx="10149840" cy="164592"/>
           </a:xfrm>
           <a:prstGeom prst="rect">
             <a:avLst/>
@@ -2199,14 +4503,14 @@
               <a:buNone/>
             </a:pPr>
             <a:r>
-              <a:rPr lang="en-US" sz="1500" dirty="0">
+              <a:rPr lang="en-US" sz="1250" dirty="0">
                 <a:solidFill>
                   <a:srgbClr val="102A43"/>
                 </a:solidFill>
               </a:rPr>
               <a:t>Een punt schrijf je als (Q; P), bijvoorbeeld (300; 2,00).</a:t>
             </a:r>
-            <a:endParaRPr lang="en-US" sz="1500" dirty="0"/>
+            <a:endParaRPr lang="en-US" sz="1250" dirty="0"/>
           </a:p>
         </p:txBody>
       </p:sp>
@@ -2360,12 +4664,526 @@
         </p:nvSpPr>
         <p:spPr>
           <a:xfrm>
-            <a:off x="914400" y="1965960"/>
-            <a:ext cx="10058400" cy="457200"/>
+            <a:off x="3108960" y="1828800"/>
+            <a:ext cx="5669280" cy="2377440"/>
+          </a:xfrm>
+          <a:prstGeom prst="rect">
+            <a:avLst/>
+          </a:prstGeom>
+          <a:solidFill>
+            <a:srgbClr val="FFFFFF"/>
+          </a:solidFill>
+          <a:ln w="12700">
+            <a:solidFill>
+              <a:srgbClr val="CBD5E1"/>
+            </a:solidFill>
+            <a:prstDash val="solid"/>
+          </a:ln>
+        </p:spPr>
+      </p:sp>
+      <p:sp>
+        <p:nvSpPr>
+          <p:cNvPr id="6" name="Shape 4"/>
+          <p:cNvSpPr/>
+          <p:nvPr/>
+        </p:nvSpPr>
+        <p:spPr>
+          <a:xfrm>
+            <a:off x="3611880" y="3794760"/>
+            <a:ext cx="4892040" cy="0"/>
+          </a:xfrm>
+          <a:prstGeom prst="line">
+            <a:avLst/>
+          </a:prstGeom>
+          <a:noFill/>
+          <a:ln w="17780">
+            <a:solidFill>
+              <a:srgbClr val="102A43"/>
+            </a:solidFill>
+            <a:prstDash val="solid"/>
+          </a:ln>
+        </p:spPr>
+      </p:sp>
+      <p:sp>
+        <p:nvSpPr>
+          <p:cNvPr id="7" name="Shape 5"/>
+          <p:cNvSpPr/>
+          <p:nvPr/>
+        </p:nvSpPr>
+        <p:spPr>
+          <a:xfrm>
+            <a:off x="3611880" y="3794760"/>
+            <a:ext cx="0" cy="-1691640"/>
+          </a:xfrm>
+          <a:prstGeom prst="line">
+            <a:avLst/>
+          </a:prstGeom>
+          <a:noFill/>
+          <a:ln w="17780">
+            <a:solidFill>
+              <a:srgbClr val="102A43"/>
+            </a:solidFill>
+            <a:prstDash val="solid"/>
+          </a:ln>
+        </p:spPr>
+      </p:sp>
+      <p:sp>
+        <p:nvSpPr>
+          <p:cNvPr id="8" name="Text 6"/>
+          <p:cNvSpPr/>
+          <p:nvPr/>
+        </p:nvSpPr>
+        <p:spPr>
+          <a:xfrm>
+            <a:off x="3246120" y="1975104"/>
+            <a:ext cx="228600" cy="182880"/>
+          </a:xfrm>
+          <a:prstGeom prst="rect">
+            <a:avLst/>
+          </a:prstGeom>
+          <a:noFill/>
+          <a:ln/>
+        </p:spPr>
+        <p:txBody>
+          <a:bodyPr wrap="square" lIns="0" tIns="0" rIns="0" bIns="0" rtlCol="0" anchor="ctr"/>
+          <a:lstStyle/>
+          <a:p>
+            <a:pPr indent="0" marL="0">
+              <a:buNone/>
+            </a:pPr>
+            <a:r>
+              <a:rPr lang="en-US" sz="1200" b="1" dirty="0">
+                <a:solidFill>
+                  <a:srgbClr val="102A43"/>
+                </a:solidFill>
+              </a:rPr>
+              <a:t>P</a:t>
+            </a:r>
+            <a:endParaRPr lang="en-US" sz="1200" dirty="0"/>
+          </a:p>
+        </p:txBody>
+      </p:sp>
+      <p:sp>
+        <p:nvSpPr>
+          <p:cNvPr id="9" name="Text 7"/>
+          <p:cNvSpPr/>
+          <p:nvPr/>
+        </p:nvSpPr>
+        <p:spPr>
+          <a:xfrm>
+            <a:off x="8394192" y="3950208"/>
+            <a:ext cx="228600" cy="182880"/>
+          </a:xfrm>
+          <a:prstGeom prst="rect">
+            <a:avLst/>
+          </a:prstGeom>
+          <a:noFill/>
+          <a:ln/>
+        </p:spPr>
+        <p:txBody>
+          <a:bodyPr wrap="square" lIns="0" tIns="0" rIns="0" bIns="0" rtlCol="0" anchor="ctr"/>
+          <a:lstStyle/>
+          <a:p>
+            <a:pPr indent="0" marL="0">
+              <a:buNone/>
+            </a:pPr>
+            <a:r>
+              <a:rPr lang="en-US" sz="1200" b="1" dirty="0">
+                <a:solidFill>
+                  <a:srgbClr val="102A43"/>
+                </a:solidFill>
+              </a:rPr>
+              <a:t>Q</a:t>
+            </a:r>
+            <a:endParaRPr lang="en-US" sz="1200" dirty="0"/>
+          </a:p>
+        </p:txBody>
+      </p:sp>
+      <p:sp>
+        <p:nvSpPr>
+          <p:cNvPr id="10" name="Shape 8"/>
+          <p:cNvSpPr/>
+          <p:nvPr/>
+        </p:nvSpPr>
+        <p:spPr>
+          <a:xfrm>
+            <a:off x="4005072" y="2395728"/>
+            <a:ext cx="822960" cy="365760"/>
+          </a:xfrm>
+          <a:prstGeom prst="line">
+            <a:avLst/>
+          </a:prstGeom>
+          <a:noFill/>
+          <a:ln w="30480">
+            <a:solidFill>
+              <a:srgbClr val="2F7D4A"/>
+            </a:solidFill>
+            <a:prstDash val="solid"/>
+          </a:ln>
+        </p:spPr>
+      </p:sp>
+      <p:sp>
+        <p:nvSpPr>
+          <p:cNvPr id="11" name="Shape 9"/>
+          <p:cNvSpPr/>
+          <p:nvPr/>
+        </p:nvSpPr>
+        <p:spPr>
+          <a:xfrm>
+            <a:off x="4828032" y="2761488"/>
+            <a:ext cx="822960" cy="365760"/>
+          </a:xfrm>
+          <a:prstGeom prst="line">
+            <a:avLst/>
+          </a:prstGeom>
+          <a:noFill/>
+          <a:ln w="30480">
+            <a:solidFill>
+              <a:srgbClr val="2F7D4A"/>
+            </a:solidFill>
+            <a:prstDash val="solid"/>
+          </a:ln>
+        </p:spPr>
+      </p:sp>
+      <p:sp>
+        <p:nvSpPr>
+          <p:cNvPr id="12" name="Shape 10"/>
+          <p:cNvSpPr/>
+          <p:nvPr/>
+        </p:nvSpPr>
+        <p:spPr>
+          <a:xfrm>
+            <a:off x="5650992" y="3127248"/>
+            <a:ext cx="822960" cy="365760"/>
+          </a:xfrm>
+          <a:prstGeom prst="line">
+            <a:avLst/>
+          </a:prstGeom>
+          <a:noFill/>
+          <a:ln w="30480">
+            <a:solidFill>
+              <a:srgbClr val="2F7D4A"/>
+            </a:solidFill>
+            <a:prstDash val="solid"/>
+          </a:ln>
+        </p:spPr>
+      </p:sp>
+      <p:sp>
+        <p:nvSpPr>
+          <p:cNvPr id="13" name="Shape 11"/>
+          <p:cNvSpPr/>
+          <p:nvPr/>
+        </p:nvSpPr>
+        <p:spPr>
+          <a:xfrm>
+            <a:off x="6473952" y="3493008"/>
+            <a:ext cx="822960" cy="365760"/>
+          </a:xfrm>
+          <a:prstGeom prst="line">
+            <a:avLst/>
+          </a:prstGeom>
+          <a:noFill/>
+          <a:ln w="30480">
+            <a:solidFill>
+              <a:srgbClr val="2F7D4A"/>
+            </a:solidFill>
+            <a:prstDash val="solid"/>
+          </a:ln>
+        </p:spPr>
+      </p:sp>
+      <p:sp>
+        <p:nvSpPr>
+          <p:cNvPr id="14" name="Shape 12"/>
+          <p:cNvSpPr/>
+          <p:nvPr/>
+        </p:nvSpPr>
+        <p:spPr>
+          <a:xfrm>
+            <a:off x="3963924" y="2354580"/>
+            <a:ext cx="82296" cy="82296"/>
+          </a:xfrm>
+          <a:prstGeom prst="ellipse">
+            <a:avLst/>
+          </a:prstGeom>
+          <a:solidFill>
+            <a:srgbClr val="B45309"/>
+          </a:solidFill>
+          <a:ln w="12700">
+            <a:solidFill>
+              <a:srgbClr val="FFFFFF"/>
+            </a:solidFill>
+            <a:prstDash val="solid"/>
+          </a:ln>
+        </p:spPr>
+      </p:sp>
+      <p:sp>
+        <p:nvSpPr>
+          <p:cNvPr id="15" name="Shape 13"/>
+          <p:cNvSpPr/>
+          <p:nvPr/>
+        </p:nvSpPr>
+        <p:spPr>
+          <a:xfrm>
+            <a:off x="4786884" y="2720340"/>
+            <a:ext cx="82296" cy="82296"/>
+          </a:xfrm>
+          <a:prstGeom prst="ellipse">
+            <a:avLst/>
+          </a:prstGeom>
+          <a:solidFill>
+            <a:srgbClr val="B45309"/>
+          </a:solidFill>
+          <a:ln w="12700">
+            <a:solidFill>
+              <a:srgbClr val="FFFFFF"/>
+            </a:solidFill>
+            <a:prstDash val="solid"/>
+          </a:ln>
+        </p:spPr>
+      </p:sp>
+      <p:sp>
+        <p:nvSpPr>
+          <p:cNvPr id="16" name="Shape 14"/>
+          <p:cNvSpPr/>
+          <p:nvPr/>
+        </p:nvSpPr>
+        <p:spPr>
+          <a:xfrm>
+            <a:off x="5609844" y="3086100"/>
+            <a:ext cx="82296" cy="82296"/>
+          </a:xfrm>
+          <a:prstGeom prst="ellipse">
+            <a:avLst/>
+          </a:prstGeom>
+          <a:solidFill>
+            <a:srgbClr val="B45309"/>
+          </a:solidFill>
+          <a:ln w="12700">
+            <a:solidFill>
+              <a:srgbClr val="FFFFFF"/>
+            </a:solidFill>
+            <a:prstDash val="solid"/>
+          </a:ln>
+        </p:spPr>
+      </p:sp>
+      <p:sp>
+        <p:nvSpPr>
+          <p:cNvPr id="17" name="Text 15"/>
+          <p:cNvSpPr/>
+          <p:nvPr/>
+        </p:nvSpPr>
+        <p:spPr>
+          <a:xfrm>
+            <a:off x="5760720" y="2944368"/>
+            <a:ext cx="1097280" cy="182880"/>
+          </a:xfrm>
+          <a:prstGeom prst="rect">
+            <a:avLst/>
+          </a:prstGeom>
+          <a:noFill/>
+          <a:ln/>
+        </p:spPr>
+        <p:txBody>
+          <a:bodyPr wrap="square" lIns="0" tIns="0" rIns="0" bIns="0" rtlCol="0" anchor="ctr"/>
+          <a:lstStyle/>
+          <a:p>
+            <a:pPr indent="0" marL="0">
+              <a:buNone/>
+            </a:pPr>
+            <a:r>
+              <a:rPr lang="en-US" sz="900" dirty="0">
+                <a:solidFill>
+                  <a:srgbClr val="102A43"/>
+                </a:solidFill>
+              </a:rPr>
+              <a:t>(300; 2,00)</a:t>
+            </a:r>
+            <a:endParaRPr lang="en-US" sz="900" dirty="0"/>
+          </a:p>
+        </p:txBody>
+      </p:sp>
+      <p:sp>
+        <p:nvSpPr>
+          <p:cNvPr id="18" name="Shape 16"/>
+          <p:cNvSpPr/>
+          <p:nvPr/>
+        </p:nvSpPr>
+        <p:spPr>
+          <a:xfrm>
+            <a:off x="6432804" y="3451860"/>
+            <a:ext cx="82296" cy="82296"/>
+          </a:xfrm>
+          <a:prstGeom prst="ellipse">
+            <a:avLst/>
+          </a:prstGeom>
+          <a:solidFill>
+            <a:srgbClr val="B45309"/>
+          </a:solidFill>
+          <a:ln w="12700">
+            <a:solidFill>
+              <a:srgbClr val="FFFFFF"/>
+            </a:solidFill>
+            <a:prstDash val="solid"/>
+          </a:ln>
+        </p:spPr>
+      </p:sp>
+      <p:sp>
+        <p:nvSpPr>
+          <p:cNvPr id="19" name="Shape 17"/>
+          <p:cNvSpPr/>
+          <p:nvPr/>
+        </p:nvSpPr>
+        <p:spPr>
+          <a:xfrm>
+            <a:off x="7255764" y="3817620"/>
+            <a:ext cx="82296" cy="82296"/>
+          </a:xfrm>
+          <a:prstGeom prst="ellipse">
+            <a:avLst/>
+          </a:prstGeom>
+          <a:solidFill>
+            <a:srgbClr val="B45309"/>
+          </a:solidFill>
+          <a:ln w="12700">
+            <a:solidFill>
+              <a:srgbClr val="FFFFFF"/>
+            </a:solidFill>
+            <a:prstDash val="solid"/>
+          </a:ln>
+        </p:spPr>
+      </p:sp>
+      <p:sp>
+        <p:nvSpPr>
+          <p:cNvPr id="20" name="Shape 18"/>
+          <p:cNvSpPr/>
+          <p:nvPr/>
+        </p:nvSpPr>
+        <p:spPr>
+          <a:xfrm>
+            <a:off x="3611880" y="2980944"/>
+            <a:ext cx="2404872" cy="0"/>
+          </a:xfrm>
+          <a:prstGeom prst="line">
+            <a:avLst/>
+          </a:prstGeom>
+          <a:noFill/>
+          <a:ln w="20320">
+            <a:solidFill>
+              <a:srgbClr val="8A2D0E"/>
+            </a:solidFill>
+            <a:prstDash val="solid"/>
+          </a:ln>
+        </p:spPr>
+      </p:sp>
+      <p:sp>
+        <p:nvSpPr>
+          <p:cNvPr id="21" name="Shape 19"/>
+          <p:cNvSpPr/>
+          <p:nvPr/>
+        </p:nvSpPr>
+        <p:spPr>
+          <a:xfrm>
+            <a:off x="6016752" y="2980944"/>
+            <a:ext cx="0" cy="813816"/>
+          </a:xfrm>
+          <a:prstGeom prst="line">
+            <a:avLst/>
+          </a:prstGeom>
+          <a:noFill/>
+          <a:ln w="20320">
+            <a:solidFill>
+              <a:srgbClr val="8A2D0E"/>
+            </a:solidFill>
+            <a:prstDash val="solid"/>
+          </a:ln>
+        </p:spPr>
+      </p:sp>
+      <p:sp>
+        <p:nvSpPr>
+          <p:cNvPr id="22" name="Text 20"/>
+          <p:cNvSpPr/>
+          <p:nvPr/>
+        </p:nvSpPr>
+        <p:spPr>
+          <a:xfrm>
+            <a:off x="3749040" y="2761488"/>
+            <a:ext cx="822960" cy="164592"/>
+          </a:xfrm>
+          <a:prstGeom prst="rect">
+            <a:avLst/>
+          </a:prstGeom>
+          <a:noFill/>
+          <a:ln/>
+        </p:spPr>
+        <p:txBody>
+          <a:bodyPr wrap="square" lIns="0" tIns="0" rIns="0" bIns="0" rtlCol="0" anchor="ctr"/>
+          <a:lstStyle/>
+          <a:p>
+            <a:pPr indent="0" marL="0">
+              <a:buNone/>
+            </a:pPr>
+            <a:r>
+              <a:rPr lang="en-US" sz="850" dirty="0">
+                <a:solidFill>
+                  <a:srgbClr val="8A2D0E"/>
+                </a:solidFill>
+              </a:rPr>
+              <a:t>EUR 1,75</a:t>
+            </a:r>
+            <a:endParaRPr lang="en-US" sz="850" dirty="0"/>
+          </a:p>
+        </p:txBody>
+      </p:sp>
+      <p:sp>
+        <p:nvSpPr>
+          <p:cNvPr id="23" name="Text 21"/>
+          <p:cNvSpPr/>
+          <p:nvPr/>
+        </p:nvSpPr>
+        <p:spPr>
+          <a:xfrm>
+            <a:off x="6089904" y="3584448"/>
+            <a:ext cx="822960" cy="164592"/>
+          </a:xfrm>
+          <a:prstGeom prst="rect">
+            <a:avLst/>
+          </a:prstGeom>
+          <a:noFill/>
+          <a:ln/>
+        </p:spPr>
+        <p:txBody>
+          <a:bodyPr wrap="square" lIns="0" tIns="0" rIns="0" bIns="0" rtlCol="0" anchor="ctr"/>
+          <a:lstStyle/>
+          <a:p>
+            <a:pPr indent="0" marL="0">
+              <a:buNone/>
+            </a:pPr>
+            <a:r>
+              <a:rPr lang="en-US" sz="850" dirty="0">
+                <a:solidFill>
+                  <a:srgbClr val="8A2D0E"/>
+                </a:solidFill>
+              </a:rPr>
+              <a:t>Q ~ 350</a:t>
+            </a:r>
+            <a:endParaRPr lang="en-US" sz="850" dirty="0"/>
+          </a:p>
+        </p:txBody>
+      </p:sp>
+      <p:sp>
+        <p:nvSpPr>
+          <p:cNvPr id="24" name="Shape 22"/>
+          <p:cNvSpPr/>
+          <p:nvPr/>
+        </p:nvSpPr>
+        <p:spPr>
+          <a:xfrm>
+            <a:off x="777240" y="4480560"/>
+            <a:ext cx="10698480" cy="384048"/>
           </a:xfrm>
           <a:prstGeom prst="roundRect">
             <a:avLst>
-              <a:gd name="adj" fmla="val 16000"/>
+              <a:gd name="adj" fmla="val 14286"/>
             </a:avLst>
           </a:prstGeom>
           <a:solidFill>
@@ -2381,14 +5199,14 @@
       </p:sp>
       <p:sp>
         <p:nvSpPr>
-          <p:cNvPr id="6" name="Text 4"/>
-          <p:cNvSpPr/>
-          <p:nvPr/>
-        </p:nvSpPr>
-        <p:spPr>
-          <a:xfrm>
-            <a:off x="1143000" y="2084832"/>
-            <a:ext cx="9509760" cy="182880"/>
+          <p:cNvPr id="25" name="Text 23"/>
+          <p:cNvSpPr/>
+          <p:nvPr/>
+        </p:nvSpPr>
+        <p:spPr>
+          <a:xfrm>
+            <a:off x="1005840" y="4572000"/>
+            <a:ext cx="10149840" cy="164592"/>
           </a:xfrm>
           <a:prstGeom prst="rect">
             <a:avLst/>
@@ -2406,31 +5224,31 @@
               <a:buNone/>
             </a:pPr>
             <a:r>
-              <a:rPr lang="en-US" sz="1500" dirty="0">
+              <a:rPr lang="en-US" sz="1250" dirty="0">
                 <a:solidFill>
                   <a:srgbClr val="102A43"/>
                 </a:solidFill>
               </a:rPr>
               <a:t>Zoek EUR 1,75 op de prijsas.</a:t>
             </a:r>
-            <a:endParaRPr lang="en-US" sz="1500" dirty="0"/>
-          </a:p>
-        </p:txBody>
-      </p:sp>
-      <p:sp>
-        <p:nvSpPr>
-          <p:cNvPr id="7" name="Shape 5"/>
-          <p:cNvSpPr/>
-          <p:nvPr/>
-        </p:nvSpPr>
-        <p:spPr>
-          <a:xfrm>
-            <a:off x="914400" y="2679192"/>
-            <a:ext cx="10058400" cy="457200"/>
+            <a:endParaRPr lang="en-US" sz="1250" dirty="0"/>
+          </a:p>
+        </p:txBody>
+      </p:sp>
+      <p:sp>
+        <p:nvSpPr>
+          <p:cNvPr id="26" name="Shape 24"/>
+          <p:cNvSpPr/>
+          <p:nvPr/>
+        </p:nvSpPr>
+        <p:spPr>
+          <a:xfrm>
+            <a:off x="777240" y="4992624"/>
+            <a:ext cx="10698480" cy="384048"/>
           </a:xfrm>
           <a:prstGeom prst="roundRect">
             <a:avLst>
-              <a:gd name="adj" fmla="val 16000"/>
+              <a:gd name="adj" fmla="val 14286"/>
             </a:avLst>
           </a:prstGeom>
           <a:solidFill>
@@ -2446,14 +5264,14 @@
       </p:sp>
       <p:sp>
         <p:nvSpPr>
-          <p:cNvPr id="8" name="Text 6"/>
-          <p:cNvSpPr/>
-          <p:nvPr/>
-        </p:nvSpPr>
-        <p:spPr>
-          <a:xfrm>
-            <a:off x="1143000" y="2798064"/>
-            <a:ext cx="9509760" cy="182880"/>
+          <p:cNvPr id="27" name="Text 25"/>
+          <p:cNvSpPr/>
+          <p:nvPr/>
+        </p:nvSpPr>
+        <p:spPr>
+          <a:xfrm>
+            <a:off x="1005840" y="5084064"/>
+            <a:ext cx="10149840" cy="164592"/>
           </a:xfrm>
           <a:prstGeom prst="rect">
             <a:avLst/>
@@ -2471,31 +5289,31 @@
               <a:buNone/>
             </a:pPr>
             <a:r>
-              <a:rPr lang="en-US" sz="1500" dirty="0">
+              <a:rPr lang="en-US" sz="1250" dirty="0">
                 <a:solidFill>
                   <a:srgbClr val="102A43"/>
                 </a:solidFill>
               </a:rPr>
               <a:t>Trek een lijn naar de grafiek en lees Q af.</a:t>
             </a:r>
-            <a:endParaRPr lang="en-US" sz="1500" dirty="0"/>
-          </a:p>
-        </p:txBody>
-      </p:sp>
-      <p:sp>
-        <p:nvSpPr>
-          <p:cNvPr id="9" name="Shape 7"/>
-          <p:cNvSpPr/>
-          <p:nvPr/>
-        </p:nvSpPr>
-        <p:spPr>
-          <a:xfrm>
-            <a:off x="914400" y="3392424"/>
-            <a:ext cx="10058400" cy="457200"/>
+            <a:endParaRPr lang="en-US" sz="1250" dirty="0"/>
+          </a:p>
+        </p:txBody>
+      </p:sp>
+      <p:sp>
+        <p:nvSpPr>
+          <p:cNvPr id="28" name="Shape 26"/>
+          <p:cNvSpPr/>
+          <p:nvPr/>
+        </p:nvSpPr>
+        <p:spPr>
+          <a:xfrm>
+            <a:off x="777240" y="5504688"/>
+            <a:ext cx="10698480" cy="384048"/>
           </a:xfrm>
           <a:prstGeom prst="roundRect">
             <a:avLst>
-              <a:gd name="adj" fmla="val 16000"/>
+              <a:gd name="adj" fmla="val 14286"/>
             </a:avLst>
           </a:prstGeom>
           <a:solidFill>
@@ -2511,14 +5329,14 @@
       </p:sp>
       <p:sp>
         <p:nvSpPr>
-          <p:cNvPr id="10" name="Text 8"/>
-          <p:cNvSpPr/>
-          <p:nvPr/>
-        </p:nvSpPr>
-        <p:spPr>
-          <a:xfrm>
-            <a:off x="1143000" y="3511296"/>
-            <a:ext cx="9509760" cy="182880"/>
+          <p:cNvPr id="29" name="Text 27"/>
+          <p:cNvSpPr/>
+          <p:nvPr/>
+        </p:nvSpPr>
+        <p:spPr>
+          <a:xfrm>
+            <a:off x="1005840" y="5596128"/>
+            <a:ext cx="10149840" cy="164592"/>
           </a:xfrm>
           <a:prstGeom prst="rect">
             <a:avLst/>
@@ -2536,14 +5354,14 @@
               <a:buNone/>
             </a:pPr>
             <a:r>
-              <a:rPr lang="en-US" sz="1500" dirty="0">
+              <a:rPr lang="en-US" sz="1250" dirty="0">
                 <a:solidFill>
                   <a:srgbClr val="102A43"/>
                 </a:solidFill>
               </a:rPr>
               <a:t>Tussen 400 en 300 ligt ongeveer 350.</a:t>
             </a:r>
-            <a:endParaRPr lang="en-US" sz="1500" dirty="0"/>
+            <a:endParaRPr lang="en-US" sz="1250" dirty="0"/>
           </a:p>
         </p:txBody>
       </p:sp>
@@ -2697,12 +5515,378 @@
         </p:nvSpPr>
         <p:spPr>
           <a:xfrm>
-            <a:off x="914400" y="1965960"/>
-            <a:ext cx="10058400" cy="457200"/>
+            <a:off x="1828800" y="1874520"/>
+            <a:ext cx="3959352" cy="2240280"/>
+          </a:xfrm>
+          <a:prstGeom prst="rect">
+            <a:avLst/>
+          </a:prstGeom>
+          <a:solidFill>
+            <a:srgbClr val="FFFFFF"/>
+          </a:solidFill>
+          <a:ln w="12700">
+            <a:solidFill>
+              <a:srgbClr val="CBD5E1"/>
+            </a:solidFill>
+            <a:prstDash val="solid"/>
+          </a:ln>
+        </p:spPr>
+      </p:sp>
+      <p:sp>
+        <p:nvSpPr>
+          <p:cNvPr id="6" name="Text 4"/>
+          <p:cNvSpPr/>
+          <p:nvPr/>
+        </p:nvSpPr>
+        <p:spPr>
+          <a:xfrm>
+            <a:off x="1938528" y="1984248"/>
+            <a:ext cx="3739896" cy="182880"/>
+          </a:xfrm>
+          <a:prstGeom prst="rect">
+            <a:avLst/>
+          </a:prstGeom>
+          <a:noFill/>
+          <a:ln/>
+        </p:spPr>
+        <p:txBody>
+          <a:bodyPr wrap="square" lIns="0" tIns="0" rIns="0" bIns="0" rtlCol="0" anchor="ctr"/>
+          <a:lstStyle/>
+          <a:p>
+            <a:pPr indent="0" marL="0">
+              <a:buNone/>
+            </a:pPr>
+            <a:r>
+              <a:rPr lang="en-US" sz="1000" b="1" dirty="0">
+                <a:solidFill>
+                  <a:srgbClr val="102A43"/>
+                </a:solidFill>
+              </a:rPr>
+              <a:t>as vanaf 0</a:t>
+            </a:r>
+            <a:endParaRPr lang="en-US" sz="1000" dirty="0"/>
+          </a:p>
+        </p:txBody>
+      </p:sp>
+      <p:sp>
+        <p:nvSpPr>
+          <p:cNvPr id="7" name="Shape 5"/>
+          <p:cNvSpPr/>
+          <p:nvPr/>
+        </p:nvSpPr>
+        <p:spPr>
+          <a:xfrm>
+            <a:off x="2176272" y="2532888"/>
+            <a:ext cx="420624" cy="1261872"/>
+          </a:xfrm>
+          <a:prstGeom prst="rect">
+            <a:avLst/>
+          </a:prstGeom>
+          <a:solidFill>
+            <a:srgbClr val="2F7D4A"/>
+          </a:solidFill>
+          <a:ln w="12700">
+            <a:solidFill>
+              <a:srgbClr val="2F7D4A"/>
+            </a:solidFill>
+            <a:prstDash val="solid"/>
+          </a:ln>
+        </p:spPr>
+      </p:sp>
+      <p:sp>
+        <p:nvSpPr>
+          <p:cNvPr id="8" name="Text 6"/>
+          <p:cNvSpPr/>
+          <p:nvPr/>
+        </p:nvSpPr>
+        <p:spPr>
+          <a:xfrm>
+            <a:off x="2148840" y="3877056"/>
+            <a:ext cx="502920" cy="146304"/>
+          </a:xfrm>
+          <a:prstGeom prst="rect">
+            <a:avLst/>
+          </a:prstGeom>
+          <a:noFill/>
+          <a:ln/>
+        </p:spPr>
+        <p:txBody>
+          <a:bodyPr wrap="square" lIns="0" tIns="0" rIns="0" bIns="0" rtlCol="0" anchor="ctr"/>
+          <a:lstStyle/>
+          <a:p>
+            <a:pPr indent="0" marL="0">
+              <a:buNone/>
+            </a:pPr>
+            <a:r>
+              <a:rPr lang="en-US" sz="850" dirty="0">
+                <a:solidFill>
+                  <a:srgbClr val="102A43"/>
+                </a:solidFill>
+              </a:rPr>
+              <a:t>520</a:t>
+            </a:r>
+            <a:endParaRPr lang="en-US" sz="850" dirty="0"/>
+          </a:p>
+        </p:txBody>
+      </p:sp>
+      <p:sp>
+        <p:nvSpPr>
+          <p:cNvPr id="9" name="Shape 7"/>
+          <p:cNvSpPr/>
+          <p:nvPr/>
+        </p:nvSpPr>
+        <p:spPr>
+          <a:xfrm>
+            <a:off x="2953512" y="2587752"/>
+            <a:ext cx="420624" cy="1207008"/>
+          </a:xfrm>
+          <a:prstGeom prst="rect">
+            <a:avLst/>
+          </a:prstGeom>
+          <a:solidFill>
+            <a:srgbClr val="2F7D4A"/>
+          </a:solidFill>
+          <a:ln w="12700">
+            <a:solidFill>
+              <a:srgbClr val="2F7D4A"/>
+            </a:solidFill>
+            <a:prstDash val="solid"/>
+          </a:ln>
+        </p:spPr>
+      </p:sp>
+      <p:sp>
+        <p:nvSpPr>
+          <p:cNvPr id="10" name="Text 8"/>
+          <p:cNvSpPr/>
+          <p:nvPr/>
+        </p:nvSpPr>
+        <p:spPr>
+          <a:xfrm>
+            <a:off x="2926080" y="3877056"/>
+            <a:ext cx="502920" cy="146304"/>
+          </a:xfrm>
+          <a:prstGeom prst="rect">
+            <a:avLst/>
+          </a:prstGeom>
+          <a:noFill/>
+          <a:ln/>
+        </p:spPr>
+        <p:txBody>
+          <a:bodyPr wrap="square" lIns="0" tIns="0" rIns="0" bIns="0" rtlCol="0" anchor="ctr"/>
+          <a:lstStyle/>
+          <a:p>
+            <a:pPr indent="0" marL="0">
+              <a:buNone/>
+            </a:pPr>
+            <a:r>
+              <a:rPr lang="en-US" sz="850" dirty="0">
+                <a:solidFill>
+                  <a:srgbClr val="102A43"/>
+                </a:solidFill>
+              </a:rPr>
+              <a:t>500</a:t>
+            </a:r>
+            <a:endParaRPr lang="en-US" sz="850" dirty="0"/>
+          </a:p>
+        </p:txBody>
+      </p:sp>
+      <p:sp>
+        <p:nvSpPr>
+          <p:cNvPr id="11" name="Shape 9"/>
+          <p:cNvSpPr/>
+          <p:nvPr/>
+        </p:nvSpPr>
+        <p:spPr>
+          <a:xfrm>
+            <a:off x="6007608" y="1874520"/>
+            <a:ext cx="3959352" cy="2240280"/>
+          </a:xfrm>
+          <a:prstGeom prst="rect">
+            <a:avLst/>
+          </a:prstGeom>
+          <a:solidFill>
+            <a:srgbClr val="FFFFFF"/>
+          </a:solidFill>
+          <a:ln w="12700">
+            <a:solidFill>
+              <a:srgbClr val="CBD5E1"/>
+            </a:solidFill>
+            <a:prstDash val="solid"/>
+          </a:ln>
+        </p:spPr>
+      </p:sp>
+      <p:sp>
+        <p:nvSpPr>
+          <p:cNvPr id="12" name="Text 10"/>
+          <p:cNvSpPr/>
+          <p:nvPr/>
+        </p:nvSpPr>
+        <p:spPr>
+          <a:xfrm>
+            <a:off x="6117336" y="1984248"/>
+            <a:ext cx="3739896" cy="182880"/>
+          </a:xfrm>
+          <a:prstGeom prst="rect">
+            <a:avLst/>
+          </a:prstGeom>
+          <a:noFill/>
+          <a:ln/>
+        </p:spPr>
+        <p:txBody>
+          <a:bodyPr wrap="square" lIns="0" tIns="0" rIns="0" bIns="0" rtlCol="0" anchor="ctr"/>
+          <a:lstStyle/>
+          <a:p>
+            <a:pPr indent="0" marL="0">
+              <a:buNone/>
+            </a:pPr>
+            <a:r>
+              <a:rPr lang="en-US" sz="1000" b="1" dirty="0">
+                <a:solidFill>
+                  <a:srgbClr val="102A43"/>
+                </a:solidFill>
+              </a:rPr>
+              <a:t>as vanaf 490</a:t>
+            </a:r>
+            <a:endParaRPr lang="en-US" sz="1000" dirty="0"/>
+          </a:p>
+        </p:txBody>
+      </p:sp>
+      <p:sp>
+        <p:nvSpPr>
+          <p:cNvPr id="13" name="Shape 11"/>
+          <p:cNvSpPr/>
+          <p:nvPr/>
+        </p:nvSpPr>
+        <p:spPr>
+          <a:xfrm>
+            <a:off x="6355080" y="2532888"/>
+            <a:ext cx="420624" cy="1261872"/>
+          </a:xfrm>
+          <a:prstGeom prst="rect">
+            <a:avLst/>
+          </a:prstGeom>
+          <a:solidFill>
+            <a:srgbClr val="2F7D4A"/>
+          </a:solidFill>
+          <a:ln w="12700">
+            <a:solidFill>
+              <a:srgbClr val="2F7D4A"/>
+            </a:solidFill>
+            <a:prstDash val="solid"/>
+          </a:ln>
+        </p:spPr>
+      </p:sp>
+      <p:sp>
+        <p:nvSpPr>
+          <p:cNvPr id="14" name="Text 12"/>
+          <p:cNvSpPr/>
+          <p:nvPr/>
+        </p:nvSpPr>
+        <p:spPr>
+          <a:xfrm>
+            <a:off x="6327648" y="3877056"/>
+            <a:ext cx="502920" cy="146304"/>
+          </a:xfrm>
+          <a:prstGeom prst="rect">
+            <a:avLst/>
+          </a:prstGeom>
+          <a:noFill/>
+          <a:ln/>
+        </p:spPr>
+        <p:txBody>
+          <a:bodyPr wrap="square" lIns="0" tIns="0" rIns="0" bIns="0" rtlCol="0" anchor="ctr"/>
+          <a:lstStyle/>
+          <a:p>
+            <a:pPr indent="0" marL="0">
+              <a:buNone/>
+            </a:pPr>
+            <a:r>
+              <a:rPr lang="en-US" sz="850" dirty="0">
+                <a:solidFill>
+                  <a:srgbClr val="102A43"/>
+                </a:solidFill>
+              </a:rPr>
+              <a:t>520</a:t>
+            </a:r>
+            <a:endParaRPr lang="en-US" sz="850" dirty="0"/>
+          </a:p>
+        </p:txBody>
+      </p:sp>
+      <p:sp>
+        <p:nvSpPr>
+          <p:cNvPr id="15" name="Shape 13"/>
+          <p:cNvSpPr/>
+          <p:nvPr/>
+        </p:nvSpPr>
+        <p:spPr>
+          <a:xfrm>
+            <a:off x="7132320" y="3328416"/>
+            <a:ext cx="420624" cy="466344"/>
+          </a:xfrm>
+          <a:prstGeom prst="rect">
+            <a:avLst/>
+          </a:prstGeom>
+          <a:solidFill>
+            <a:srgbClr val="2F7D4A"/>
+          </a:solidFill>
+          <a:ln w="12700">
+            <a:solidFill>
+              <a:srgbClr val="2F7D4A"/>
+            </a:solidFill>
+            <a:prstDash val="solid"/>
+          </a:ln>
+        </p:spPr>
+      </p:sp>
+      <p:sp>
+        <p:nvSpPr>
+          <p:cNvPr id="16" name="Text 14"/>
+          <p:cNvSpPr/>
+          <p:nvPr/>
+        </p:nvSpPr>
+        <p:spPr>
+          <a:xfrm>
+            <a:off x="7104888" y="3877056"/>
+            <a:ext cx="502920" cy="146304"/>
+          </a:xfrm>
+          <a:prstGeom prst="rect">
+            <a:avLst/>
+          </a:prstGeom>
+          <a:noFill/>
+          <a:ln/>
+        </p:spPr>
+        <p:txBody>
+          <a:bodyPr wrap="square" lIns="0" tIns="0" rIns="0" bIns="0" rtlCol="0" anchor="ctr"/>
+          <a:lstStyle/>
+          <a:p>
+            <a:pPr indent="0" marL="0">
+              <a:buNone/>
+            </a:pPr>
+            <a:r>
+              <a:rPr lang="en-US" sz="850" dirty="0">
+                <a:solidFill>
+                  <a:srgbClr val="102A43"/>
+                </a:solidFill>
+              </a:rPr>
+              <a:t>500</a:t>
+            </a:r>
+            <a:endParaRPr lang="en-US" sz="850" dirty="0"/>
+          </a:p>
+        </p:txBody>
+      </p:sp>
+      <p:sp>
+        <p:nvSpPr>
+          <p:cNvPr id="17" name="Shape 15"/>
+          <p:cNvSpPr/>
+          <p:nvPr/>
+        </p:nvSpPr>
+        <p:spPr>
+          <a:xfrm>
+            <a:off x="777240" y="4480560"/>
+            <a:ext cx="10698480" cy="384048"/>
           </a:xfrm>
           <a:prstGeom prst="roundRect">
             <a:avLst>
-              <a:gd name="adj" fmla="val 16000"/>
+              <a:gd name="adj" fmla="val 14286"/>
             </a:avLst>
           </a:prstGeom>
           <a:solidFill>
@@ -2718,14 +5902,14 @@
       </p:sp>
       <p:sp>
         <p:nvSpPr>
-          <p:cNvPr id="6" name="Text 4"/>
-          <p:cNvSpPr/>
-          <p:nvPr/>
-        </p:nvSpPr>
-        <p:spPr>
-          <a:xfrm>
-            <a:off x="1143000" y="2084832"/>
-            <a:ext cx="9509760" cy="182880"/>
+          <p:cNvPr id="18" name="Text 16"/>
+          <p:cNvSpPr/>
+          <p:nvPr/>
+        </p:nvSpPr>
+        <p:spPr>
+          <a:xfrm>
+            <a:off x="1005840" y="4572000"/>
+            <a:ext cx="10149840" cy="164592"/>
           </a:xfrm>
           <a:prstGeom prst="rect">
             <a:avLst/>
@@ -2743,31 +5927,31 @@
               <a:buNone/>
             </a:pPr>
             <a:r>
-              <a:rPr lang="en-US" sz="1500" dirty="0">
+              <a:rPr lang="en-US" sz="1250" dirty="0">
                 <a:solidFill>
                   <a:srgbClr val="102A43"/>
                 </a:solidFill>
               </a:rPr>
               <a:t>Controleer altijd of de as bij nul begint.</a:t>
             </a:r>
-            <a:endParaRPr lang="en-US" sz="1500" dirty="0"/>
-          </a:p>
-        </p:txBody>
-      </p:sp>
-      <p:sp>
-        <p:nvSpPr>
-          <p:cNvPr id="7" name="Shape 5"/>
-          <p:cNvSpPr/>
-          <p:nvPr/>
-        </p:nvSpPr>
-        <p:spPr>
-          <a:xfrm>
-            <a:off x="914400" y="2679192"/>
-            <a:ext cx="10058400" cy="457200"/>
+            <a:endParaRPr lang="en-US" sz="1250" dirty="0"/>
+          </a:p>
+        </p:txBody>
+      </p:sp>
+      <p:sp>
+        <p:nvSpPr>
+          <p:cNvPr id="19" name="Shape 17"/>
+          <p:cNvSpPr/>
+          <p:nvPr/>
+        </p:nvSpPr>
+        <p:spPr>
+          <a:xfrm>
+            <a:off x="777240" y="4992624"/>
+            <a:ext cx="10698480" cy="384048"/>
           </a:xfrm>
           <a:prstGeom prst="roundRect">
             <a:avLst>
-              <a:gd name="adj" fmla="val 16000"/>
+              <a:gd name="adj" fmla="val 14286"/>
             </a:avLst>
           </a:prstGeom>
           <a:solidFill>
@@ -2783,14 +5967,14 @@
       </p:sp>
       <p:sp>
         <p:nvSpPr>
-          <p:cNvPr id="8" name="Text 6"/>
-          <p:cNvSpPr/>
-          <p:nvPr/>
-        </p:nvSpPr>
-        <p:spPr>
-          <a:xfrm>
-            <a:off x="1143000" y="2798064"/>
-            <a:ext cx="9509760" cy="182880"/>
+          <p:cNvPr id="20" name="Text 18"/>
+          <p:cNvSpPr/>
+          <p:nvPr/>
+        </p:nvSpPr>
+        <p:spPr>
+          <a:xfrm>
+            <a:off x="1005840" y="5084064"/>
+            <a:ext cx="10149840" cy="164592"/>
           </a:xfrm>
           <a:prstGeom prst="rect">
             <a:avLst/>
@@ -2808,31 +5992,31 @@
               <a:buNone/>
             </a:pPr>
             <a:r>
-              <a:rPr lang="en-US" sz="1500" dirty="0">
+              <a:rPr lang="en-US" sz="1250" dirty="0">
                 <a:solidFill>
                   <a:srgbClr val="102A43"/>
                 </a:solidFill>
               </a:rPr>
               <a:t>Vraag welke twee waarden worden vergeleken.</a:t>
             </a:r>
-            <a:endParaRPr lang="en-US" sz="1500" dirty="0"/>
-          </a:p>
-        </p:txBody>
-      </p:sp>
-      <p:sp>
-        <p:nvSpPr>
-          <p:cNvPr id="9" name="Shape 7"/>
-          <p:cNvSpPr/>
-          <p:nvPr/>
-        </p:nvSpPr>
-        <p:spPr>
-          <a:xfrm>
-            <a:off x="914400" y="3392424"/>
-            <a:ext cx="10058400" cy="457200"/>
+            <a:endParaRPr lang="en-US" sz="1250" dirty="0"/>
+          </a:p>
+        </p:txBody>
+      </p:sp>
+      <p:sp>
+        <p:nvSpPr>
+          <p:cNvPr id="21" name="Shape 19"/>
+          <p:cNvSpPr/>
+          <p:nvPr/>
+        </p:nvSpPr>
+        <p:spPr>
+          <a:xfrm>
+            <a:off x="777240" y="5504688"/>
+            <a:ext cx="10698480" cy="384048"/>
           </a:xfrm>
           <a:prstGeom prst="roundRect">
             <a:avLst>
-              <a:gd name="adj" fmla="val 16000"/>
+              <a:gd name="adj" fmla="val 14286"/>
             </a:avLst>
           </a:prstGeom>
           <a:solidFill>
@@ -2848,14 +6032,14 @@
       </p:sp>
       <p:sp>
         <p:nvSpPr>
-          <p:cNvPr id="10" name="Text 8"/>
-          <p:cNvSpPr/>
-          <p:nvPr/>
-        </p:nvSpPr>
-        <p:spPr>
-          <a:xfrm>
-            <a:off x="1143000" y="3511296"/>
-            <a:ext cx="9509760" cy="182880"/>
+          <p:cNvPr id="22" name="Text 20"/>
+          <p:cNvSpPr/>
+          <p:nvPr/>
+        </p:nvSpPr>
+        <p:spPr>
+          <a:xfrm>
+            <a:off x="1005840" y="5596128"/>
+            <a:ext cx="10149840" cy="164592"/>
           </a:xfrm>
           <a:prstGeom prst="rect">
             <a:avLst/>
@@ -2873,14 +6057,14 @@
               <a:buNone/>
             </a:pPr>
             <a:r>
-              <a:rPr lang="en-US" sz="1500" dirty="0">
+              <a:rPr lang="en-US" sz="1250" dirty="0">
                 <a:solidFill>
                   <a:srgbClr val="102A43"/>
                 </a:solidFill>
               </a:rPr>
               <a:t>Een kop met procenten klopt alleen met de juiste basis.</a:t>
             </a:r>
-            <a:endParaRPr lang="en-US" sz="1500" dirty="0"/>
+            <a:endParaRPr lang="en-US" sz="1250" dirty="0"/>
           </a:p>
         </p:txBody>
       </p:sp>

--- a/Boek 1 - Grondslagen, vraag en aanbod/1.1 Hoofdstuk Economisch denken en rekenen/1.1.3 Grafieken en tabellen/1.1.3 Grafieken en tabellen – presentatie.pptx
+++ b/Boek 1 - Grondslagen, vraag en aanbod/1.1 Hoofdstuk Economisch denken en rekenen/1.1.3 Grafieken en tabellen/1.1.3 Grafieken en tabellen – presentatie.pptx
@@ -371,7 +371,7 @@
             <a:pPr indent="0" algn="r">
               <a:buNone/>
             </a:pPr>
-            <a:fld id="{30CC6EF7-F449-42CB-8E2A-3CA72EE73E75}" type="slidenum">
+            <a:fld id="{7CA8CD1F-C83C-4B68-96BE-7045BB29E35C}" type="slidenum">
               <a:rPr lang="en-US" sz="1400" b="0" u="none" strike="noStrike">
                 <a:solidFill>
                   <a:srgbClr val="000000"/>
@@ -518,17 +518,6 @@
             <a:pPr indent="0" algn="l">
               <a:buNone/>
             </a:pPr>
-            <a:r>
-              <a:rPr lang="en-US" sz="1400" b="0" u="none" strike="noStrike">
-                <a:solidFill>
-                  <a:srgbClr val="000000"/>
-                </a:solidFill>
-                <a:effectLst/>
-                <a:uFillTx/>
-                <a:latin typeface="Arial"/>
-              </a:rPr>
-              <a:t>Rol: route_contract</a:t>
-            </a:r>
             <a:endParaRPr lang="en-US" sz="2000" b="0" u="none" strike="noStrike">
               <a:solidFill>
                 <a:srgbClr val="000000"/>
@@ -551,7 +540,7 @@
                 <a:uFillTx/>
                 <a:latin typeface="Arial"/>
               </a:rPr>
-              <a:t>Layout: routeContract</a:t>
+              <a:t>Vraag:</a:t>
             </a:r>
             <a:endParaRPr lang="en-US" sz="2000" b="0" u="none" strike="noStrike">
               <a:solidFill>
@@ -566,6 +555,17 @@
             <a:pPr indent="0" algn="l">
               <a:buNone/>
             </a:pPr>
+            <a:r>
+              <a:rPr lang="en-US" sz="1400" b="0" u="none" strike="noStrike">
+                <a:solidFill>
+                  <a:srgbClr val="000000"/>
+                </a:solidFill>
+                <a:effectLst/>
+                <a:uFillTx/>
+                <a:latin typeface="Arial"/>
+              </a:rPr>
+              <a:t>Gebruik de route als checklist tijdens elke grafiekopgave.</a:t>
+            </a:r>
             <a:endParaRPr lang="en-US" sz="2000" b="0" u="none" strike="noStrike">
               <a:solidFill>
                 <a:srgbClr val="000000"/>
@@ -579,17 +579,6 @@
             <a:pPr indent="0" algn="l">
               <a:buNone/>
             </a:pPr>
-            <a:r>
-              <a:rPr lang="en-US" sz="1400" b="0" u="none" strike="noStrike">
-                <a:solidFill>
-                  <a:srgbClr val="000000"/>
-                </a:solidFill>
-                <a:effectLst/>
-                <a:uFillTx/>
-                <a:latin typeface="Arial"/>
-              </a:rPr>
-              <a:t>Kernzin:</a:t>
-            </a:r>
             <a:endParaRPr lang="en-US" sz="2000" b="0" u="none" strike="noStrike">
               <a:solidFill>
                 <a:srgbClr val="000000"/>
@@ -612,7 +601,7 @@
                 <a:uFillTx/>
                 <a:latin typeface="Arial"/>
               </a:rPr>
-              <a:t>Je leest eerst de bron, dan pas teken of beoordeel je een grafiek.</a:t>
+              <a:t>Uitleg:</a:t>
             </a:r>
             <a:endParaRPr lang="en-US" sz="2000" b="0" u="none" strike="noStrike">
               <a:solidFill>
@@ -627,6 +616,17 @@
             <a:pPr indent="0" algn="l">
               <a:buNone/>
             </a:pPr>
+            <a:r>
+              <a:rPr lang="en-US" sz="1400" b="0" u="none" strike="noStrike">
+                <a:solidFill>
+                  <a:srgbClr val="000000"/>
+                </a:solidFill>
+                <a:effectLst/>
+                <a:uFillTx/>
+                <a:latin typeface="Arial"/>
+              </a:rPr>
+              <a:t>- Je leest eerst de bron, dan pas teken of beoordeel je een grafiek.</a:t>
+            </a:r>
             <a:endParaRPr lang="en-US" sz="2000" b="0" u="none" strike="noStrike">
               <a:solidFill>
                 <a:srgbClr val="000000"/>
@@ -649,7 +649,7 @@
                 <a:uFillTx/>
                 <a:latin typeface="Arial"/>
               </a:rPr>
-              <a:t>Studentuitleg:</a:t>
+              <a:t>- De lesroute voorkomt dat leerlingen meteen naar losse getallen springen.</a:t>
             </a:r>
             <a:endParaRPr lang="en-US" sz="2000" b="0" u="none" strike="noStrike">
               <a:solidFill>
@@ -664,17 +664,6 @@
             <a:pPr indent="0" algn="l">
               <a:buNone/>
             </a:pPr>
-            <a:r>
-              <a:rPr lang="en-US" sz="1400" b="0" u="none" strike="noStrike">
-                <a:solidFill>
-                  <a:srgbClr val="000000"/>
-                </a:solidFill>
-                <a:effectLst/>
-                <a:uFillTx/>
-                <a:latin typeface="Arial"/>
-              </a:rPr>
-              <a:t>- De lesroute voorkomt dat leerlingen meteen naar losse getallen springen.</a:t>
-            </a:r>
             <a:endParaRPr lang="en-US" sz="2000" b="0" u="none" strike="noStrike">
               <a:solidFill>
                 <a:srgbClr val="000000"/>
@@ -697,7 +686,7 @@
                 <a:uFillTx/>
                 <a:latin typeface="Arial"/>
               </a:rPr>
-              <a:t>- Elke grafiekclaim begint bij de bron: welke waarden worden eigenlijk vergeleken?</a:t>
+              <a:t>Pitfall:</a:t>
             </a:r>
             <a:endParaRPr lang="en-US" sz="2000" b="0" u="none" strike="noStrike">
               <a:solidFill>
@@ -712,6 +701,17 @@
             <a:pPr indent="0" algn="l">
               <a:buNone/>
             </a:pPr>
+            <a:r>
+              <a:rPr lang="en-US" sz="1400" b="0" u="none" strike="noStrike">
+                <a:solidFill>
+                  <a:srgbClr val="000000"/>
+                </a:solidFill>
+                <a:effectLst/>
+                <a:uFillTx/>
+                <a:latin typeface="Arial"/>
+              </a:rPr>
+              <a:t>Geen specifieke valkuil.</a:t>
+            </a:r>
             <a:endParaRPr lang="en-US" sz="2000" b="0" u="none" strike="noStrike">
               <a:solidFill>
                 <a:srgbClr val="000000"/>
@@ -725,17 +725,6 @@
             <a:pPr indent="0" algn="l">
               <a:buNone/>
             </a:pPr>
-            <a:r>
-              <a:rPr lang="en-US" sz="1400" b="0" u="none" strike="noStrike">
-                <a:solidFill>
-                  <a:srgbClr val="000000"/>
-                </a:solidFill>
-                <a:effectLst/>
-                <a:uFillTx/>
-                <a:latin typeface="Arial"/>
-              </a:rPr>
-              <a:t>Overgang:</a:t>
-            </a:r>
             <a:endParaRPr lang="en-US" sz="2000" b="0" u="none" strike="noStrike">
               <a:solidFill>
                 <a:srgbClr val="000000"/>
@@ -758,44 +747,7 @@
                 <a:uFillTx/>
                 <a:latin typeface="Arial"/>
               </a:rPr>
-              <a:t>Daarna gebruiken we de ijskraam als concrete bron.</a:t>
-            </a:r>
-            <a:endParaRPr lang="en-US" sz="2000" b="0" u="none" strike="noStrike">
-              <a:solidFill>
-                <a:srgbClr val="000000"/>
-              </a:solidFill>
-              <a:effectLst/>
-              <a:uFillTx/>
-              <a:latin typeface="Arial"/>
-            </a:endParaRPr>
-          </a:p>
-          <a:p>
-            <a:pPr indent="0" algn="l">
-              <a:buNone/>
-            </a:pPr>
-            <a:endParaRPr lang="en-US" sz="2000" b="0" u="none" strike="noStrike">
-              <a:solidFill>
-                <a:srgbClr val="000000"/>
-              </a:solidFill>
-              <a:effectLst/>
-              <a:uFillTx/>
-              <a:latin typeface="Arial"/>
-            </a:endParaRPr>
-          </a:p>
-          <a:p>
-            <a:pPr indent="0" algn="l">
-              <a:buNone/>
-            </a:pPr>
-            <a:r>
-              <a:rPr lang="en-US" sz="1400" b="0" u="none" strike="noStrike">
-                <a:solidFill>
-                  <a:srgbClr val="000000"/>
-                </a:solidFill>
-                <a:effectLst/>
-                <a:uFillTx/>
-                <a:latin typeface="Arial"/>
-              </a:rPr>
-              <a:t>Actie op de dia:</a:t>
+              <a:t>Overgang:</a:t>
             </a:r>
             <a:endParaRPr lang="en-US" sz="2000" b="0" u="none" strike="noStrike">
               <a:solidFill>
@@ -822,7 +774,7 @@
                 <a:uFillTx/>
                 <a:latin typeface="Arial"/>
               </a:rPr>
-              <a:t>Gebruik de route als checklist tijdens elke grafiekopgave.</a:t>
+              <a:t>Daarna gebruiken we de ijskraam als concrete bron.</a:t>
             </a:r>
             <a:endParaRPr lang="en-US" sz="2000" b="0" u="none" strike="noStrike">
               <a:solidFill>
@@ -886,7 +838,7 @@
               </a:lnSpc>
               <a:buNone/>
             </a:pPr>
-            <a:fld id="{B361622A-506F-45C5-99F2-CFA9997976B3}" type="slidenum">
+            <a:fld id="{882045EB-5483-4A8D-A9E1-6515E04A7117}" type="slidenum">
               <a:rPr lang="en-US" sz="1400" b="0" u="none" strike="noStrike">
                 <a:solidFill>
                   <a:schemeClr val="dk1"/>
@@ -1033,17 +985,6 @@
             <a:pPr indent="0" algn="l">
               <a:buNone/>
             </a:pPr>
-            <a:r>
-              <a:rPr lang="en-US" sz="1400" b="0" u="none" strike="noStrike">
-                <a:solidFill>
-                  <a:srgbClr val="000000"/>
-                </a:solidFill>
-                <a:effectLst/>
-                <a:uFillTx/>
-                <a:latin typeface="Arial"/>
-              </a:rPr>
-              <a:t>Rol: source_table_anchor</a:t>
-            </a:r>
             <a:endParaRPr lang="en-US" sz="2000" b="0" u="none" strike="noStrike">
               <a:solidFill>
                 <a:srgbClr val="000000"/>
@@ -1066,7 +1007,7 @@
                 <a:uFillTx/>
                 <a:latin typeface="Arial"/>
               </a:rPr>
-              <a:t>Layout: choiceTensionCover</a:t>
+              <a:t>Vraag:</a:t>
             </a:r>
             <a:endParaRPr lang="en-US" sz="2000" b="0" u="none" strike="noStrike">
               <a:solidFill>
@@ -1081,6 +1022,17 @@
             <a:pPr indent="0" algn="l">
               <a:buNone/>
             </a:pPr>
+            <a:r>
+              <a:rPr lang="en-US" sz="1400" b="0" u="none" strike="noStrike">
+                <a:solidFill>
+                  <a:srgbClr val="000000"/>
+                </a:solidFill>
+                <a:effectLst/>
+                <a:uFillTx/>
+                <a:latin typeface="Arial"/>
+              </a:rPr>
+              <a:t>Noem bij twee rijen hardop de prijs, hoeveelheid en eenheid.</a:t>
+            </a:r>
             <a:endParaRPr lang="en-US" sz="2000" b="0" u="none" strike="noStrike">
               <a:solidFill>
                 <a:srgbClr val="000000"/>
@@ -1094,17 +1046,6 @@
             <a:pPr indent="0" algn="l">
               <a:buNone/>
             </a:pPr>
-            <a:r>
-              <a:rPr lang="en-US" sz="1400" b="0" u="none" strike="noStrike">
-                <a:solidFill>
-                  <a:srgbClr val="000000"/>
-                </a:solidFill>
-                <a:effectLst/>
-                <a:uFillTx/>
-                <a:latin typeface="Arial"/>
-              </a:rPr>
-              <a:t>Kernzin:</a:t>
-            </a:r>
             <a:endParaRPr lang="en-US" sz="2000" b="0" u="none" strike="noStrike">
               <a:solidFill>
                 <a:srgbClr val="000000"/>
@@ -1127,7 +1068,7 @@
                 <a:uFillTx/>
                 <a:latin typeface="Arial"/>
               </a:rPr>
-              <a:t>De tabel ordent de waarden; de grafiek maakt het verband zichtbaar.</a:t>
+              <a:t>Uitleg:</a:t>
             </a:r>
             <a:endParaRPr lang="en-US" sz="2000" b="0" u="none" strike="noStrike">
               <a:solidFill>
@@ -1142,6 +1083,17 @@
             <a:pPr indent="0" algn="l">
               <a:buNone/>
             </a:pPr>
+            <a:r>
+              <a:rPr lang="en-US" sz="1400" b="0" u="none" strike="noStrike">
+                <a:solidFill>
+                  <a:srgbClr val="000000"/>
+                </a:solidFill>
+                <a:effectLst/>
+                <a:uFillTx/>
+                <a:latin typeface="Arial"/>
+              </a:rPr>
+              <a:t>- De tabel ordent de waarden; de grafiek maakt het verband zichtbaar.</a:t>
+            </a:r>
             <a:endParaRPr lang="en-US" sz="2000" b="0" u="none" strike="noStrike">
               <a:solidFill>
                 <a:srgbClr val="000000"/>
@@ -1164,7 +1116,7 @@
                 <a:uFillTx/>
                 <a:latin typeface="Arial"/>
               </a:rPr>
-              <a:t>Studentuitleg:</a:t>
+              <a:t>- De tabel bevat al informatie, maar het verband wordt sneller zichtbaar in de grafiek.</a:t>
             </a:r>
             <a:endParaRPr lang="en-US" sz="2000" b="0" u="none" strike="noStrike">
               <a:solidFill>
@@ -1188,7 +1140,7 @@
                 <a:uFillTx/>
                 <a:latin typeface="Arial"/>
               </a:rPr>
-              <a:t>- De tabel bevat al informatie, maar het verband wordt sneller zichtbaar in de grafiek.</a:t>
+              <a:t>- Laat leerlingen eerst de kolommen benoemen voordat ze de lijn interpreteren.</a:t>
             </a:r>
             <a:endParaRPr lang="en-US" sz="2000" b="0" u="none" strike="noStrike">
               <a:solidFill>
@@ -1225,7 +1177,7 @@
                 <a:uFillTx/>
                 <a:latin typeface="Arial"/>
               </a:rPr>
-              <a:t>Docentcue:</a:t>
+              <a:t>Pitfall:</a:t>
             </a:r>
             <a:endParaRPr lang="en-US" sz="2000" b="0" u="none" strike="noStrike">
               <a:solidFill>
@@ -1249,7 +1201,7 @@
                 <a:uFillTx/>
                 <a:latin typeface="Arial"/>
               </a:rPr>
-              <a:t>- Laat leerlingen eerst de kolommen benoemen voordat ze de lijn interpreteren.</a:t>
+              <a:t>Geen specifieke valkuil.</a:t>
             </a:r>
             <a:endParaRPr lang="en-US" sz="2000" b="0" u="none" strike="noStrike">
               <a:solidFill>
@@ -1287,67 +1239,6 @@
                 <a:latin typeface="Arial"/>
               </a:rPr>
               <a:t>Overgang:</a:t>
-            </a:r>
-            <a:endParaRPr lang="en-US" sz="2000" b="0" u="none" strike="noStrike">
-              <a:solidFill>
-                <a:srgbClr val="000000"/>
-              </a:solidFill>
-              <a:effectLst/>
-              <a:uFillTx/>
-              <a:latin typeface="Arial"/>
-            </a:endParaRPr>
-          </a:p>
-          <a:p>
-            <a:pPr indent="0" algn="l">
-              <a:buNone/>
-            </a:pPr>
-            <a:r>
-              <a:rPr lang="en-US" sz="1400" b="0" u="none" strike="noStrike">
-                <a:solidFill>
-                  <a:srgbClr val="000000"/>
-                </a:solidFill>
-                <a:effectLst/>
-                <a:uFillTx/>
-                <a:latin typeface="Arial"/>
-              </a:rPr>
-              <a:t>Nu kiezen we precies welke tabelwaarden nodig zijn.</a:t>
-            </a:r>
-            <a:endParaRPr lang="en-US" sz="2000" b="0" u="none" strike="noStrike">
-              <a:solidFill>
-                <a:srgbClr val="000000"/>
-              </a:solidFill>
-              <a:effectLst/>
-              <a:uFillTx/>
-              <a:latin typeface="Arial"/>
-            </a:endParaRPr>
-          </a:p>
-          <a:p>
-            <a:pPr indent="0" algn="l">
-              <a:buNone/>
-            </a:pPr>
-            <a:endParaRPr lang="en-US" sz="2000" b="0" u="none" strike="noStrike">
-              <a:solidFill>
-                <a:srgbClr val="000000"/>
-              </a:solidFill>
-              <a:effectLst/>
-              <a:uFillTx/>
-              <a:latin typeface="Arial"/>
-            </a:endParaRPr>
-          </a:p>
-          <a:p>
-            <a:pPr indent="0" algn="l">
-              <a:buNone/>
-            </a:pPr>
-            <a:r>
-              <a:rPr lang="en-US" sz="1400" b="0" u="none" strike="noStrike">
-                <a:solidFill>
-                  <a:srgbClr val="000000"/>
-                </a:solidFill>
-                <a:effectLst/>
-                <a:uFillTx/>
-                <a:latin typeface="Arial"/>
-              </a:rPr>
-              <a:t>Actie op de dia:</a:t>
             </a:r>
             <a:endParaRPr lang="en-US" sz="2000" b="0" u="none" strike="noStrike">
               <a:solidFill>
@@ -1374,7 +1265,7 @@
                 <a:uFillTx/>
                 <a:latin typeface="Arial"/>
               </a:rPr>
-              <a:t>Noem bij twee rijen hardop de prijs, hoeveelheid en eenheid.</a:t>
+              <a:t>Nu kiezen we precies welke tabelwaarden nodig zijn.</a:t>
             </a:r>
             <a:endParaRPr lang="en-US" sz="2000" b="0" u="none" strike="noStrike">
               <a:solidFill>
@@ -1438,7 +1329,7 @@
               </a:lnSpc>
               <a:buNone/>
             </a:pPr>
-            <a:fld id="{8DA0A44A-691C-4288-BFDA-E1D9021771D8}" type="slidenum">
+            <a:fld id="{2B361BA1-99DC-482F-A251-AD74CF2AD95A}" type="slidenum">
               <a:rPr lang="en-US" sz="1400" b="0" u="none" strike="noStrike">
                 <a:solidFill>
                   <a:schemeClr val="dk1"/>
@@ -1585,17 +1476,6 @@
             <a:pPr indent="0" algn="l">
               <a:buNone/>
             </a:pPr>
-            <a:r>
-              <a:rPr lang="en-US" sz="1400" b="0" u="none" strike="noStrike">
-                <a:solidFill>
-                  <a:srgbClr val="000000"/>
-                </a:solidFill>
-                <a:effectLst/>
-                <a:uFillTx/>
-                <a:latin typeface="Arial"/>
-              </a:rPr>
-              <a:t>Rol: table_value_selection</a:t>
-            </a:r>
             <a:endParaRPr lang="en-US" sz="2000" b="0" u="none" strike="noStrike">
               <a:solidFill>
                 <a:srgbClr val="000000"/>
@@ -1618,7 +1498,7 @@
                 <a:uFillTx/>
                 <a:latin typeface="Arial"/>
               </a:rPr>
-              <a:t>Layout: procedureRoute</a:t>
+              <a:t>Vraag:</a:t>
             </a:r>
             <a:endParaRPr lang="en-US" sz="2000" b="0" u="none" strike="noStrike">
               <a:solidFill>
@@ -1633,6 +1513,17 @@
             <a:pPr indent="0" algn="l">
               <a:buNone/>
             </a:pPr>
+            <a:r>
+              <a:rPr lang="en-US" sz="1400" b="0" u="none" strike="noStrike">
+                <a:solidFill>
+                  <a:srgbClr val="000000"/>
+                </a:solidFill>
+                <a:effectLst/>
+                <a:uFillTx/>
+                <a:latin typeface="Arial"/>
+              </a:rPr>
+              <a:t>Label de waarden voordat je rekent.</a:t>
+            </a:r>
             <a:endParaRPr lang="en-US" sz="2000" b="0" u="none" strike="noStrike">
               <a:solidFill>
                 <a:srgbClr val="000000"/>
@@ -1646,17 +1537,6 @@
             <a:pPr indent="0" algn="l">
               <a:buNone/>
             </a:pPr>
-            <a:r>
-              <a:rPr lang="en-US" sz="1400" b="0" u="none" strike="noStrike">
-                <a:solidFill>
-                  <a:srgbClr val="000000"/>
-                </a:solidFill>
-                <a:effectLst/>
-                <a:uFillTx/>
-                <a:latin typeface="Arial"/>
-              </a:rPr>
-              <a:t>Kernzin:</a:t>
-            </a:r>
             <a:endParaRPr lang="en-US" sz="2000" b="0" u="none" strike="noStrike">
               <a:solidFill>
                 <a:srgbClr val="000000"/>
@@ -1679,7 +1559,7 @@
                 <a:uFillTx/>
                 <a:latin typeface="Arial"/>
               </a:rPr>
-              <a:t>Een getal uit een tabel is pas bruikbaar als je label en eenheid meeneemt.</a:t>
+              <a:t>Uitleg:</a:t>
             </a:r>
             <a:endParaRPr lang="en-US" sz="2000" b="0" u="none" strike="noStrike">
               <a:solidFill>
@@ -1694,6 +1574,17 @@
             <a:pPr indent="0" algn="l">
               <a:buNone/>
             </a:pPr>
+            <a:r>
+              <a:rPr lang="en-US" sz="1400" b="0" u="none" strike="noStrike">
+                <a:solidFill>
+                  <a:srgbClr val="000000"/>
+                </a:solidFill>
+                <a:effectLst/>
+                <a:uFillTx/>
+                <a:latin typeface="Arial"/>
+              </a:rPr>
+              <a:t>- Een getal uit een tabel is pas bruikbaar als je label en eenheid meeneemt.</a:t>
+            </a:r>
             <a:endParaRPr lang="en-US" sz="2000" b="0" u="none" strike="noStrike">
               <a:solidFill>
                 <a:srgbClr val="000000"/>
@@ -1716,7 +1607,7 @@
                 <a:uFillTx/>
                 <a:latin typeface="Arial"/>
               </a:rPr>
-              <a:t>Studentuitleg:</a:t>
+              <a:t>- Dit is de broncontrole die veel rekenfouten voorkomt.</a:t>
             </a:r>
             <a:endParaRPr lang="en-US" sz="2000" b="0" u="none" strike="noStrike">
               <a:solidFill>
@@ -1731,17 +1622,6 @@
             <a:pPr indent="0" algn="l">
               <a:buNone/>
             </a:pPr>
-            <a:r>
-              <a:rPr lang="en-US" sz="1400" b="0" u="none" strike="noStrike">
-                <a:solidFill>
-                  <a:srgbClr val="000000"/>
-                </a:solidFill>
-                <a:effectLst/>
-                <a:uFillTx/>
-                <a:latin typeface="Arial"/>
-              </a:rPr>
-              <a:t>- Dit is de broncontrole die veel rekenfouten voorkomt.</a:t>
-            </a:r>
             <a:endParaRPr lang="en-US" sz="2000" b="0" u="none" strike="noStrike">
               <a:solidFill>
                 <a:srgbClr val="000000"/>
@@ -1764,7 +1644,7 @@
                 <a:uFillTx/>
                 <a:latin typeface="Arial"/>
               </a:rPr>
-              <a:t>- Zonder label weet je later niet meer of 300 een prijs, hoeveelheid of index is.</a:t>
+              <a:t>Pitfall:</a:t>
             </a:r>
             <a:endParaRPr lang="en-US" sz="2000" b="0" u="none" strike="noStrike">
               <a:solidFill>
@@ -1779,6 +1659,17 @@
             <a:pPr indent="0" algn="l">
               <a:buNone/>
             </a:pPr>
+            <a:r>
+              <a:rPr lang="en-US" sz="1400" b="0" u="none" strike="noStrike">
+                <a:solidFill>
+                  <a:srgbClr val="000000"/>
+                </a:solidFill>
+                <a:effectLst/>
+                <a:uFillTx/>
+                <a:latin typeface="Arial"/>
+              </a:rPr>
+              <a:t>Geen specifieke valkuil.</a:t>
+            </a:r>
             <a:endParaRPr lang="en-US" sz="2000" b="0" u="none" strike="noStrike">
               <a:solidFill>
                 <a:srgbClr val="000000"/>
@@ -1792,17 +1683,6 @@
             <a:pPr indent="0" algn="l">
               <a:buNone/>
             </a:pPr>
-            <a:r>
-              <a:rPr lang="en-US" sz="1400" b="0" u="none" strike="noStrike">
-                <a:solidFill>
-                  <a:srgbClr val="000000"/>
-                </a:solidFill>
-                <a:effectLst/>
-                <a:uFillTx/>
-                <a:latin typeface="Arial"/>
-              </a:rPr>
-              <a:t>Overgang:</a:t>
-            </a:r>
             <a:endParaRPr lang="en-US" sz="2000" b="0" u="none" strike="noStrike">
               <a:solidFill>
                 <a:srgbClr val="000000"/>
@@ -1825,44 +1705,7 @@
                 <a:uFillTx/>
                 <a:latin typeface="Arial"/>
               </a:rPr>
-              <a:t>Met de bronwaarden helder kunnen we de grafiekopzet controleren.</a:t>
-            </a:r>
-            <a:endParaRPr lang="en-US" sz="2000" b="0" u="none" strike="noStrike">
-              <a:solidFill>
-                <a:srgbClr val="000000"/>
-              </a:solidFill>
-              <a:effectLst/>
-              <a:uFillTx/>
-              <a:latin typeface="Arial"/>
-            </a:endParaRPr>
-          </a:p>
-          <a:p>
-            <a:pPr indent="0" algn="l">
-              <a:buNone/>
-            </a:pPr>
-            <a:endParaRPr lang="en-US" sz="2000" b="0" u="none" strike="noStrike">
-              <a:solidFill>
-                <a:srgbClr val="000000"/>
-              </a:solidFill>
-              <a:effectLst/>
-              <a:uFillTx/>
-              <a:latin typeface="Arial"/>
-            </a:endParaRPr>
-          </a:p>
-          <a:p>
-            <a:pPr indent="0" algn="l">
-              <a:buNone/>
-            </a:pPr>
-            <a:r>
-              <a:rPr lang="en-US" sz="1400" b="0" u="none" strike="noStrike">
-                <a:solidFill>
-                  <a:srgbClr val="000000"/>
-                </a:solidFill>
-                <a:effectLst/>
-                <a:uFillTx/>
-                <a:latin typeface="Arial"/>
-              </a:rPr>
-              <a:t>Actie op de dia:</a:t>
+              <a:t>Overgang:</a:t>
             </a:r>
             <a:endParaRPr lang="en-US" sz="2000" b="0" u="none" strike="noStrike">
               <a:solidFill>
@@ -1889,7 +1732,7 @@
                 <a:uFillTx/>
                 <a:latin typeface="Arial"/>
               </a:rPr>
-              <a:t>Label de waarden voordat je rekent.</a:t>
+              <a:t>Met de bronwaarden helder kunnen we de grafiekopzet controleren.</a:t>
             </a:r>
             <a:endParaRPr lang="en-US" sz="2000" b="0" u="none" strike="noStrike">
               <a:solidFill>
@@ -1953,7 +1796,7 @@
               </a:lnSpc>
               <a:buNone/>
             </a:pPr>
-            <a:fld id="{637726B6-7260-4C74-A930-9DE93F2D0444}" type="slidenum">
+            <a:fld id="{D13262B3-9A24-40AC-8FD0-A531ECE63D57}" type="slidenum">
               <a:rPr lang="en-US" sz="1400" b="0" u="none" strike="noStrike">
                 <a:solidFill>
                   <a:schemeClr val="dk1"/>
@@ -2100,17 +1943,6 @@
             <a:pPr indent="0" algn="l">
               <a:buNone/>
             </a:pPr>
-            <a:r>
-              <a:rPr lang="en-US" sz="1400" b="0" u="none" strike="noStrike">
-                <a:solidFill>
-                  <a:srgbClr val="000000"/>
-                </a:solidFill>
-                <a:effectLst/>
-                <a:uFillTx/>
-                <a:latin typeface="Arial"/>
-              </a:rPr>
-              <a:t>Rol: axis_convention</a:t>
-            </a:r>
             <a:endParaRPr lang="en-US" sz="2000" b="0" u="none" strike="noStrike">
               <a:solidFill>
                 <a:srgbClr val="000000"/>
@@ -2133,7 +1965,7 @@
                 <a:uFillTx/>
                 <a:latin typeface="Arial"/>
               </a:rPr>
-              <a:t>Layout: procedureRoute</a:t>
+              <a:t>Vraag:</a:t>
             </a:r>
             <a:endParaRPr lang="en-US" sz="2000" b="0" u="none" strike="noStrike">
               <a:solidFill>
@@ -2148,6 +1980,17 @@
             <a:pPr indent="0" algn="l">
               <a:buNone/>
             </a:pPr>
+            <a:r>
+              <a:rPr lang="en-US" sz="1400" b="0" u="none" strike="noStrike">
+                <a:solidFill>
+                  <a:srgbClr val="000000"/>
+                </a:solidFill>
+                <a:effectLst/>
+                <a:uFillTx/>
+                <a:latin typeface="Arial"/>
+              </a:rPr>
+              <a:t>Spreek een punt uit als hoeveelheid en prijs: (Q; P).</a:t>
+            </a:r>
             <a:endParaRPr lang="en-US" sz="2000" b="0" u="none" strike="noStrike">
               <a:solidFill>
                 <a:srgbClr val="000000"/>
@@ -2161,17 +2004,6 @@
             <a:pPr indent="0" algn="l">
               <a:buNone/>
             </a:pPr>
-            <a:r>
-              <a:rPr lang="en-US" sz="1400" b="0" u="none" strike="noStrike">
-                <a:solidFill>
-                  <a:srgbClr val="000000"/>
-                </a:solidFill>
-                <a:effectLst/>
-                <a:uFillTx/>
-                <a:latin typeface="Arial"/>
-              </a:rPr>
-              <a:t>Kernzin:</a:t>
-            </a:r>
             <a:endParaRPr lang="en-US" sz="2000" b="0" u="none" strike="noStrike">
               <a:solidFill>
                 <a:srgbClr val="000000"/>
@@ -2194,7 +2026,7 @@
                 <a:uFillTx/>
                 <a:latin typeface="Arial"/>
               </a:rPr>
-              <a:t>In deze P-Q-grafiek staat prijs op de verticale as en hoeveelheid op de horizontale as.</a:t>
+              <a:t>Uitleg:</a:t>
             </a:r>
             <a:endParaRPr lang="en-US" sz="2000" b="0" u="none" strike="noStrike">
               <a:solidFill>
@@ -2209,6 +2041,17 @@
             <a:pPr indent="0" algn="l">
               <a:buNone/>
             </a:pPr>
+            <a:r>
+              <a:rPr lang="en-US" sz="1400" b="0" u="none" strike="noStrike">
+                <a:solidFill>
+                  <a:srgbClr val="000000"/>
+                </a:solidFill>
+                <a:effectLst/>
+                <a:uFillTx/>
+                <a:latin typeface="Arial"/>
+              </a:rPr>
+              <a:t>- In deze P-Q-grafiek staat prijs op de verticale as en hoeveelheid op de horizontale as.</a:t>
+            </a:r>
             <a:endParaRPr lang="en-US" sz="2000" b="0" u="none" strike="noStrike">
               <a:solidFill>
                 <a:srgbClr val="000000"/>
@@ -2231,7 +2074,7 @@
                 <a:uFillTx/>
                 <a:latin typeface="Arial"/>
               </a:rPr>
-              <a:t>Studentuitleg:</a:t>
+              <a:t>- De valkuil is dat leerlingen vanuit wiskunde automatisch de prijs horizontaal zetten.</a:t>
             </a:r>
             <a:endParaRPr lang="en-US" sz="2000" b="0" u="none" strike="noStrike">
               <a:solidFill>
@@ -2246,17 +2089,6 @@
             <a:pPr indent="0" algn="l">
               <a:buNone/>
             </a:pPr>
-            <a:r>
-              <a:rPr lang="en-US" sz="1400" b="0" u="none" strike="noStrike">
-                <a:solidFill>
-                  <a:srgbClr val="000000"/>
-                </a:solidFill>
-                <a:effectLst/>
-                <a:uFillTx/>
-                <a:latin typeface="Arial"/>
-              </a:rPr>
-              <a:t>- De valkuil is dat leerlingen vanuit wiskunde automatisch de prijs horizontaal zetten.</a:t>
-            </a:r>
             <a:endParaRPr lang="en-US" sz="2000" b="0" u="none" strike="noStrike">
               <a:solidFill>
                 <a:srgbClr val="000000"/>
@@ -2270,6 +2102,17 @@
             <a:pPr indent="0" algn="l">
               <a:buNone/>
             </a:pPr>
+            <a:r>
+              <a:rPr lang="en-US" sz="1400" b="0" u="none" strike="noStrike">
+                <a:solidFill>
+                  <a:srgbClr val="000000"/>
+                </a:solidFill>
+                <a:effectLst/>
+                <a:uFillTx/>
+                <a:latin typeface="Arial"/>
+              </a:rPr>
+              <a:t>Pitfall:</a:t>
+            </a:r>
             <a:endParaRPr lang="en-US" sz="2000" b="0" u="none" strike="noStrike">
               <a:solidFill>
                 <a:srgbClr val="000000"/>
@@ -2292,7 +2135,7 @@
                 <a:uFillTx/>
                 <a:latin typeface="Arial"/>
               </a:rPr>
-              <a:t>Misconceptie-watch:</a:t>
+              <a:t>- Draai de assen niet om: in deze economiegrafiek staat P verticaal en Q horizontaal.</a:t>
             </a:r>
             <a:endParaRPr lang="en-US" sz="2000" b="0" u="none" strike="noStrike">
               <a:solidFill>
@@ -2307,17 +2150,6 @@
             <a:pPr indent="0" algn="l">
               <a:buNone/>
             </a:pPr>
-            <a:r>
-              <a:rPr lang="en-US" sz="1400" b="0" u="none" strike="noStrike">
-                <a:solidFill>
-                  <a:srgbClr val="000000"/>
-                </a:solidFill>
-                <a:effectLst/>
-                <a:uFillTx/>
-                <a:latin typeface="Arial"/>
-              </a:rPr>
-              <a:t>- Draai de assen niet om: in deze economiegrafiek staat P verticaal en Q horizontaal.</a:t>
-            </a:r>
             <a:endParaRPr lang="en-US" sz="2000" b="0" u="none" strike="noStrike">
               <a:solidFill>
                 <a:srgbClr val="000000"/>
@@ -2331,19 +2163,6 @@
             <a:pPr indent="0" algn="l">
               <a:buNone/>
             </a:pPr>
-            <a:endParaRPr lang="en-US" sz="2000" b="0" u="none" strike="noStrike">
-              <a:solidFill>
-                <a:srgbClr val="000000"/>
-              </a:solidFill>
-              <a:effectLst/>
-              <a:uFillTx/>
-              <a:latin typeface="Arial"/>
-            </a:endParaRPr>
-          </a:p>
-          <a:p>
-            <a:pPr indent="0" algn="l">
-              <a:buNone/>
-            </a:pPr>
             <a:r>
               <a:rPr lang="en-US" sz="1400" b="0" u="none" strike="noStrike">
                 <a:solidFill>
@@ -2354,67 +2173,6 @@
                 <a:latin typeface="Arial"/>
               </a:rPr>
               <a:t>Overgang:</a:t>
-            </a:r>
-            <a:endParaRPr lang="en-US" sz="2000" b="0" u="none" strike="noStrike">
-              <a:solidFill>
-                <a:srgbClr val="000000"/>
-              </a:solidFill>
-              <a:effectLst/>
-              <a:uFillTx/>
-              <a:latin typeface="Arial"/>
-            </a:endParaRPr>
-          </a:p>
-          <a:p>
-            <a:pPr indent="0" algn="l">
-              <a:buNone/>
-            </a:pPr>
-            <a:r>
-              <a:rPr lang="en-US" sz="1400" b="0" u="none" strike="noStrike">
-                <a:solidFill>
-                  <a:srgbClr val="000000"/>
-                </a:solidFill>
-                <a:effectLst/>
-                <a:uFillTx/>
-                <a:latin typeface="Arial"/>
-              </a:rPr>
-              <a:t>Daarna lezen we een tussenwaarde af.</a:t>
-            </a:r>
-            <a:endParaRPr lang="en-US" sz="2000" b="0" u="none" strike="noStrike">
-              <a:solidFill>
-                <a:srgbClr val="000000"/>
-              </a:solidFill>
-              <a:effectLst/>
-              <a:uFillTx/>
-              <a:latin typeface="Arial"/>
-            </a:endParaRPr>
-          </a:p>
-          <a:p>
-            <a:pPr indent="0" algn="l">
-              <a:buNone/>
-            </a:pPr>
-            <a:endParaRPr lang="en-US" sz="2000" b="0" u="none" strike="noStrike">
-              <a:solidFill>
-                <a:srgbClr val="000000"/>
-              </a:solidFill>
-              <a:effectLst/>
-              <a:uFillTx/>
-              <a:latin typeface="Arial"/>
-            </a:endParaRPr>
-          </a:p>
-          <a:p>
-            <a:pPr indent="0" algn="l">
-              <a:buNone/>
-            </a:pPr>
-            <a:r>
-              <a:rPr lang="en-US" sz="1400" b="0" u="none" strike="noStrike">
-                <a:solidFill>
-                  <a:srgbClr val="000000"/>
-                </a:solidFill>
-                <a:effectLst/>
-                <a:uFillTx/>
-                <a:latin typeface="Arial"/>
-              </a:rPr>
-              <a:t>Actie op de dia:</a:t>
             </a:r>
             <a:endParaRPr lang="en-US" sz="2000" b="0" u="none" strike="noStrike">
               <a:solidFill>
@@ -2441,7 +2199,7 @@
                 <a:uFillTx/>
                 <a:latin typeface="Arial"/>
               </a:rPr>
-              <a:t>Spreek een punt uit als hoeveelheid en prijs: (Q; P).</a:t>
+              <a:t>Daarna lezen we een tussenwaarde af.</a:t>
             </a:r>
             <a:endParaRPr lang="en-US" sz="2000" b="0" u="none" strike="noStrike">
               <a:solidFill>
@@ -2505,7 +2263,7 @@
               </a:lnSpc>
               <a:buNone/>
             </a:pPr>
-            <a:fld id="{1098E368-9B54-41DC-821A-6BDDFA68500B}" type="slidenum">
+            <a:fld id="{B2D2A369-6CBE-4E61-BB7A-55E36C914840}" type="slidenum">
               <a:rPr lang="en-US" sz="1400" b="0" u="none" strike="noStrike">
                 <a:solidFill>
                   <a:schemeClr val="dk1"/>
@@ -2652,17 +2410,6 @@
             <a:pPr indent="0" algn="l">
               <a:buNone/>
             </a:pPr>
-            <a:r>
-              <a:rPr lang="en-US" sz="1400" b="0" u="none" strike="noStrike">
-                <a:solidFill>
-                  <a:srgbClr val="000000"/>
-                </a:solidFill>
-                <a:effectLst/>
-                <a:uFillTx/>
-                <a:latin typeface="Arial"/>
-              </a:rPr>
-              <a:t>Rol: graph_reading_interpolation</a:t>
-            </a:r>
             <a:endParaRPr lang="en-US" sz="2000" b="0" u="none" strike="noStrike">
               <a:solidFill>
                 <a:srgbClr val="000000"/>
@@ -2685,7 +2432,7 @@
                 <a:uFillTx/>
                 <a:latin typeface="Arial"/>
               </a:rPr>
-              <a:t>Layout: procedureRoute</a:t>
+              <a:t>Vraag:</a:t>
             </a:r>
             <a:endParaRPr lang="en-US" sz="2000" b="0" u="none" strike="noStrike">
               <a:solidFill>
@@ -2700,6 +2447,17 @@
             <a:pPr indent="0" algn="l">
               <a:buNone/>
             </a:pPr>
+            <a:r>
+              <a:rPr lang="en-US" sz="1400" b="0" u="none" strike="noStrike">
+                <a:solidFill>
+                  <a:srgbClr val="000000"/>
+                </a:solidFill>
+                <a:effectLst/>
+                <a:uFillTx/>
+                <a:latin typeface="Arial"/>
+              </a:rPr>
+              <a:t>Gebruik hulplijnen en noem de schatting als ongeveer.</a:t>
+            </a:r>
             <a:endParaRPr lang="en-US" sz="2000" b="0" u="none" strike="noStrike">
               <a:solidFill>
                 <a:srgbClr val="000000"/>
@@ -2713,17 +2471,6 @@
             <a:pPr indent="0" algn="l">
               <a:buNone/>
             </a:pPr>
-            <a:r>
-              <a:rPr lang="en-US" sz="1400" b="0" u="none" strike="noStrike">
-                <a:solidFill>
-                  <a:srgbClr val="000000"/>
-                </a:solidFill>
-                <a:effectLst/>
-                <a:uFillTx/>
-                <a:latin typeface="Arial"/>
-              </a:rPr>
-              <a:t>Kernzin:</a:t>
-            </a:r>
             <a:endParaRPr lang="en-US" sz="2000" b="0" u="none" strike="noStrike">
               <a:solidFill>
                 <a:srgbClr val="000000"/>
@@ -2746,7 +2493,7 @@
                 <a:uFillTx/>
                 <a:latin typeface="Arial"/>
               </a:rPr>
-              <a:t>Interpoleren is een beredeneerde schatting tussen bekende punten.</a:t>
+              <a:t>Uitleg:</a:t>
             </a:r>
             <a:endParaRPr lang="en-US" sz="2000" b="0" u="none" strike="noStrike">
               <a:solidFill>
@@ -2761,6 +2508,17 @@
             <a:pPr indent="0" algn="l">
               <a:buNone/>
             </a:pPr>
+            <a:r>
+              <a:rPr lang="en-US" sz="1400" b="0" u="none" strike="noStrike">
+                <a:solidFill>
+                  <a:srgbClr val="000000"/>
+                </a:solidFill>
+                <a:effectLst/>
+                <a:uFillTx/>
+                <a:latin typeface="Arial"/>
+              </a:rPr>
+              <a:t>- Interpoleren is een beredeneerde schatting tussen bekende punten.</a:t>
+            </a:r>
             <a:endParaRPr lang="en-US" sz="2000" b="0" u="none" strike="noStrike">
               <a:solidFill>
                 <a:srgbClr val="000000"/>
@@ -2783,7 +2541,7 @@
                 <a:uFillTx/>
                 <a:latin typeface="Arial"/>
               </a:rPr>
-              <a:t>Studentuitleg:</a:t>
+              <a:t>- Interpoleren is hier geen gok: de schatting ligt tussen twee bekende bronpunten.</a:t>
             </a:r>
             <a:endParaRPr lang="en-US" sz="2000" b="0" u="none" strike="noStrike">
               <a:solidFill>
@@ -2798,17 +2556,6 @@
             <a:pPr indent="0" algn="l">
               <a:buNone/>
             </a:pPr>
-            <a:r>
-              <a:rPr lang="en-US" sz="1400" b="0" u="none" strike="noStrike">
-                <a:solidFill>
-                  <a:srgbClr val="000000"/>
-                </a:solidFill>
-                <a:effectLst/>
-                <a:uFillTx/>
-                <a:latin typeface="Arial"/>
-              </a:rPr>
-              <a:t>- Interpoleren is hier geen gok: de schatting ligt tussen twee bekende bronpunten.</a:t>
-            </a:r>
             <a:endParaRPr lang="en-US" sz="2000" b="0" u="none" strike="noStrike">
               <a:solidFill>
                 <a:srgbClr val="000000"/>
@@ -2822,6 +2569,17 @@
             <a:pPr indent="0" algn="l">
               <a:buNone/>
             </a:pPr>
+            <a:r>
+              <a:rPr lang="en-US" sz="1400" b="0" u="none" strike="noStrike">
+                <a:solidFill>
+                  <a:srgbClr val="000000"/>
+                </a:solidFill>
+                <a:effectLst/>
+                <a:uFillTx/>
+                <a:latin typeface="Arial"/>
+              </a:rPr>
+              <a:t>Pitfall:</a:t>
+            </a:r>
             <a:endParaRPr lang="en-US" sz="2000" b="0" u="none" strike="noStrike">
               <a:solidFill>
                 <a:srgbClr val="000000"/>
@@ -2844,7 +2602,7 @@
                 <a:uFillTx/>
                 <a:latin typeface="Arial"/>
               </a:rPr>
-              <a:t>Overgang:</a:t>
+              <a:t>Geen specifieke valkuil.</a:t>
             </a:r>
             <a:endParaRPr lang="en-US" sz="2000" b="0" u="none" strike="noStrike">
               <a:solidFill>
@@ -2859,17 +2617,6 @@
             <a:pPr indent="0" algn="l">
               <a:buNone/>
             </a:pPr>
-            <a:r>
-              <a:rPr lang="en-US" sz="1400" b="0" u="none" strike="noStrike">
-                <a:solidFill>
-                  <a:srgbClr val="000000"/>
-                </a:solidFill>
-                <a:effectLst/>
-                <a:uFillTx/>
-                <a:latin typeface="Arial"/>
-              </a:rPr>
-              <a:t>Tot slot kijken we kritisch naar de schaal van een grafiek.</a:t>
-            </a:r>
             <a:endParaRPr lang="en-US" sz="2000" b="0" u="none" strike="noStrike">
               <a:solidFill>
                 <a:srgbClr val="000000"/>
@@ -2883,19 +2630,6 @@
             <a:pPr indent="0" algn="l">
               <a:buNone/>
             </a:pPr>
-            <a:endParaRPr lang="en-US" sz="2000" b="0" u="none" strike="noStrike">
-              <a:solidFill>
-                <a:srgbClr val="000000"/>
-              </a:solidFill>
-              <a:effectLst/>
-              <a:uFillTx/>
-              <a:latin typeface="Arial"/>
-            </a:endParaRPr>
-          </a:p>
-          <a:p>
-            <a:pPr indent="0" algn="l">
-              <a:buNone/>
-            </a:pPr>
             <a:r>
               <a:rPr lang="en-US" sz="1400" b="0" u="none" strike="noStrike">
                 <a:solidFill>
@@ -2905,7 +2639,7 @@
                 <a:uFillTx/>
                 <a:latin typeface="Arial"/>
               </a:rPr>
-              <a:t>Actie op de dia:</a:t>
+              <a:t>Overgang:</a:t>
             </a:r>
             <a:endParaRPr lang="en-US" sz="2000" b="0" u="none" strike="noStrike">
               <a:solidFill>
@@ -2932,7 +2666,7 @@
                 <a:uFillTx/>
                 <a:latin typeface="Arial"/>
               </a:rPr>
-              <a:t>Gebruik hulplijnen en noem de schatting als ongeveer.</a:t>
+              <a:t>Tot slot kijken we kritisch naar de schaal van een grafiek.</a:t>
             </a:r>
             <a:endParaRPr lang="en-US" sz="2000" b="0" u="none" strike="noStrike">
               <a:solidFill>
@@ -2996,7 +2730,7 @@
               </a:lnSpc>
               <a:buNone/>
             </a:pPr>
-            <a:fld id="{C8B3F2CB-3952-47DB-BD54-93AF6BC8FF4A}" type="slidenum">
+            <a:fld id="{F49E433A-23C4-4DB6-9030-5FE98EB6A531}" type="slidenum">
               <a:rPr lang="en-US" sz="1400" b="0" u="none" strike="noStrike">
                 <a:solidFill>
                   <a:schemeClr val="dk1"/>
@@ -3143,17 +2877,6 @@
             <a:pPr indent="0" algn="l">
               <a:buNone/>
             </a:pPr>
-            <a:r>
-              <a:rPr lang="en-US" sz="1400" b="0" u="none" strike="noStrike">
-                <a:solidFill>
-                  <a:srgbClr val="000000"/>
-                </a:solidFill>
-                <a:effectLst/>
-                <a:uFillTx/>
-                <a:latin typeface="Arial"/>
-              </a:rPr>
-              <a:t>Rol: graph_claim_check</a:t>
-            </a:r>
             <a:endParaRPr lang="en-US" sz="2000" b="0" u="none" strike="noStrike">
               <a:solidFill>
                 <a:srgbClr val="000000"/>
@@ -3176,7 +2899,7 @@
                 <a:uFillTx/>
                 <a:latin typeface="Arial"/>
               </a:rPr>
-              <a:t>Layout: procedureRoute</a:t>
+              <a:t>Vraag:</a:t>
             </a:r>
             <a:endParaRPr lang="en-US" sz="2000" b="0" u="none" strike="noStrike">
               <a:solidFill>
@@ -3191,6 +2914,17 @@
             <a:pPr indent="0" algn="l">
               <a:buNone/>
             </a:pPr>
+            <a:r>
+              <a:rPr lang="en-US" sz="1400" b="0" u="none" strike="noStrike">
+                <a:solidFill>
+                  <a:srgbClr val="000000"/>
+                </a:solidFill>
+                <a:effectLst/>
+                <a:uFillTx/>
+                <a:latin typeface="Arial"/>
+              </a:rPr>
+              <a:t>Lees de asstart en vergelijkingsbasis voordat je de conclusie overneemt.</a:t>
+            </a:r>
             <a:endParaRPr lang="en-US" sz="2000" b="0" u="none" strike="noStrike">
               <a:solidFill>
                 <a:srgbClr val="000000"/>
@@ -3204,17 +2938,6 @@
             <a:pPr indent="0" algn="l">
               <a:buNone/>
             </a:pPr>
-            <a:r>
-              <a:rPr lang="en-US" sz="1400" b="0" u="none" strike="noStrike">
-                <a:solidFill>
-                  <a:srgbClr val="000000"/>
-                </a:solidFill>
-                <a:effectLst/>
-                <a:uFillTx/>
-                <a:latin typeface="Arial"/>
-              </a:rPr>
-              <a:t>Kernzin:</a:t>
-            </a:r>
             <a:endParaRPr lang="en-US" sz="2000" b="0" u="none" strike="noStrike">
               <a:solidFill>
                 <a:srgbClr val="000000"/>
@@ -3237,7 +2960,7 @@
                 <a:uFillTx/>
                 <a:latin typeface="Arial"/>
               </a:rPr>
-              <a:t>Een grafiek kan hetzelfde verschil groter of kleiner laten voelen.</a:t>
+              <a:t>Uitleg:</a:t>
             </a:r>
             <a:endParaRPr lang="en-US" sz="2000" b="0" u="none" strike="noStrike">
               <a:solidFill>
@@ -3252,6 +2975,17 @@
             <a:pPr indent="0" algn="l">
               <a:buNone/>
             </a:pPr>
+            <a:r>
+              <a:rPr lang="en-US" sz="1400" b="0" u="none" strike="noStrike">
+                <a:solidFill>
+                  <a:srgbClr val="000000"/>
+                </a:solidFill>
+                <a:effectLst/>
+                <a:uFillTx/>
+                <a:latin typeface="Arial"/>
+              </a:rPr>
+              <a:t>- Een grafiek kan hetzelfde verschil groter of kleiner laten voelen.</a:t>
+            </a:r>
             <a:endParaRPr lang="en-US" sz="2000" b="0" u="none" strike="noStrike">
               <a:solidFill>
                 <a:srgbClr val="000000"/>
@@ -3274,7 +3008,7 @@
                 <a:uFillTx/>
                 <a:latin typeface="Arial"/>
               </a:rPr>
-              <a:t>Studentuitleg:</a:t>
+              <a:t>- Grafieken zijn niet verdacht, maar schaalkeuzes sturen wel hoe groot een verschil voelt.</a:t>
             </a:r>
             <a:endParaRPr lang="en-US" sz="2000" b="0" u="none" strike="noStrike">
               <a:solidFill>
@@ -3289,17 +3023,6 @@
             <a:pPr indent="0" algn="l">
               <a:buNone/>
             </a:pPr>
-            <a:r>
-              <a:rPr lang="en-US" sz="1400" b="0" u="none" strike="noStrike">
-                <a:solidFill>
-                  <a:srgbClr val="000000"/>
-                </a:solidFill>
-                <a:effectLst/>
-                <a:uFillTx/>
-                <a:latin typeface="Arial"/>
-              </a:rPr>
-              <a:t>- Grafieken zijn niet verdacht, maar schaalkeuzes sturen wel hoe groot een verschil voelt.</a:t>
-            </a:r>
             <a:endParaRPr lang="en-US" sz="2000" b="0" u="none" strike="noStrike">
               <a:solidFill>
                 <a:srgbClr val="000000"/>
@@ -3313,6 +3036,17 @@
             <a:pPr indent="0" algn="l">
               <a:buNone/>
             </a:pPr>
+            <a:r>
+              <a:rPr lang="en-US" sz="1400" b="0" u="none" strike="noStrike">
+                <a:solidFill>
+                  <a:srgbClr val="000000"/>
+                </a:solidFill>
+                <a:effectLst/>
+                <a:uFillTx/>
+                <a:latin typeface="Arial"/>
+              </a:rPr>
+              <a:t>Pitfall:</a:t>
+            </a:r>
             <a:endParaRPr lang="en-US" sz="2000" b="0" u="none" strike="noStrike">
               <a:solidFill>
                 <a:srgbClr val="000000"/>
@@ -3335,7 +3069,7 @@
                 <a:uFillTx/>
                 <a:latin typeface="Arial"/>
               </a:rPr>
-              <a:t>Misconceptie-watch:</a:t>
+              <a:t>- Een steile staaf is geen bewijs zonder de as en waarden te lezen.</a:t>
             </a:r>
             <a:endParaRPr lang="en-US" sz="2000" b="0" u="none" strike="noStrike">
               <a:solidFill>
@@ -3350,17 +3084,6 @@
             <a:pPr indent="0" algn="l">
               <a:buNone/>
             </a:pPr>
-            <a:r>
-              <a:rPr lang="en-US" sz="1400" b="0" u="none" strike="noStrike">
-                <a:solidFill>
-                  <a:srgbClr val="000000"/>
-                </a:solidFill>
-                <a:effectLst/>
-                <a:uFillTx/>
-                <a:latin typeface="Arial"/>
-              </a:rPr>
-              <a:t>- Een steile staaf is geen bewijs zonder de as en waarden te lezen.</a:t>
-            </a:r>
             <a:endParaRPr lang="en-US" sz="2000" b="0" u="none" strike="noStrike">
               <a:solidFill>
                 <a:srgbClr val="000000"/>
@@ -3374,19 +3097,6 @@
             <a:pPr indent="0" algn="l">
               <a:buNone/>
             </a:pPr>
-            <a:endParaRPr lang="en-US" sz="2000" b="0" u="none" strike="noStrike">
-              <a:solidFill>
-                <a:srgbClr val="000000"/>
-              </a:solidFill>
-              <a:effectLst/>
-              <a:uFillTx/>
-              <a:latin typeface="Arial"/>
-            </a:endParaRPr>
-          </a:p>
-          <a:p>
-            <a:pPr indent="0" algn="l">
-              <a:buNone/>
-            </a:pPr>
             <a:r>
               <a:rPr lang="en-US" sz="1400" b="0" u="none" strike="noStrike">
                 <a:solidFill>
@@ -3397,67 +3107,6 @@
                 <a:latin typeface="Arial"/>
               </a:rPr>
               <a:t>Overgang:</a:t>
-            </a:r>
-            <a:endParaRPr lang="en-US" sz="2000" b="0" u="none" strike="noStrike">
-              <a:solidFill>
-                <a:srgbClr val="000000"/>
-              </a:solidFill>
-              <a:effectLst/>
-              <a:uFillTx/>
-              <a:latin typeface="Arial"/>
-            </a:endParaRPr>
-          </a:p>
-          <a:p>
-            <a:pPr indent="0" algn="l">
-              <a:buNone/>
-            </a:pPr>
-            <a:r>
-              <a:rPr lang="en-US" sz="1400" b="0" u="none" strike="noStrike">
-                <a:solidFill>
-                  <a:srgbClr val="000000"/>
-                </a:solidFill>
-                <a:effectLst/>
-                <a:uFillTx/>
-                <a:latin typeface="Arial"/>
-              </a:rPr>
-              <a:t>We sluiten af door de kernvragen terug te halen.</a:t>
-            </a:r>
-            <a:endParaRPr lang="en-US" sz="2000" b="0" u="none" strike="noStrike">
-              <a:solidFill>
-                <a:srgbClr val="000000"/>
-              </a:solidFill>
-              <a:effectLst/>
-              <a:uFillTx/>
-              <a:latin typeface="Arial"/>
-            </a:endParaRPr>
-          </a:p>
-          <a:p>
-            <a:pPr indent="0" algn="l">
-              <a:buNone/>
-            </a:pPr>
-            <a:endParaRPr lang="en-US" sz="2000" b="0" u="none" strike="noStrike">
-              <a:solidFill>
-                <a:srgbClr val="000000"/>
-              </a:solidFill>
-              <a:effectLst/>
-              <a:uFillTx/>
-              <a:latin typeface="Arial"/>
-            </a:endParaRPr>
-          </a:p>
-          <a:p>
-            <a:pPr indent="0" algn="l">
-              <a:buNone/>
-            </a:pPr>
-            <a:r>
-              <a:rPr lang="en-US" sz="1400" b="0" u="none" strike="noStrike">
-                <a:solidFill>
-                  <a:srgbClr val="000000"/>
-                </a:solidFill>
-                <a:effectLst/>
-                <a:uFillTx/>
-                <a:latin typeface="Arial"/>
-              </a:rPr>
-              <a:t>Actie op de dia:</a:t>
             </a:r>
             <a:endParaRPr lang="en-US" sz="2000" b="0" u="none" strike="noStrike">
               <a:solidFill>
@@ -3484,7 +3133,7 @@
                 <a:uFillTx/>
                 <a:latin typeface="Arial"/>
               </a:rPr>
-              <a:t>Lees de asstart en vergelijkingsbasis voordat je de conclusie overneemt.</a:t>
+              <a:t>We sluiten af door de kernvragen terug te halen.</a:t>
             </a:r>
             <a:endParaRPr lang="en-US" sz="2000" b="0" u="none" strike="noStrike">
               <a:solidFill>
@@ -3548,7 +3197,7 @@
               </a:lnSpc>
               <a:buNone/>
             </a:pPr>
-            <a:fld id="{5C28D9CF-6200-4F4D-8C09-92775E82D6BD}" type="slidenum">
+            <a:fld id="{A985F5B3-E6A3-4B94-AE31-F39A07CD0843}" type="slidenum">
               <a:rPr lang="en-US" sz="1400" b="0" u="none" strike="noStrike">
                 <a:solidFill>
                   <a:schemeClr val="dk1"/>
@@ -3695,17 +3344,6 @@
             <a:pPr indent="0" algn="l">
               <a:buNone/>
             </a:pPr>
-            <a:r>
-              <a:rPr lang="en-US" sz="1400" b="0" u="none" strike="noStrike">
-                <a:solidFill>
-                  <a:srgbClr val="000000"/>
-                </a:solidFill>
-                <a:effectLst/>
-                <a:uFillTx/>
-                <a:latin typeface="Arial"/>
-              </a:rPr>
-              <a:t>Rol: retrieval_check</a:t>
-            </a:r>
             <a:endParaRPr lang="en-US" sz="2000" b="0" u="none" strike="noStrike">
               <a:solidFill>
                 <a:srgbClr val="000000"/>
@@ -3728,7 +3366,7 @@
                 <a:uFillTx/>
                 <a:latin typeface="Arial"/>
               </a:rPr>
-              <a:t>Layout: retrievalCheck</a:t>
+              <a:t>Vraag:</a:t>
             </a:r>
             <a:endParaRPr lang="en-US" sz="2000" b="0" u="none" strike="noStrike">
               <a:solidFill>
@@ -3743,6 +3381,17 @@
             <a:pPr indent="0" algn="l">
               <a:buNone/>
             </a:pPr>
+            <a:r>
+              <a:rPr lang="en-US" sz="1400" b="0" u="none" strike="noStrike">
+                <a:solidFill>
+                  <a:srgbClr val="000000"/>
+                </a:solidFill>
+                <a:effectLst/>
+                <a:uFillTx/>
+                <a:latin typeface="Arial"/>
+              </a:rPr>
+              <a:t>Beantwoord eerst zelf; open daarna de kaart.</a:t>
+            </a:r>
             <a:endParaRPr lang="en-US" sz="2000" b="0" u="none" strike="noStrike">
               <a:solidFill>
                 <a:srgbClr val="000000"/>
@@ -3756,17 +3405,6 @@
             <a:pPr indent="0" algn="l">
               <a:buNone/>
             </a:pPr>
-            <a:r>
-              <a:rPr lang="en-US" sz="1400" b="0" u="none" strike="noStrike">
-                <a:solidFill>
-                  <a:srgbClr val="000000"/>
-                </a:solidFill>
-                <a:effectLst/>
-                <a:uFillTx/>
-                <a:latin typeface="Arial"/>
-              </a:rPr>
-              <a:t>Kernzin:</a:t>
-            </a:r>
             <a:endParaRPr lang="en-US" sz="2000" b="0" u="none" strike="noStrike">
               <a:solidFill>
                 <a:srgbClr val="000000"/>
@@ -3789,7 +3427,7 @@
                 <a:uFillTx/>
                 <a:latin typeface="Arial"/>
               </a:rPr>
-              <a:t>Deze checks vatten de basis van grafieken en tabellen samen.</a:t>
+              <a:t>Uitleg:</a:t>
             </a:r>
             <a:endParaRPr lang="en-US" sz="2000" b="0" u="none" strike="noStrike">
               <a:solidFill>
@@ -3804,6 +3442,17 @@
             <a:pPr indent="0" algn="l">
               <a:buNone/>
             </a:pPr>
+            <a:r>
+              <a:rPr lang="en-US" sz="1400" b="0" u="none" strike="noStrike">
+                <a:solidFill>
+                  <a:srgbClr val="000000"/>
+                </a:solidFill>
+                <a:effectLst/>
+                <a:uFillTx/>
+                <a:latin typeface="Arial"/>
+              </a:rPr>
+              <a:t>- Deze checks vatten de basis van grafieken en tabellen samen.</a:t>
+            </a:r>
             <a:endParaRPr lang="en-US" sz="2000" b="0" u="none" strike="noStrike">
               <a:solidFill>
                 <a:srgbClr val="000000"/>
@@ -3826,7 +3475,7 @@
                 <a:uFillTx/>
                 <a:latin typeface="Arial"/>
               </a:rPr>
-              <a:t>Studentuitleg:</a:t>
+              <a:t>- Laat leerlingen eerst stil antwoorden en daarna per kaart controleren.</a:t>
             </a:r>
             <a:endParaRPr lang="en-US" sz="2000" b="0" u="none" strike="noStrike">
               <a:solidFill>
@@ -3841,17 +3490,6 @@
             <a:pPr indent="0" algn="l">
               <a:buNone/>
             </a:pPr>
-            <a:r>
-              <a:rPr lang="en-US" sz="1400" b="0" u="none" strike="noStrike">
-                <a:solidFill>
-                  <a:srgbClr val="000000"/>
-                </a:solidFill>
-                <a:effectLst/>
-                <a:uFillTx/>
-                <a:latin typeface="Arial"/>
-              </a:rPr>
-              <a:t>- Deze check is bedoeld als snelle terughaalronde, niet als bewijs dat alles onder de knie is.</a:t>
-            </a:r>
             <a:endParaRPr lang="en-US" sz="2000" b="0" u="none" strike="noStrike">
               <a:solidFill>
                 <a:srgbClr val="000000"/>
@@ -3865,6 +3503,17 @@
             <a:pPr indent="0" algn="l">
               <a:buNone/>
             </a:pPr>
+            <a:r>
+              <a:rPr lang="en-US" sz="1400" b="0" u="none" strike="noStrike">
+                <a:solidFill>
+                  <a:srgbClr val="000000"/>
+                </a:solidFill>
+                <a:effectLst/>
+                <a:uFillTx/>
+                <a:latin typeface="Arial"/>
+              </a:rPr>
+              <a:t>Pitfall:</a:t>
+            </a:r>
             <a:endParaRPr lang="en-US" sz="2000" b="0" u="none" strike="noStrike">
               <a:solidFill>
                 <a:srgbClr val="000000"/>
@@ -3887,7 +3536,7 @@
                 <a:uFillTx/>
                 <a:latin typeface="Arial"/>
               </a:rPr>
-              <a:t>Docentcue:</a:t>
+              <a:t>Geen specifieke valkuil.</a:t>
             </a:r>
             <a:endParaRPr lang="en-US" sz="2000" b="0" u="none" strike="noStrike">
               <a:solidFill>
@@ -3902,17 +3551,6 @@
             <a:pPr indent="0" algn="l">
               <a:buNone/>
             </a:pPr>
-            <a:r>
-              <a:rPr lang="en-US" sz="1400" b="0" u="none" strike="noStrike">
-                <a:solidFill>
-                  <a:srgbClr val="000000"/>
-                </a:solidFill>
-                <a:effectLst/>
-                <a:uFillTx/>
-                <a:latin typeface="Arial"/>
-              </a:rPr>
-              <a:t>- Laat leerlingen eerst stil antwoorden en daarna per kaart controleren.</a:t>
-            </a:r>
             <a:endParaRPr lang="en-US" sz="2000" b="0" u="none" strike="noStrike">
               <a:solidFill>
                 <a:srgbClr val="000000"/>
@@ -3926,6 +3564,17 @@
             <a:pPr indent="0" algn="l">
               <a:buNone/>
             </a:pPr>
+            <a:r>
+              <a:rPr lang="en-US" sz="1400" b="0" u="none" strike="noStrike">
+                <a:solidFill>
+                  <a:srgbClr val="000000"/>
+                </a:solidFill>
+                <a:effectLst/>
+                <a:uFillTx/>
+                <a:latin typeface="Arial"/>
+              </a:rPr>
+              <a:t>Antwoord:</a:t>
+            </a:r>
             <a:endParaRPr lang="en-US" sz="2000" b="0" u="none" strike="noStrike">
               <a:solidFill>
                 <a:srgbClr val="000000"/>
@@ -3948,7 +3597,7 @@
                 <a:uFillTx/>
                 <a:latin typeface="Arial"/>
               </a:rPr>
-              <a:t>Overgang:</a:t>
+              <a:t>- 1. Je controleert label en eenheid, zodat het getal betekenis heeft.</a:t>
             </a:r>
             <a:endParaRPr lang="en-US" sz="2000" b="0" u="none" strike="noStrike">
               <a:solidFill>
@@ -3972,7 +3621,7 @@
                 <a:uFillTx/>
                 <a:latin typeface="Arial"/>
               </a:rPr>
-              <a:t>Gebruik dezelfde route in de oefenpagina en het grafiekenspel.</a:t>
+              <a:t>- 2. P staat verticaal; Q staat horizontaal.</a:t>
             </a:r>
             <a:endParaRPr lang="en-US" sz="2000" b="0" u="none" strike="noStrike">
               <a:solidFill>
@@ -3987,6 +3636,17 @@
             <a:pPr indent="0" algn="l">
               <a:buNone/>
             </a:pPr>
+            <a:r>
+              <a:rPr lang="en-US" sz="1400" b="0" u="none" strike="noStrike">
+                <a:solidFill>
+                  <a:srgbClr val="000000"/>
+                </a:solidFill>
+                <a:effectLst/>
+                <a:uFillTx/>
+                <a:latin typeface="Arial"/>
+              </a:rPr>
+              <a:t>- 3. Omdat je een beredeneerde schatting maakt tussen bronpunten.</a:t>
+            </a:r>
             <a:endParaRPr lang="en-US" sz="2000" b="0" u="none" strike="noStrike">
               <a:solidFill>
                 <a:srgbClr val="000000"/>
@@ -4009,7 +3669,44 @@
                 <a:uFillTx/>
                 <a:latin typeface="Arial"/>
               </a:rPr>
-              <a:t>Actie op de dia:</a:t>
+              <a:t>- 4. Omdat dezelfde data visueel steiler of groter lijken wanneer de as niet bij nul begint.</a:t>
+            </a:r>
+            <a:endParaRPr lang="en-US" sz="2000" b="0" u="none" strike="noStrike">
+              <a:solidFill>
+                <a:srgbClr val="000000"/>
+              </a:solidFill>
+              <a:effectLst/>
+              <a:uFillTx/>
+              <a:latin typeface="Arial"/>
+            </a:endParaRPr>
+          </a:p>
+          <a:p>
+            <a:pPr indent="0" algn="l">
+              <a:buNone/>
+            </a:pPr>
+            <a:endParaRPr lang="en-US" sz="2000" b="0" u="none" strike="noStrike">
+              <a:solidFill>
+                <a:srgbClr val="000000"/>
+              </a:solidFill>
+              <a:effectLst/>
+              <a:uFillTx/>
+              <a:latin typeface="Arial"/>
+            </a:endParaRPr>
+          </a:p>
+          <a:p>
+            <a:pPr indent="0" algn="l">
+              <a:buNone/>
+            </a:pPr>
+            <a:r>
+              <a:rPr lang="en-US" sz="1400" b="0" u="none" strike="noStrike">
+                <a:solidFill>
+                  <a:srgbClr val="000000"/>
+                </a:solidFill>
+                <a:effectLst/>
+                <a:uFillTx/>
+                <a:latin typeface="Arial"/>
+              </a:rPr>
+              <a:t>Overgang:</a:t>
             </a:r>
             <a:endParaRPr lang="en-US" sz="2000" b="0" u="none" strike="noStrike">
               <a:solidFill>
@@ -4036,7 +3733,7 @@
                 <a:uFillTx/>
                 <a:latin typeface="Arial"/>
               </a:rPr>
-              <a:t>Beantwoord eerst zelf; open daarna de kaart.</a:t>
+              <a:t>Gebruik dezelfde route in de oefenpagina en het grafiekenspel.</a:t>
             </a:r>
             <a:endParaRPr lang="en-US" sz="2000" b="0" u="none" strike="noStrike">
               <a:solidFill>
@@ -4100,7 +3797,7 @@
               </a:lnSpc>
               <a:buNone/>
             </a:pPr>
-            <a:fld id="{E15D748C-AE5B-47A0-A985-7010BE5E654D}" type="slidenum">
+            <a:fld id="{314C0091-4232-4E07-B402-0000953AE207}" type="slidenum">
               <a:rPr lang="en-US" sz="1400" b="0" u="none" strike="noStrike">
                 <a:solidFill>
                   <a:schemeClr val="dk1"/>
@@ -4247,17 +3944,6 @@
             <a:pPr indent="0" algn="l">
               <a:buNone/>
             </a:pPr>
-            <a:r>
-              <a:rPr lang="en-US" sz="1400" b="0" u="none" strike="noStrike">
-                <a:solidFill>
-                  <a:srgbClr val="000000"/>
-                </a:solidFill>
-                <a:effectLst/>
-                <a:uFillTx/>
-                <a:latin typeface="Arial"/>
-              </a:rPr>
-              <a:t>Rol: summary_bridge</a:t>
-            </a:r>
             <a:endParaRPr lang="en-US" sz="2000" b="0" u="none" strike="noStrike">
               <a:solidFill>
                 <a:srgbClr val="000000"/>
@@ -4280,7 +3966,7 @@
                 <a:uFillTx/>
                 <a:latin typeface="Arial"/>
               </a:rPr>
-              <a:t>Layout: summaryBridge</a:t>
+              <a:t>Vraag:</a:t>
             </a:r>
             <a:endParaRPr lang="en-US" sz="2000" b="0" u="none" strike="noStrike">
               <a:solidFill>
@@ -4295,6 +3981,17 @@
             <a:pPr indent="0" algn="l">
               <a:buNone/>
             </a:pPr>
+            <a:r>
+              <a:rPr lang="en-US" sz="1400" b="0" u="none" strike="noStrike">
+                <a:solidFill>
+                  <a:srgbClr val="000000"/>
+                </a:solidFill>
+                <a:effectLst/>
+                <a:uFillTx/>
+                <a:latin typeface="Arial"/>
+              </a:rPr>
+              <a:t>Neem deze drie checks mee naar de oefenpagina en het grafiekenspel.</a:t>
+            </a:r>
             <a:endParaRPr lang="en-US" sz="2000" b="0" u="none" strike="noStrike">
               <a:solidFill>
                 <a:srgbClr val="000000"/>
@@ -4308,17 +4005,6 @@
             <a:pPr indent="0" algn="l">
               <a:buNone/>
             </a:pPr>
-            <a:r>
-              <a:rPr lang="en-US" sz="1400" b="0" u="none" strike="noStrike">
-                <a:solidFill>
-                  <a:srgbClr val="000000"/>
-                </a:solidFill>
-                <a:effectLst/>
-                <a:uFillTx/>
-                <a:latin typeface="Arial"/>
-              </a:rPr>
-              <a:t>Kernzin:</a:t>
-            </a:r>
             <a:endParaRPr lang="en-US" sz="2000" b="0" u="none" strike="noStrike">
               <a:solidFill>
                 <a:srgbClr val="000000"/>
@@ -4341,7 +4027,7 @@
                 <a:uFillTx/>
                 <a:latin typeface="Arial"/>
               </a:rPr>
-              <a:t>De grafiekroute werkt bij elke tabel: bron lezen, grafiek controleren, claim beoordelen.</a:t>
+              <a:t>Uitleg:</a:t>
             </a:r>
             <a:endParaRPr lang="en-US" sz="2000" b="0" u="none" strike="noStrike">
               <a:solidFill>
@@ -4356,6 +4042,17 @@
             <a:pPr indent="0" algn="l">
               <a:buNone/>
             </a:pPr>
+            <a:r>
+              <a:rPr lang="en-US" sz="1400" b="0" u="none" strike="noStrike">
+                <a:solidFill>
+                  <a:srgbClr val="000000"/>
+                </a:solidFill>
+                <a:effectLst/>
+                <a:uFillTx/>
+                <a:latin typeface="Arial"/>
+              </a:rPr>
+              <a:t>- De grafiekroute werkt bij elke tabel: bron lezen, grafiek controleren, claim beoordelen.</a:t>
+            </a:r>
             <a:endParaRPr lang="en-US" sz="2000" b="0" u="none" strike="noStrike">
               <a:solidFill>
                 <a:srgbClr val="000000"/>
@@ -4378,7 +4075,7 @@
                 <a:uFillTx/>
                 <a:latin typeface="Arial"/>
               </a:rPr>
-              <a:t>Studentuitleg:</a:t>
+              <a:t>- Deze samenvatting verbindt de presentatie met de oefenpagina en het spel zonder nieuw begrip te introduceren.</a:t>
             </a:r>
             <a:endParaRPr lang="en-US" sz="2000" b="0" u="none" strike="noStrike">
               <a:solidFill>
@@ -4402,7 +4099,7 @@
                 <a:uFillTx/>
                 <a:latin typeface="Arial"/>
               </a:rPr>
-              <a:t>- Deze samenvatting verbindt de presentatie met de oefenpagina en het spel zonder nieuw begrip te introduceren.</a:t>
+              <a:t>- De kern is dat leerlingen steeds dezelfde controlevolgorde gebruiken.</a:t>
             </a:r>
             <a:endParaRPr lang="en-US" sz="2000" b="0" u="none" strike="noStrike">
               <a:solidFill>
@@ -4417,17 +4114,6 @@
             <a:pPr indent="0" algn="l">
               <a:buNone/>
             </a:pPr>
-            <a:r>
-              <a:rPr lang="en-US" sz="1400" b="0" u="none" strike="noStrike">
-                <a:solidFill>
-                  <a:srgbClr val="000000"/>
-                </a:solidFill>
-                <a:effectLst/>
-                <a:uFillTx/>
-                <a:latin typeface="Arial"/>
-              </a:rPr>
-              <a:t>- De kern is dat leerlingen steeds dezelfde controlevolgorde gebruiken.</a:t>
-            </a:r>
             <a:endParaRPr lang="en-US" sz="2000" b="0" u="none" strike="noStrike">
               <a:solidFill>
                 <a:srgbClr val="000000"/>
@@ -4441,6 +4127,17 @@
             <a:pPr indent="0" algn="l">
               <a:buNone/>
             </a:pPr>
+            <a:r>
+              <a:rPr lang="en-US" sz="1400" b="0" u="none" strike="noStrike">
+                <a:solidFill>
+                  <a:srgbClr val="000000"/>
+                </a:solidFill>
+                <a:effectLst/>
+                <a:uFillTx/>
+                <a:latin typeface="Arial"/>
+              </a:rPr>
+              <a:t>Pitfall:</a:t>
+            </a:r>
             <a:endParaRPr lang="en-US" sz="2000" b="0" u="none" strike="noStrike">
               <a:solidFill>
                 <a:srgbClr val="000000"/>
@@ -4463,7 +4160,7 @@
                 <a:uFillTx/>
                 <a:latin typeface="Arial"/>
               </a:rPr>
-              <a:t>Overgang:</a:t>
+              <a:t>Geen specifieke valkuil.</a:t>
             </a:r>
             <a:endParaRPr lang="en-US" sz="2000" b="0" u="none" strike="noStrike">
               <a:solidFill>
@@ -4478,17 +4175,6 @@
             <a:pPr indent="0" algn="l">
               <a:buNone/>
             </a:pPr>
-            <a:r>
-              <a:rPr lang="en-US" sz="1400" b="0" u="none" strike="noStrike">
-                <a:solidFill>
-                  <a:srgbClr val="000000"/>
-                </a:solidFill>
-                <a:effectLst/>
-                <a:uFillTx/>
-                <a:latin typeface="Arial"/>
-              </a:rPr>
-              <a:t>Daarna oefen je zelfstandig met dezelfde route.</a:t>
-            </a:r>
             <a:endParaRPr lang="en-US" sz="2000" b="0" u="none" strike="noStrike">
               <a:solidFill>
                 <a:srgbClr val="000000"/>
@@ -4502,19 +4188,6 @@
             <a:pPr indent="0" algn="l">
               <a:buNone/>
             </a:pPr>
-            <a:endParaRPr lang="en-US" sz="2000" b="0" u="none" strike="noStrike">
-              <a:solidFill>
-                <a:srgbClr val="000000"/>
-              </a:solidFill>
-              <a:effectLst/>
-              <a:uFillTx/>
-              <a:latin typeface="Arial"/>
-            </a:endParaRPr>
-          </a:p>
-          <a:p>
-            <a:pPr indent="0" algn="l">
-              <a:buNone/>
-            </a:pPr>
             <a:r>
               <a:rPr lang="en-US" sz="1400" b="0" u="none" strike="noStrike">
                 <a:solidFill>
@@ -4524,7 +4197,7 @@
                 <a:uFillTx/>
                 <a:latin typeface="Arial"/>
               </a:rPr>
-              <a:t>Actie op de dia:</a:t>
+              <a:t>Overgang:</a:t>
             </a:r>
             <a:endParaRPr lang="en-US" sz="2000" b="0" u="none" strike="noStrike">
               <a:solidFill>
@@ -4551,7 +4224,7 @@
                 <a:uFillTx/>
                 <a:latin typeface="Arial"/>
               </a:rPr>
-              <a:t>Neem deze drie checks mee naar de oefenpagina en het grafiekenspel.</a:t>
+              <a:t>Daarna oefen je zelfstandig met dezelfde route.</a:t>
             </a:r>
             <a:endParaRPr lang="en-US" sz="2000" b="0" u="none" strike="noStrike">
               <a:solidFill>
@@ -4615,7 +4288,7 @@
               </a:lnSpc>
               <a:buNone/>
             </a:pPr>
-            <a:fld id="{E91DE243-B49E-4F93-8075-7B22258FD87D}" type="slidenum">
+            <a:fld id="{10681843-95E8-42D3-A0AF-C343907BEEC7}" type="slidenum">
               <a:rPr lang="en-US" sz="1400" b="0" u="none" strike="noStrike">
                 <a:solidFill>
                   <a:schemeClr val="dk1"/>
@@ -24422,7 +24095,7 @@
                 <a:latin typeface="Segoe UI"/>
                 <a:ea typeface="Segoe UI"/>
               </a:rPr>
-              <a:t>Je controleert label en eenheid, zodat het getal betekenis heeft.</a:t>
+              <a:t>Denk aan kop, rij, kolom en eenheid.</a:t>
             </a:r>
             <a:endParaRPr lang="en-US" sz="1800" b="0" u="none" strike="noStrike">
               <a:solidFill>
@@ -24653,7 +24326,7 @@
                 <a:latin typeface="Segoe UI"/>
                 <a:ea typeface="Segoe UI"/>
               </a:rPr>
-              <a:t>P staat verticaal; Q staat horizontaal.</a:t>
+              <a:t>Prijs en hoeveelheid staan niet willekeurig.</a:t>
             </a:r>
             <a:endParaRPr lang="en-US" sz="1800" b="0" u="none" strike="noStrike">
               <a:solidFill>
@@ -24884,7 +24557,7 @@
                 <a:latin typeface="Segoe UI"/>
                 <a:ea typeface="Segoe UI"/>
               </a:rPr>
-              <a:t>Omdat je een beredeneerde schatting maakt tussen bronpunten.</a:t>
+              <a:t>Je leest tussen bekende punten.</a:t>
             </a:r>
             <a:endParaRPr lang="en-US" sz="1800" b="0" u="none" strike="noStrike">
               <a:solidFill>
@@ -25115,7 +24788,7 @@
                 <a:latin typeface="Segoe UI"/>
                 <a:ea typeface="Segoe UI"/>
               </a:rPr>
-              <a:t>Omdat dezelfde data visueel steiler of groter lijken wanneer de as niet bij nul begint.</a:t>
+              <a:t>Vergelijk dezelfde waarden met een andere asstart.</a:t>
             </a:r>
             <a:endParaRPr lang="en-US" sz="1800" b="0" u="none" strike="noStrike">
               <a:solidFill>

--- a/Boek 1 - Grondslagen, vraag en aanbod/1.1 Hoofdstuk Economisch denken en rekenen/1.1.3 Grafieken en tabellen/1.1.3 Grafieken en tabellen – presentatie.pptx
+++ b/Boek 1 - Grondslagen, vraag en aanbod/1.1 Hoofdstuk Economisch denken en rekenen/1.1.3 Grafieken en tabellen/1.1.3 Grafieken en tabellen – presentatie.pptx
@@ -371,7 +371,7 @@
             <a:pPr indent="0" algn="r">
               <a:buNone/>
             </a:pPr>
-            <a:fld id="{7CA8CD1F-C83C-4B68-96BE-7045BB29E35C}" type="slidenum">
+            <a:fld id="{E43582DF-7043-4033-930B-A35E2D3C2B28}" type="slidenum">
               <a:rPr lang="en-US" sz="1400" b="0" u="none" strike="noStrike">
                 <a:solidFill>
                   <a:srgbClr val="000000"/>
@@ -838,7 +838,7 @@
               </a:lnSpc>
               <a:buNone/>
             </a:pPr>
-            <a:fld id="{882045EB-5483-4A8D-A9E1-6515E04A7117}" type="slidenum">
+            <a:fld id="{396E028F-828C-4003-9DFD-8A0950596F17}" type="slidenum">
               <a:rPr lang="en-US" sz="1400" b="0" u="none" strike="noStrike">
                 <a:solidFill>
                   <a:schemeClr val="dk1"/>
@@ -1329,7 +1329,7 @@
               </a:lnSpc>
               <a:buNone/>
             </a:pPr>
-            <a:fld id="{2B361BA1-99DC-482F-A251-AD74CF2AD95A}" type="slidenum">
+            <a:fld id="{7DFBBDB6-2267-41F7-B068-D10BEEA9CF3D}" type="slidenum">
               <a:rPr lang="en-US" sz="1400" b="0" u="none" strike="noStrike">
                 <a:solidFill>
                   <a:schemeClr val="dk1"/>
@@ -1796,7 +1796,7 @@
               </a:lnSpc>
               <a:buNone/>
             </a:pPr>
-            <a:fld id="{D13262B3-9A24-40AC-8FD0-A531ECE63D57}" type="slidenum">
+            <a:fld id="{E5D95088-2D78-4338-9AB0-A90E93E3FC4F}" type="slidenum">
               <a:rPr lang="en-US" sz="1400" b="0" u="none" strike="noStrike">
                 <a:solidFill>
                   <a:schemeClr val="dk1"/>
@@ -2263,7 +2263,7 @@
               </a:lnSpc>
               <a:buNone/>
             </a:pPr>
-            <a:fld id="{B2D2A369-6CBE-4E61-BB7A-55E36C914840}" type="slidenum">
+            <a:fld id="{631FDD3B-BCA8-4E42-8DDA-3629374B9953}" type="slidenum">
               <a:rPr lang="en-US" sz="1400" b="0" u="none" strike="noStrike">
                 <a:solidFill>
                   <a:schemeClr val="dk1"/>
@@ -2730,7 +2730,7 @@
               </a:lnSpc>
               <a:buNone/>
             </a:pPr>
-            <a:fld id="{F49E433A-23C4-4DB6-9030-5FE98EB6A531}" type="slidenum">
+            <a:fld id="{4878F788-A5F7-4A35-B0BD-1F19F289B9AB}" type="slidenum">
               <a:rPr lang="en-US" sz="1400" b="0" u="none" strike="noStrike">
                 <a:solidFill>
                   <a:schemeClr val="dk1"/>
@@ -3197,7 +3197,7 @@
               </a:lnSpc>
               <a:buNone/>
             </a:pPr>
-            <a:fld id="{A985F5B3-E6A3-4B94-AE31-F39A07CD0843}" type="slidenum">
+            <a:fld id="{555020B7-9238-4B55-A008-0A7D31D98DD9}" type="slidenum">
               <a:rPr lang="en-US" sz="1400" b="0" u="none" strike="noStrike">
                 <a:solidFill>
                   <a:schemeClr val="dk1"/>
@@ -3797,7 +3797,7 @@
               </a:lnSpc>
               <a:buNone/>
             </a:pPr>
-            <a:fld id="{314C0091-4232-4E07-B402-0000953AE207}" type="slidenum">
+            <a:fld id="{48F99137-661E-4D1B-BEF9-694956ADDAC0}" type="slidenum">
               <a:rPr lang="en-US" sz="1400" b="0" u="none" strike="noStrike">
                 <a:solidFill>
                   <a:schemeClr val="dk1"/>
@@ -4288,7 +4288,7 @@
               </a:lnSpc>
               <a:buNone/>
             </a:pPr>
-            <a:fld id="{10681843-95E8-42D3-A0AF-C343907BEEC7}" type="slidenum">
+            <a:fld id="{8102207A-369E-4E3E-8AD6-97D826D72D26}" type="slidenum">
               <a:rPr lang="en-US" sz="1400" b="0" u="none" strike="noStrike">
                 <a:solidFill>
                   <a:schemeClr val="dk1"/>
